--- a/topic05-list-comprehensions/unit-05a-lectures/talk-1/a-list-comprehensions.pptx
+++ b/topic05-list-comprehensions/unit-05a-lectures/talk-1/a-list-comprehensions.pptx
@@ -556,14 +556,14 @@
           </a:ln>
           <a:extLst>
             <a:ext uri="{909E8E84-426E-40dd-AFC4-6F175D3DCCD1}">
-              <a14:hiddenFill xmlns="" xmlns:a14="http://schemas.microsoft.com/office/drawing/2010/main">
+              <a14:hiddenFill xmlns:a14="http://schemas.microsoft.com/office/drawing/2010/main" xmlns="">
                 <a:solidFill>
                   <a:srgbClr val="FFFFFF"/>
                 </a:solidFill>
               </a14:hiddenFill>
             </a:ext>
             <a:ext uri="{FAA26D3D-D897-4be2-8F04-BA451C77F1D7}">
-              <ma14:placeholderFlag xmlns="" xmlns:ma14="http://schemas.microsoft.com/office/mac/drawingml/2011/main" val="1"/>
+              <ma14:placeholderFlag xmlns:ma14="http://schemas.microsoft.com/office/mac/drawingml/2011/main" xmlns="" val="1"/>
             </a:ext>
           </a:extLst>
         </p:spPr>
@@ -907,14 +907,14 @@
           <a:ln w="9525"/>
           <a:extLst>
             <a:ext uri="{909E8E84-426E-40dd-AFC4-6F175D3DCCD1}">
-              <a14:hiddenFill xmlns="" xmlns:a14="http://schemas.microsoft.com/office/drawing/2010/main">
+              <a14:hiddenFill xmlns:a14="http://schemas.microsoft.com/office/drawing/2010/main" xmlns="">
                 <a:solidFill>
                   <a:srgbClr val="FFFFFF"/>
                 </a:solidFill>
               </a14:hiddenFill>
             </a:ext>
             <a:ext uri="{91240B29-F687-4f45-9708-019B960494DF}">
-              <a14:hiddenLine xmlns="" xmlns:a14="http://schemas.microsoft.com/office/drawing/2010/main" w="12700" cap="sq">
+              <a14:hiddenLine xmlns:a14="http://schemas.microsoft.com/office/drawing/2010/main" xmlns="" w="12700" cap="sq">
                 <a:solidFill>
                   <a:srgbClr val="000000"/>
                 </a:solidFill>
@@ -1078,14 +1078,14 @@
           <a:ln w="9525"/>
           <a:extLst>
             <a:ext uri="{909E8E84-426E-40dd-AFC4-6F175D3DCCD1}">
-              <a14:hiddenFill xmlns="" xmlns:a14="http://schemas.microsoft.com/office/drawing/2010/main">
+              <a14:hiddenFill xmlns:a14="http://schemas.microsoft.com/office/drawing/2010/main" xmlns="">
                 <a:solidFill>
                   <a:srgbClr val="FFFFFF"/>
                 </a:solidFill>
               </a14:hiddenFill>
             </a:ext>
             <a:ext uri="{91240B29-F687-4f45-9708-019B960494DF}">
-              <a14:hiddenLine xmlns="" xmlns:a14="http://schemas.microsoft.com/office/drawing/2010/main" w="9525" cap="sq">
+              <a14:hiddenLine xmlns:a14="http://schemas.microsoft.com/office/drawing/2010/main" xmlns="" w="9525" cap="sq">
                 <a:solidFill>
                   <a:srgbClr val="000000"/>
                 </a:solidFill>
@@ -1095,7 +1095,7 @@
               </a14:hiddenLine>
             </a:ext>
             <a:ext uri="{FAA26D3D-D897-4be2-8F04-BA451C77F1D7}">
-              <ma14:placeholderFlag xmlns="" xmlns:ma14="http://schemas.microsoft.com/office/mac/drawingml/2011/main" val="1"/>
+              <ma14:placeholderFlag xmlns:ma14="http://schemas.microsoft.com/office/mac/drawingml/2011/main" xmlns="" val="1"/>
             </a:ext>
           </a:extLst>
         </p:spPr>
@@ -1394,7 +1394,7 @@
             <a:fld id="{08B9EBBA-996F-894A-B54A-D6246ED52CEA}" type="datetimeFigureOut">
               <a:rPr lang="en-US" smtClean="0"/>
               <a:pPr/>
-              <a:t>1/26/26</a:t>
+              <a:t>2/5/26</a:t>
             </a:fld>
             <a:endParaRPr lang="en-US" dirty="0"/>
           </a:p>
@@ -1816,7 +1816,7 @@
             <a:fld id="{09B482E8-6E0E-1B4F-B1FD-C69DB9E858D9}" type="datetimeFigureOut">
               <a:rPr lang="en-US" smtClean="0"/>
               <a:pPr/>
-              <a:t>1/26/26</a:t>
+              <a:t>2/5/26</a:t>
             </a:fld>
             <a:endParaRPr lang="en-US" dirty="0"/>
           </a:p>
@@ -2160,7 +2160,7 @@
             <a:fld id="{09B482E8-6E0E-1B4F-B1FD-C69DB9E858D9}" type="datetimeFigureOut">
               <a:rPr lang="en-US" smtClean="0"/>
               <a:pPr/>
-              <a:t>1/26/26</a:t>
+              <a:t>2/5/26</a:t>
             </a:fld>
             <a:endParaRPr lang="en-US" dirty="0"/>
           </a:p>
@@ -2573,7 +2573,7 @@
             <a:fld id="{09B482E8-6E0E-1B4F-B1FD-C69DB9E858D9}" type="datetimeFigureOut">
               <a:rPr lang="en-US" smtClean="0"/>
               <a:pPr/>
-              <a:t>1/26/26</a:t>
+              <a:t>2/5/26</a:t>
             </a:fld>
             <a:endParaRPr lang="en-US" dirty="0"/>
           </a:p>
@@ -3149,7 +3149,7 @@
             <a:fld id="{09B482E8-6E0E-1B4F-B1FD-C69DB9E858D9}" type="datetimeFigureOut">
               <a:rPr lang="en-US" smtClean="0"/>
               <a:pPr/>
-              <a:t>1/26/26</a:t>
+              <a:t>2/5/26</a:t>
             </a:fld>
             <a:endParaRPr lang="en-US" dirty="0"/>
           </a:p>
@@ -3838,7 +3838,7 @@
             <a:fld id="{09B482E8-6E0E-1B4F-B1FD-C69DB9E858D9}" type="datetimeFigureOut">
               <a:rPr lang="en-US" smtClean="0"/>
               <a:pPr/>
-              <a:t>1/26/26</a:t>
+              <a:t>2/5/26</a:t>
             </a:fld>
             <a:endParaRPr lang="en-US" dirty="0"/>
           </a:p>
@@ -4759,7 +4759,7 @@
             <a:fld id="{09B482E8-6E0E-1B4F-B1FD-C69DB9E858D9}" type="datetimeFigureOut">
               <a:rPr lang="en-US" smtClean="0"/>
               <a:pPr/>
-              <a:t>1/26/26</a:t>
+              <a:t>2/5/26</a:t>
             </a:fld>
             <a:endParaRPr lang="en-US" dirty="0"/>
           </a:p>
@@ -5080,7 +5080,7 @@
             <a:fld id="{09B482E8-6E0E-1B4F-B1FD-C69DB9E858D9}" type="datetimeFigureOut">
               <a:rPr lang="en-US" smtClean="0"/>
               <a:pPr/>
-              <a:t>1/26/26</a:t>
+              <a:t>2/5/26</a:t>
             </a:fld>
             <a:endParaRPr lang="en-US" dirty="0"/>
           </a:p>
@@ -5351,7 +5351,7 @@
             <a:fld id="{09B482E8-6E0E-1B4F-B1FD-C69DB9E858D9}" type="datetimeFigureOut">
               <a:rPr lang="en-US" smtClean="0"/>
               <a:pPr/>
-              <a:t>1/26/26</a:t>
+              <a:t>2/5/26</a:t>
             </a:fld>
             <a:endParaRPr lang="en-US" dirty="0"/>
           </a:p>
@@ -5681,7 +5681,7 @@
             <a:fld id="{09B482E8-6E0E-1B4F-B1FD-C69DB9E858D9}" type="datetimeFigureOut">
               <a:rPr lang="en-US" smtClean="0"/>
               <a:pPr/>
-              <a:t>1/26/26</a:t>
+              <a:t>2/5/26</a:t>
             </a:fld>
             <a:endParaRPr lang="en-US" dirty="0"/>
           </a:p>
@@ -6077,7 +6077,7 @@
             <a:fld id="{8DFA1846-DA80-1C48-A609-854EA85C59AD}" type="datetimeFigureOut">
               <a:rPr lang="en-US" smtClean="0"/>
               <a:pPr/>
-              <a:t>1/26/26</a:t>
+              <a:t>2/5/26</a:t>
             </a:fld>
             <a:endParaRPr lang="en-US" dirty="0"/>
           </a:p>
@@ -6460,7 +6460,7 @@
             <a:fld id="{09B482E8-6E0E-1B4F-B1FD-C69DB9E858D9}" type="datetimeFigureOut">
               <a:rPr lang="en-US" smtClean="0"/>
               <a:pPr/>
-              <a:t>1/26/26</a:t>
+              <a:t>2/5/26</a:t>
             </a:fld>
             <a:endParaRPr lang="en-US" dirty="0"/>
           </a:p>
@@ -6973,7 +6973,7 @@
             <a:fld id="{09B482E8-6E0E-1B4F-B1FD-C69DB9E858D9}" type="datetimeFigureOut">
               <a:rPr lang="en-US" smtClean="0"/>
               <a:pPr/>
-              <a:t>1/26/26</a:t>
+              <a:t>2/5/26</a:t>
             </a:fld>
             <a:endParaRPr lang="en-US" dirty="0"/>
           </a:p>
@@ -7157,6 +7157,13 @@
             <a:schemeClr val="lt1"/>
           </a:fontRef>
         </p:style>
+        <p:txBody>
+          <a:bodyPr/>
+          <a:lstStyle/>
+          <a:p>
+            <a:endParaRPr lang="en-US"/>
+          </a:p>
+        </p:txBody>
       </p:sp>
       <p:sp>
         <p:nvSpPr>
@@ -7195,6 +7202,13 @@
             <a:schemeClr val="lt1"/>
           </a:fontRef>
         </p:style>
+        <p:txBody>
+          <a:bodyPr/>
+          <a:lstStyle/>
+          <a:p>
+            <a:endParaRPr lang="en-US"/>
+          </a:p>
+        </p:txBody>
       </p:sp>
       <p:sp>
         <p:nvSpPr>
@@ -7237,7 +7251,7 @@
             <a:fld id="{F13A34C8-038E-2045-AF43-DF7DBB8E0E9E}" type="datetimeFigureOut">
               <a:rPr lang="en-US" smtClean="0"/>
               <a:pPr/>
-              <a:t>1/26/26</a:t>
+              <a:t>2/5/26</a:t>
             </a:fld>
             <a:endParaRPr lang="en-US" dirty="0"/>
           </a:p>
@@ -7414,7 +7428,7 @@
             <a:fld id="{8818C68F-D26B-8F47-958C-23B49CF8A634}" type="datetimeFigureOut">
               <a:rPr lang="en-US" smtClean="0"/>
               <a:pPr/>
-              <a:t>1/26/26</a:t>
+              <a:t>2/5/26</a:t>
             </a:fld>
             <a:endParaRPr lang="en-US" dirty="0"/>
           </a:p>
@@ -7811,7 +7825,7 @@
             <a:fld id="{09B482E8-6E0E-1B4F-B1FD-C69DB9E858D9}" type="datetimeFigureOut">
               <a:rPr lang="en-US" smtClean="0"/>
               <a:pPr/>
-              <a:t>1/26/26</a:t>
+              <a:t>2/5/26</a:t>
             </a:fld>
             <a:endParaRPr lang="en-US" dirty="0"/>
           </a:p>
@@ -8227,7 +8241,7 @@
             <a:fld id="{09B482E8-6E0E-1B4F-B1FD-C69DB9E858D9}" type="datetimeFigureOut">
               <a:rPr lang="en-US" smtClean="0"/>
               <a:pPr/>
-              <a:t>1/26/26</a:t>
+              <a:t>2/5/26</a:t>
             </a:fld>
             <a:endParaRPr lang="en-US" dirty="0"/>
           </a:p>
@@ -8478,7 +8492,7 @@
             <a:fld id="{09B482E8-6E0E-1B4F-B1FD-C69DB9E858D9}" type="datetimeFigureOut">
               <a:rPr lang="en-US" smtClean="0"/>
               <a:pPr/>
-              <a:t>1/26/26</a:t>
+              <a:t>2/5/26</a:t>
             </a:fld>
             <a:endParaRPr lang="en-US" dirty="0"/>
           </a:p>
@@ -8916,14 +8930,14 @@
           <a:ln/>
           <a:extLst>
             <a:ext uri="{909E8E84-426E-40dd-AFC4-6F175D3DCCD1}">
-              <a14:hiddenFill xmlns="" xmlns:a14="http://schemas.microsoft.com/office/drawing/2010/main">
+              <a14:hiddenFill xmlns:a14="http://schemas.microsoft.com/office/drawing/2010/main" xmlns="">
                 <a:solidFill>
                   <a:srgbClr val="FFFFFF"/>
                 </a:solidFill>
               </a14:hiddenFill>
             </a:ext>
             <a:ext uri="{91240B29-F687-4f45-9708-019B960494DF}">
-              <a14:hiddenLine xmlns="" xmlns:a14="http://schemas.microsoft.com/office/drawing/2010/main" w="9525">
+              <a14:hiddenLine xmlns:a14="http://schemas.microsoft.com/office/drawing/2010/main" xmlns="" w="9525">
                 <a:solidFill>
                   <a:srgbClr val="000000"/>
                 </a:solidFill>
@@ -9076,14 +9090,14 @@
           </a:ln>
           <a:extLst>
             <a:ext uri="{909E8E84-426E-40dd-AFC4-6F175D3DCCD1}">
-              <a14:hiddenFill xmlns="" xmlns:a14="http://schemas.microsoft.com/office/drawing/2010/main">
+              <a14:hiddenFill xmlns:a14="http://schemas.microsoft.com/office/drawing/2010/main" xmlns="">
                 <a:solidFill>
                   <a:srgbClr val="FFFFFF"/>
                 </a:solidFill>
               </a14:hiddenFill>
             </a:ext>
             <a:ext uri="{91240B29-F687-4f45-9708-019B960494DF}">
-              <a14:hiddenLine xmlns="" xmlns:a14="http://schemas.microsoft.com/office/drawing/2010/main" w="9525">
+              <a14:hiddenLine xmlns:a14="http://schemas.microsoft.com/office/drawing/2010/main" xmlns="" w="9525">
                 <a:solidFill>
                   <a:srgbClr val="000000"/>
                 </a:solidFill>
@@ -9242,14 +9256,14 @@
           </a:ln>
           <a:extLst>
             <a:ext uri="{909E8E84-426E-40dd-AFC4-6F175D3DCCD1}">
-              <a14:hiddenFill xmlns="" xmlns:a14="http://schemas.microsoft.com/office/drawing/2010/main">
+              <a14:hiddenFill xmlns:a14="http://schemas.microsoft.com/office/drawing/2010/main" xmlns="">
                 <a:solidFill>
                   <a:srgbClr val="FFFFFF"/>
                 </a:solidFill>
               </a14:hiddenFill>
             </a:ext>
             <a:ext uri="{91240B29-F687-4f45-9708-019B960494DF}">
-              <a14:hiddenLine xmlns="" xmlns:a14="http://schemas.microsoft.com/office/drawing/2010/main" w="9525">
+              <a14:hiddenLine xmlns:a14="http://schemas.microsoft.com/office/drawing/2010/main" xmlns="" w="9525">
                 <a:solidFill>
                   <a:srgbClr val="000000"/>
                 </a:solidFill>
@@ -9307,14 +9321,14 @@
           </a:ln>
           <a:extLst>
             <a:ext uri="{909E8E84-426E-40dd-AFC4-6F175D3DCCD1}">
-              <a14:hiddenFill xmlns="" xmlns:a14="http://schemas.microsoft.com/office/drawing/2010/main">
+              <a14:hiddenFill xmlns:a14="http://schemas.microsoft.com/office/drawing/2010/main" xmlns="">
                 <a:solidFill>
                   <a:srgbClr val="FFFFFF"/>
                 </a:solidFill>
               </a14:hiddenFill>
             </a:ext>
             <a:ext uri="{91240B29-F687-4f45-9708-019B960494DF}">
-              <a14:hiddenLine xmlns="" xmlns:a14="http://schemas.microsoft.com/office/drawing/2010/main" w="9525">
+              <a14:hiddenLine xmlns:a14="http://schemas.microsoft.com/office/drawing/2010/main" xmlns="" w="9525">
                 <a:solidFill>
                   <a:srgbClr val="000000"/>
                 </a:solidFill>
@@ -9366,14 +9380,14 @@
           <a:ln/>
           <a:extLst>
             <a:ext uri="{909E8E84-426E-40dd-AFC4-6F175D3DCCD1}">
-              <a14:hiddenFill xmlns="" xmlns:a14="http://schemas.microsoft.com/office/drawing/2010/main">
+              <a14:hiddenFill xmlns:a14="http://schemas.microsoft.com/office/drawing/2010/main" xmlns="">
                 <a:solidFill>
                   <a:srgbClr val="FFFFFF"/>
                 </a:solidFill>
               </a14:hiddenFill>
             </a:ext>
             <a:ext uri="{91240B29-F687-4f45-9708-019B960494DF}">
-              <a14:hiddenLine xmlns="" xmlns:a14="http://schemas.microsoft.com/office/drawing/2010/main" w="9525">
+              <a14:hiddenLine xmlns:a14="http://schemas.microsoft.com/office/drawing/2010/main" xmlns="" w="9525">
                 <a:solidFill>
                   <a:srgbClr val="000000"/>
                 </a:solidFill>
@@ -9530,7 +9544,7 @@
           </a:ln>
           <a:extLst>
             <a:ext uri="{91240B29-F687-4f45-9708-019B960494DF}">
-              <a14:hiddenLine xmlns="" xmlns:a14="http://schemas.microsoft.com/office/drawing/2010/main" w="12700" cap="sq">
+              <a14:hiddenLine xmlns:a14="http://schemas.microsoft.com/office/drawing/2010/main" xmlns="" w="12700" cap="sq">
                 <a:solidFill>
                   <a:srgbClr val="000000"/>
                 </a:solidFill>
@@ -9749,14 +9763,14 @@
           </a:ln>
           <a:extLst>
             <a:ext uri="{909E8E84-426E-40dd-AFC4-6F175D3DCCD1}">
-              <a14:hiddenFill xmlns="" xmlns:a14="http://schemas.microsoft.com/office/drawing/2010/main">
+              <a14:hiddenFill xmlns:a14="http://schemas.microsoft.com/office/drawing/2010/main" xmlns="">
                 <a:solidFill>
                   <a:srgbClr val="FFFFFF"/>
                 </a:solidFill>
               </a14:hiddenFill>
             </a:ext>
             <a:ext uri="{91240B29-F687-4f45-9708-019B960494DF}">
-              <a14:hiddenLine xmlns="" xmlns:a14="http://schemas.microsoft.com/office/drawing/2010/main" w="12700" cap="sq">
+              <a14:hiddenLine xmlns:a14="http://schemas.microsoft.com/office/drawing/2010/main" xmlns="" w="12700" cap="sq">
                 <a:solidFill>
                   <a:srgbClr val="000000"/>
                 </a:solidFill>
@@ -9917,14 +9931,14 @@
           </a:ln>
           <a:extLst>
             <a:ext uri="{909E8E84-426E-40dd-AFC4-6F175D3DCCD1}">
-              <a14:hiddenFill xmlns="" xmlns:a14="http://schemas.microsoft.com/office/drawing/2010/main">
+              <a14:hiddenFill xmlns:a14="http://schemas.microsoft.com/office/drawing/2010/main" xmlns="">
                 <a:solidFill>
                   <a:srgbClr val="FFFFFF"/>
                 </a:solidFill>
               </a14:hiddenFill>
             </a:ext>
             <a:ext uri="{91240B29-F687-4f45-9708-019B960494DF}">
-              <a14:hiddenLine xmlns="" xmlns:a14="http://schemas.microsoft.com/office/drawing/2010/main" w="12700" cap="sq">
+              <a14:hiddenLine xmlns:a14="http://schemas.microsoft.com/office/drawing/2010/main" xmlns="" w="12700" cap="sq">
                 <a:solidFill>
                   <a:srgbClr val="000000"/>
                 </a:solidFill>
@@ -10081,7 +10095,7 @@
           </a:ln>
           <a:extLst>
             <a:ext uri="{91240B29-F687-4f45-9708-019B960494DF}">
-              <a14:hiddenLine xmlns="" xmlns:a14="http://schemas.microsoft.com/office/drawing/2010/main" w="12700" cap="sq">
+              <a14:hiddenLine xmlns:a14="http://schemas.microsoft.com/office/drawing/2010/main" xmlns="" w="12700" cap="sq">
                 <a:solidFill>
                   <a:srgbClr val="000000"/>
                 </a:solidFill>
@@ -10521,14 +10535,14 @@
           <a:ln/>
           <a:extLst>
             <a:ext uri="{909E8E84-426E-40dd-AFC4-6F175D3DCCD1}">
-              <a14:hiddenFill xmlns="" xmlns:a14="http://schemas.microsoft.com/office/drawing/2010/main">
+              <a14:hiddenFill xmlns:a14="http://schemas.microsoft.com/office/drawing/2010/main" xmlns="">
                 <a:solidFill>
                   <a:srgbClr val="FFFFFF"/>
                 </a:solidFill>
               </a14:hiddenFill>
             </a:ext>
             <a:ext uri="{91240B29-F687-4f45-9708-019B960494DF}">
-              <a14:hiddenLine xmlns="" xmlns:a14="http://schemas.microsoft.com/office/drawing/2010/main" w="9525">
+              <a14:hiddenLine xmlns:a14="http://schemas.microsoft.com/office/drawing/2010/main" xmlns="" w="9525">
                 <a:solidFill>
                   <a:srgbClr val="000000"/>
                 </a:solidFill>
@@ -10681,14 +10695,14 @@
           </a:ln>
           <a:extLst>
             <a:ext uri="{909E8E84-426E-40dd-AFC4-6F175D3DCCD1}">
-              <a14:hiddenFill xmlns="" xmlns:a14="http://schemas.microsoft.com/office/drawing/2010/main">
+              <a14:hiddenFill xmlns:a14="http://schemas.microsoft.com/office/drawing/2010/main" xmlns="">
                 <a:solidFill>
                   <a:srgbClr val="FFFFFF"/>
                 </a:solidFill>
               </a14:hiddenFill>
             </a:ext>
             <a:ext uri="{91240B29-F687-4f45-9708-019B960494DF}">
-              <a14:hiddenLine xmlns="" xmlns:a14="http://schemas.microsoft.com/office/drawing/2010/main" w="12700" cap="sq">
+              <a14:hiddenLine xmlns:a14="http://schemas.microsoft.com/office/drawing/2010/main" xmlns="" w="12700" cap="sq">
                 <a:solidFill>
                   <a:srgbClr val="000000"/>
                 </a:solidFill>
@@ -10853,7 +10867,7 @@
           </a:ln>
           <a:extLst>
             <a:ext uri="{91240B29-F687-4f45-9708-019B960494DF}">
-              <a14:hiddenLine xmlns="" xmlns:a14="http://schemas.microsoft.com/office/drawing/2010/main" w="12700" cap="sq">
+              <a14:hiddenLine xmlns:a14="http://schemas.microsoft.com/office/drawing/2010/main" xmlns="" w="12700" cap="sq">
                 <a:solidFill>
                   <a:srgbClr val="000000"/>
                 </a:solidFill>
@@ -11043,14 +11057,14 @@
           </a:ln>
           <a:extLst>
             <a:ext uri="{909E8E84-426E-40dd-AFC4-6F175D3DCCD1}">
-              <a14:hiddenFill xmlns="" xmlns:a14="http://schemas.microsoft.com/office/drawing/2010/main">
+              <a14:hiddenFill xmlns:a14="http://schemas.microsoft.com/office/drawing/2010/main" xmlns="">
                 <a:solidFill>
                   <a:srgbClr val="FFFFFF"/>
                 </a:solidFill>
               </a14:hiddenFill>
             </a:ext>
             <a:ext uri="{91240B29-F687-4f45-9708-019B960494DF}">
-              <a14:hiddenLine xmlns="" xmlns:a14="http://schemas.microsoft.com/office/drawing/2010/main" w="12700" cap="sq">
+              <a14:hiddenLine xmlns:a14="http://schemas.microsoft.com/office/drawing/2010/main" xmlns="" w="12700" cap="sq">
                 <a:solidFill>
                   <a:srgbClr val="000000"/>
                 </a:solidFill>
@@ -11207,7 +11221,7 @@
           </a:ln>
           <a:extLst>
             <a:ext uri="{91240B29-F687-4f45-9708-019B960494DF}">
-              <a14:hiddenLine xmlns="" xmlns:a14="http://schemas.microsoft.com/office/drawing/2010/main" w="12700" cap="sq">
+              <a14:hiddenLine xmlns:a14="http://schemas.microsoft.com/office/drawing/2010/main" xmlns="" w="12700" cap="sq">
                 <a:solidFill>
                   <a:srgbClr val="000000"/>
                 </a:solidFill>
@@ -11711,14 +11725,14 @@
           <a:ln/>
           <a:extLst>
             <a:ext uri="{909E8E84-426E-40dd-AFC4-6F175D3DCCD1}">
-              <a14:hiddenFill xmlns="" xmlns:a14="http://schemas.microsoft.com/office/drawing/2010/main">
+              <a14:hiddenFill xmlns:a14="http://schemas.microsoft.com/office/drawing/2010/main" xmlns="">
                 <a:solidFill>
                   <a:srgbClr val="FFFFFF"/>
                 </a:solidFill>
               </a14:hiddenFill>
             </a:ext>
             <a:ext uri="{91240B29-F687-4f45-9708-019B960494DF}">
-              <a14:hiddenLine xmlns="" xmlns:a14="http://schemas.microsoft.com/office/drawing/2010/main" w="9525">
+              <a14:hiddenLine xmlns:a14="http://schemas.microsoft.com/office/drawing/2010/main" xmlns="" w="9525">
                 <a:solidFill>
                   <a:srgbClr val="000000"/>
                 </a:solidFill>
@@ -11871,14 +11885,14 @@
           </a:ln>
           <a:extLst>
             <a:ext uri="{909E8E84-426E-40dd-AFC4-6F175D3DCCD1}">
-              <a14:hiddenFill xmlns="" xmlns:a14="http://schemas.microsoft.com/office/drawing/2010/main">
+              <a14:hiddenFill xmlns:a14="http://schemas.microsoft.com/office/drawing/2010/main" xmlns="">
                 <a:solidFill>
                   <a:srgbClr val="FFFFFF"/>
                 </a:solidFill>
               </a14:hiddenFill>
             </a:ext>
             <a:ext uri="{91240B29-F687-4f45-9708-019B960494DF}">
-              <a14:hiddenLine xmlns="" xmlns:a14="http://schemas.microsoft.com/office/drawing/2010/main" w="12700" cap="sq">
+              <a14:hiddenLine xmlns:a14="http://schemas.microsoft.com/office/drawing/2010/main" xmlns="" w="12700" cap="sq">
                 <a:solidFill>
                   <a:srgbClr val="000000"/>
                 </a:solidFill>
@@ -12043,7 +12057,7 @@
           </a:ln>
           <a:extLst>
             <a:ext uri="{91240B29-F687-4f45-9708-019B960494DF}">
-              <a14:hiddenLine xmlns="" xmlns:a14="http://schemas.microsoft.com/office/drawing/2010/main" w="12700" cap="sq">
+              <a14:hiddenLine xmlns:a14="http://schemas.microsoft.com/office/drawing/2010/main" xmlns="" w="12700" cap="sq">
                 <a:solidFill>
                   <a:srgbClr val="000000"/>
                 </a:solidFill>
@@ -12242,14 +12256,14 @@
           </a:ln>
           <a:extLst>
             <a:ext uri="{909E8E84-426E-40dd-AFC4-6F175D3DCCD1}">
-              <a14:hiddenFill xmlns="" xmlns:a14="http://schemas.microsoft.com/office/drawing/2010/main">
+              <a14:hiddenFill xmlns:a14="http://schemas.microsoft.com/office/drawing/2010/main" xmlns="">
                 <a:solidFill>
                   <a:srgbClr val="FFFFFF"/>
                 </a:solidFill>
               </a14:hiddenFill>
             </a:ext>
             <a:ext uri="{91240B29-F687-4f45-9708-019B960494DF}">
-              <a14:hiddenLine xmlns="" xmlns:a14="http://schemas.microsoft.com/office/drawing/2010/main" w="12700" cap="sq">
+              <a14:hiddenLine xmlns:a14="http://schemas.microsoft.com/office/drawing/2010/main" xmlns="" w="12700" cap="sq">
                 <a:solidFill>
                   <a:srgbClr val="000000"/>
                 </a:solidFill>
@@ -12406,7 +12420,7 @@
           </a:ln>
           <a:extLst>
             <a:ext uri="{91240B29-F687-4f45-9708-019B960494DF}">
-              <a14:hiddenLine xmlns="" xmlns:a14="http://schemas.microsoft.com/office/drawing/2010/main" w="12700" cap="sq">
+              <a14:hiddenLine xmlns:a14="http://schemas.microsoft.com/office/drawing/2010/main" xmlns="" w="12700" cap="sq">
                 <a:solidFill>
                   <a:srgbClr val="000000"/>
                 </a:solidFill>
@@ -12983,14 +12997,14 @@
           <a:ln/>
           <a:extLst>
             <a:ext uri="{909E8E84-426E-40dd-AFC4-6F175D3DCCD1}">
-              <a14:hiddenFill xmlns="" xmlns:a14="http://schemas.microsoft.com/office/drawing/2010/main">
+              <a14:hiddenFill xmlns:a14="http://schemas.microsoft.com/office/drawing/2010/main" xmlns="">
                 <a:solidFill>
                   <a:srgbClr val="FFFFFF"/>
                 </a:solidFill>
               </a14:hiddenFill>
             </a:ext>
             <a:ext uri="{91240B29-F687-4f45-9708-019B960494DF}">
-              <a14:hiddenLine xmlns="" xmlns:a14="http://schemas.microsoft.com/office/drawing/2010/main" w="9525">
+              <a14:hiddenLine xmlns:a14="http://schemas.microsoft.com/office/drawing/2010/main" xmlns="" w="9525">
                 <a:solidFill>
                   <a:srgbClr val="000000"/>
                 </a:solidFill>
@@ -13143,14 +13157,14 @@
           </a:ln>
           <a:extLst>
             <a:ext uri="{909E8E84-426E-40dd-AFC4-6F175D3DCCD1}">
-              <a14:hiddenFill xmlns="" xmlns:a14="http://schemas.microsoft.com/office/drawing/2010/main">
+              <a14:hiddenFill xmlns:a14="http://schemas.microsoft.com/office/drawing/2010/main" xmlns="">
                 <a:solidFill>
                   <a:srgbClr val="FFFFFF"/>
                 </a:solidFill>
               </a14:hiddenFill>
             </a:ext>
             <a:ext uri="{91240B29-F687-4f45-9708-019B960494DF}">
-              <a14:hiddenLine xmlns="" xmlns:a14="http://schemas.microsoft.com/office/drawing/2010/main" w="12700" cap="sq">
+              <a14:hiddenLine xmlns:a14="http://schemas.microsoft.com/office/drawing/2010/main" xmlns="" w="12700" cap="sq">
                 <a:solidFill>
                   <a:srgbClr val="000000"/>
                 </a:solidFill>
@@ -13315,7 +13329,7 @@
           </a:ln>
           <a:extLst>
             <a:ext uri="{91240B29-F687-4f45-9708-019B960494DF}">
-              <a14:hiddenLine xmlns="" xmlns:a14="http://schemas.microsoft.com/office/drawing/2010/main" w="12700" cap="sq">
+              <a14:hiddenLine xmlns:a14="http://schemas.microsoft.com/office/drawing/2010/main" xmlns="" w="12700" cap="sq">
                 <a:solidFill>
                   <a:srgbClr val="000000"/>
                 </a:solidFill>
@@ -13508,14 +13522,14 @@
           </a:ln>
           <a:extLst>
             <a:ext uri="{909E8E84-426E-40dd-AFC4-6F175D3DCCD1}">
-              <a14:hiddenFill xmlns="" xmlns:a14="http://schemas.microsoft.com/office/drawing/2010/main">
+              <a14:hiddenFill xmlns:a14="http://schemas.microsoft.com/office/drawing/2010/main" xmlns="">
                 <a:solidFill>
                   <a:srgbClr val="FFFFFF"/>
                 </a:solidFill>
               </a14:hiddenFill>
             </a:ext>
             <a:ext uri="{91240B29-F687-4f45-9708-019B960494DF}">
-              <a14:hiddenLine xmlns="" xmlns:a14="http://schemas.microsoft.com/office/drawing/2010/main" w="12700" cap="sq">
+              <a14:hiddenLine xmlns:a14="http://schemas.microsoft.com/office/drawing/2010/main" xmlns="" w="12700" cap="sq">
                 <a:solidFill>
                   <a:srgbClr val="000000"/>
                 </a:solidFill>
@@ -13672,7 +13686,7 @@
           </a:ln>
           <a:extLst>
             <a:ext uri="{91240B29-F687-4f45-9708-019B960494DF}">
-              <a14:hiddenLine xmlns="" xmlns:a14="http://schemas.microsoft.com/office/drawing/2010/main" w="12700" cap="sq">
+              <a14:hiddenLine xmlns:a14="http://schemas.microsoft.com/office/drawing/2010/main" xmlns="" w="12700" cap="sq">
                 <a:solidFill>
                   <a:srgbClr val="000000"/>
                 </a:solidFill>
@@ -14323,14 +14337,14 @@
           <a:ln/>
           <a:extLst>
             <a:ext uri="{909E8E84-426E-40dd-AFC4-6F175D3DCCD1}">
-              <a14:hiddenFill xmlns="" xmlns:a14="http://schemas.microsoft.com/office/drawing/2010/main">
+              <a14:hiddenFill xmlns:a14="http://schemas.microsoft.com/office/drawing/2010/main" xmlns="">
                 <a:solidFill>
                   <a:srgbClr val="FFFFFF"/>
                 </a:solidFill>
               </a14:hiddenFill>
             </a:ext>
             <a:ext uri="{91240B29-F687-4f45-9708-019B960494DF}">
-              <a14:hiddenLine xmlns="" xmlns:a14="http://schemas.microsoft.com/office/drawing/2010/main" w="9525">
+              <a14:hiddenLine xmlns:a14="http://schemas.microsoft.com/office/drawing/2010/main" xmlns="" w="9525">
                 <a:solidFill>
                   <a:srgbClr val="000000"/>
                 </a:solidFill>
@@ -14483,14 +14497,14 @@
           </a:ln>
           <a:extLst>
             <a:ext uri="{909E8E84-426E-40dd-AFC4-6F175D3DCCD1}">
-              <a14:hiddenFill xmlns="" xmlns:a14="http://schemas.microsoft.com/office/drawing/2010/main">
+              <a14:hiddenFill xmlns:a14="http://schemas.microsoft.com/office/drawing/2010/main" xmlns="">
                 <a:solidFill>
                   <a:srgbClr val="FFFFFF"/>
                 </a:solidFill>
               </a14:hiddenFill>
             </a:ext>
             <a:ext uri="{91240B29-F687-4f45-9708-019B960494DF}">
-              <a14:hiddenLine xmlns="" xmlns:a14="http://schemas.microsoft.com/office/drawing/2010/main" w="12700" cap="sq">
+              <a14:hiddenLine xmlns:a14="http://schemas.microsoft.com/office/drawing/2010/main" xmlns="" w="12700" cap="sq">
                 <a:solidFill>
                   <a:srgbClr val="000000"/>
                 </a:solidFill>
@@ -14651,14 +14665,14 @@
           </a:ln>
           <a:extLst>
             <a:ext uri="{909E8E84-426E-40dd-AFC4-6F175D3DCCD1}">
-              <a14:hiddenFill xmlns="" xmlns:a14="http://schemas.microsoft.com/office/drawing/2010/main">
+              <a14:hiddenFill xmlns:a14="http://schemas.microsoft.com/office/drawing/2010/main" xmlns="">
                 <a:solidFill>
                   <a:srgbClr val="FFFFFF"/>
                 </a:solidFill>
               </a14:hiddenFill>
             </a:ext>
             <a:ext uri="{91240B29-F687-4f45-9708-019B960494DF}">
-              <a14:hiddenLine xmlns="" xmlns:a14="http://schemas.microsoft.com/office/drawing/2010/main" w="12700" cap="sq">
+              <a14:hiddenLine xmlns:a14="http://schemas.microsoft.com/office/drawing/2010/main" xmlns="" w="12700" cap="sq">
                 <a:solidFill>
                   <a:srgbClr val="000000"/>
                 </a:solidFill>
@@ -14813,7 +14827,7 @@
           </a:ln>
           <a:extLst>
             <a:ext uri="{91240B29-F687-4f45-9708-019B960494DF}">
-              <a14:hiddenLine xmlns="" xmlns:a14="http://schemas.microsoft.com/office/drawing/2010/main" w="12700" cap="sq">
+              <a14:hiddenLine xmlns:a14="http://schemas.microsoft.com/office/drawing/2010/main" xmlns="" w="12700" cap="sq">
                 <a:solidFill>
                   <a:srgbClr val="000000"/>
                 </a:solidFill>
@@ -15049,7 +15063,7 @@
           </a:ln>
           <a:extLst>
             <a:ext uri="{91240B29-F687-4f45-9708-019B960494DF}">
-              <a14:hiddenLine xmlns="" xmlns:a14="http://schemas.microsoft.com/office/drawing/2010/main" w="12700" cap="sq">
+              <a14:hiddenLine xmlns:a14="http://schemas.microsoft.com/office/drawing/2010/main" xmlns="" w="12700" cap="sq">
                 <a:solidFill>
                   <a:srgbClr val="000000"/>
                 </a:solidFill>
@@ -15286,7 +15300,7 @@
           </a:ln>
           <a:extLst>
             <a:ext uri="{909E8E84-426E-40dd-AFC4-6F175D3DCCD1}">
-              <a14:hiddenFill xmlns="" xmlns:a14="http://schemas.microsoft.com/office/drawing/2010/main">
+              <a14:hiddenFill xmlns:a14="http://schemas.microsoft.com/office/drawing/2010/main" xmlns="">
                 <a:solidFill>
                   <a:srgbClr val="FFFFFF"/>
                 </a:solidFill>
@@ -15778,14 +15792,14 @@
           <a:ln/>
           <a:extLst>
             <a:ext uri="{909E8E84-426E-40dd-AFC4-6F175D3DCCD1}">
-              <a14:hiddenFill xmlns="" xmlns:a14="http://schemas.microsoft.com/office/drawing/2010/main">
+              <a14:hiddenFill xmlns:a14="http://schemas.microsoft.com/office/drawing/2010/main" xmlns="">
                 <a:solidFill>
                   <a:srgbClr val="FFFFFF"/>
                 </a:solidFill>
               </a14:hiddenFill>
             </a:ext>
             <a:ext uri="{91240B29-F687-4f45-9708-019B960494DF}">
-              <a14:hiddenLine xmlns="" xmlns:a14="http://schemas.microsoft.com/office/drawing/2010/main" w="9525">
+              <a14:hiddenLine xmlns:a14="http://schemas.microsoft.com/office/drawing/2010/main" xmlns="" w="9525">
                 <a:solidFill>
                   <a:srgbClr val="000000"/>
                 </a:solidFill>
@@ -15938,14 +15952,14 @@
           </a:ln>
           <a:extLst>
             <a:ext uri="{909E8E84-426E-40dd-AFC4-6F175D3DCCD1}">
-              <a14:hiddenFill xmlns="" xmlns:a14="http://schemas.microsoft.com/office/drawing/2010/main">
+              <a14:hiddenFill xmlns:a14="http://schemas.microsoft.com/office/drawing/2010/main" xmlns="">
                 <a:solidFill>
                   <a:srgbClr val="FFFFFF"/>
                 </a:solidFill>
               </a14:hiddenFill>
             </a:ext>
             <a:ext uri="{91240B29-F687-4f45-9708-019B960494DF}">
-              <a14:hiddenLine xmlns="" xmlns:a14="http://schemas.microsoft.com/office/drawing/2010/main" w="12700" cap="sq">
+              <a14:hiddenLine xmlns:a14="http://schemas.microsoft.com/office/drawing/2010/main" xmlns="" w="12700" cap="sq">
                 <a:solidFill>
                   <a:srgbClr val="000000"/>
                 </a:solidFill>
@@ -16106,14 +16120,14 @@
           </a:ln>
           <a:extLst>
             <a:ext uri="{909E8E84-426E-40dd-AFC4-6F175D3DCCD1}">
-              <a14:hiddenFill xmlns="" xmlns:a14="http://schemas.microsoft.com/office/drawing/2010/main">
+              <a14:hiddenFill xmlns:a14="http://schemas.microsoft.com/office/drawing/2010/main" xmlns="">
                 <a:solidFill>
                   <a:srgbClr val="FFFFFF"/>
                 </a:solidFill>
               </a14:hiddenFill>
             </a:ext>
             <a:ext uri="{91240B29-F687-4f45-9708-019B960494DF}">
-              <a14:hiddenLine xmlns="" xmlns:a14="http://schemas.microsoft.com/office/drawing/2010/main" w="12700" cap="sq">
+              <a14:hiddenLine xmlns:a14="http://schemas.microsoft.com/office/drawing/2010/main" xmlns="" w="12700" cap="sq">
                 <a:solidFill>
                   <a:srgbClr val="000000"/>
                 </a:solidFill>
@@ -16270,7 +16284,7 @@
           </a:ln>
           <a:extLst>
             <a:ext uri="{91240B29-F687-4f45-9708-019B960494DF}">
-              <a14:hiddenLine xmlns="" xmlns:a14="http://schemas.microsoft.com/office/drawing/2010/main" w="12700" cap="sq">
+              <a14:hiddenLine xmlns:a14="http://schemas.microsoft.com/office/drawing/2010/main" xmlns="" w="12700" cap="sq">
                 <a:solidFill>
                   <a:srgbClr val="000000"/>
                 </a:solidFill>
@@ -16505,194 +16519,6 @@
                 <a:latin typeface="Lucida Sans Typewriter" charset="0"/>
               </a:rPr>
               <a:t>]</a:t>
-            </a:r>
-          </a:p>
-        </p:txBody>
-      </p:sp>
-      <p:sp>
-        <p:nvSpPr>
-          <p:cNvPr id="30725" name="Text Box 5"/>
-          <p:cNvSpPr txBox="1">
-            <a:spLocks noChangeArrowheads="1"/>
-          </p:cNvSpPr>
-          <p:nvPr/>
-        </p:nvSpPr>
-        <p:spPr bwMode="auto">
-          <a:xfrm>
-            <a:off x="4330132" y="4527567"/>
-            <a:ext cx="3531736" cy="1938992"/>
-          </a:xfrm>
-          <a:prstGeom prst="rect">
-            <a:avLst/>
-          </a:prstGeom>
-          <a:solidFill>
-            <a:schemeClr val="accent1"/>
-          </a:solidFill>
-          <a:ln>
-            <a:solidFill>
-              <a:schemeClr val="bg1"/>
-            </a:solidFill>
-          </a:ln>
-          <a:extLst>
-            <a:ext uri="{91240B29-F687-4f45-9708-019B960494DF}">
-              <a14:hiddenLine xmlns="" xmlns:a14="http://schemas.microsoft.com/office/drawing/2010/main" w="12700" cap="sq">
-                <a:solidFill>
-                  <a:srgbClr val="000000"/>
-                </a:solidFill>
-                <a:miter lim="800000"/>
-                <a:headEnd/>
-                <a:tailEnd/>
-              </a14:hiddenLine>
-            </a:ext>
-          </a:extLst>
-        </p:spPr>
-        <p:txBody>
-          <a:bodyPr wrap="none" anchor="ctr">
-            <a:spAutoFit/>
-          </a:bodyPr>
-          <a:lstStyle>
-            <a:lvl1pPr>
-              <a:defRPr sz="2800">
-                <a:solidFill>
-                  <a:schemeClr val="tx1"/>
-                </a:solidFill>
-                <a:latin typeface="Tahoma" charset="0"/>
-                <a:ea typeface="ＭＳ Ｐゴシック" charset="0"/>
-                <a:cs typeface="ＭＳ Ｐゴシック" charset="0"/>
-              </a:defRPr>
-            </a:lvl1pPr>
-            <a:lvl2pPr marL="742950" indent="-285750">
-              <a:defRPr sz="2800">
-                <a:solidFill>
-                  <a:schemeClr val="tx1"/>
-                </a:solidFill>
-                <a:latin typeface="Tahoma" charset="0"/>
-                <a:ea typeface="ＭＳ Ｐゴシック" charset="0"/>
-              </a:defRPr>
-            </a:lvl2pPr>
-            <a:lvl3pPr marL="1143000" indent="-228600">
-              <a:defRPr sz="2800">
-                <a:solidFill>
-                  <a:schemeClr val="tx1"/>
-                </a:solidFill>
-                <a:latin typeface="Tahoma" charset="0"/>
-                <a:ea typeface="ＭＳ Ｐゴシック" charset="0"/>
-              </a:defRPr>
-            </a:lvl3pPr>
-            <a:lvl4pPr marL="1600200" indent="-228600">
-              <a:defRPr sz="2800">
-                <a:solidFill>
-                  <a:schemeClr val="tx1"/>
-                </a:solidFill>
-                <a:latin typeface="Tahoma" charset="0"/>
-                <a:ea typeface="ＭＳ Ｐゴシック" charset="0"/>
-              </a:defRPr>
-            </a:lvl4pPr>
-            <a:lvl5pPr marL="2057400" indent="-228600">
-              <a:defRPr sz="2800">
-                <a:solidFill>
-                  <a:schemeClr val="tx1"/>
-                </a:solidFill>
-                <a:latin typeface="Tahoma" charset="0"/>
-                <a:ea typeface="ＭＳ Ｐゴシック" charset="0"/>
-              </a:defRPr>
-            </a:lvl5pPr>
-            <a:lvl6pPr marL="2514600" indent="-228600" eaLnBrk="0" fontAlgn="base" hangingPunct="0">
-              <a:spcBef>
-                <a:spcPct val="0"/>
-              </a:spcBef>
-              <a:spcAft>
-                <a:spcPct val="0"/>
-              </a:spcAft>
-              <a:defRPr sz="2800">
-                <a:solidFill>
-                  <a:schemeClr val="tx1"/>
-                </a:solidFill>
-                <a:latin typeface="Tahoma" charset="0"/>
-                <a:ea typeface="ＭＳ Ｐゴシック" charset="0"/>
-              </a:defRPr>
-            </a:lvl6pPr>
-            <a:lvl7pPr marL="2971800" indent="-228600" eaLnBrk="0" fontAlgn="base" hangingPunct="0">
-              <a:spcBef>
-                <a:spcPct val="0"/>
-              </a:spcBef>
-              <a:spcAft>
-                <a:spcPct val="0"/>
-              </a:spcAft>
-              <a:defRPr sz="2800">
-                <a:solidFill>
-                  <a:schemeClr val="tx1"/>
-                </a:solidFill>
-                <a:latin typeface="Tahoma" charset="0"/>
-                <a:ea typeface="ＭＳ Ｐゴシック" charset="0"/>
-              </a:defRPr>
-            </a:lvl7pPr>
-            <a:lvl8pPr marL="3429000" indent="-228600" eaLnBrk="0" fontAlgn="base" hangingPunct="0">
-              <a:spcBef>
-                <a:spcPct val="0"/>
-              </a:spcBef>
-              <a:spcAft>
-                <a:spcPct val="0"/>
-              </a:spcAft>
-              <a:defRPr sz="2800">
-                <a:solidFill>
-                  <a:schemeClr val="tx1"/>
-                </a:solidFill>
-                <a:latin typeface="Tahoma" charset="0"/>
-                <a:ea typeface="ＭＳ Ｐゴシック" charset="0"/>
-              </a:defRPr>
-            </a:lvl8pPr>
-            <a:lvl9pPr marL="3886200" indent="-228600" eaLnBrk="0" fontAlgn="base" hangingPunct="0">
-              <a:spcBef>
-                <a:spcPct val="0"/>
-              </a:spcBef>
-              <a:spcAft>
-                <a:spcPct val="0"/>
-              </a:spcAft>
-              <a:defRPr sz="2800">
-                <a:solidFill>
-                  <a:schemeClr val="tx1"/>
-                </a:solidFill>
-                <a:latin typeface="Tahoma" charset="0"/>
-                <a:ea typeface="ＭＳ Ｐゴシック" charset="0"/>
-              </a:defRPr>
-            </a:lvl9pPr>
-          </a:lstStyle>
-          <a:p>
-            <a:r>
-              <a:rPr lang="en-US" sz="2400" dirty="0">
-                <a:latin typeface="Lucida Sans Typewriter" charset="0"/>
-              </a:rPr>
-              <a:t>&gt; sorted [1,2,3,4]</a:t>
-            </a:r>
-          </a:p>
-          <a:p>
-            <a:r>
-              <a:rPr lang="en-US" sz="2400" dirty="0">
-                <a:latin typeface="Lucida Sans Typewriter" charset="0"/>
-              </a:rPr>
-              <a:t>True</a:t>
-            </a:r>
-          </a:p>
-          <a:p>
-            <a:endParaRPr lang="en-US" sz="2400" dirty="0">
-              <a:latin typeface="Lucida Sans Typewriter" charset="0"/>
-            </a:endParaRPr>
-          </a:p>
-          <a:p>
-            <a:r>
-              <a:rPr lang="en-US" sz="2400" dirty="0">
-                <a:latin typeface="Lucida Sans Typewriter" charset="0"/>
-              </a:rPr>
-              <a:t>&gt; sorted [1,3,2,4]</a:t>
-            </a:r>
-          </a:p>
-          <a:p>
-            <a:r>
-              <a:rPr lang="en-US" sz="2400" dirty="0">
-                <a:latin typeface="Lucida Sans Typewriter" charset="0"/>
-              </a:rPr>
-              <a:t>False</a:t>
             </a:r>
           </a:p>
         </p:txBody>
@@ -16736,7 +16562,7 @@
           </a:ln>
           <a:extLst>
             <a:ext uri="{909E8E84-426E-40dd-AFC4-6F175D3DCCD1}">
-              <a14:hiddenFill xmlns="" xmlns:a14="http://schemas.microsoft.com/office/drawing/2010/main">
+              <a14:hiddenFill xmlns:a14="http://schemas.microsoft.com/office/drawing/2010/main" xmlns="">
                 <a:solidFill>
                   <a:srgbClr val="FFFFFF"/>
                 </a:solidFill>
@@ -16762,6 +16588,194 @@
             <a:r>
               <a:rPr lang="en-US" sz="2800" dirty="0"/>
               <a:t> takes a list of Booleans and returns true is all elements are true, false otherwise</a:t>
+            </a:r>
+          </a:p>
+        </p:txBody>
+      </p:sp>
+      <p:sp>
+        <p:nvSpPr>
+          <p:cNvPr id="30725" name="Text Box 5"/>
+          <p:cNvSpPr txBox="1">
+            <a:spLocks noChangeArrowheads="1"/>
+          </p:cNvSpPr>
+          <p:nvPr/>
+        </p:nvSpPr>
+        <p:spPr bwMode="auto">
+          <a:xfrm>
+            <a:off x="4330132" y="4527567"/>
+            <a:ext cx="3531736" cy="1938992"/>
+          </a:xfrm>
+          <a:prstGeom prst="rect">
+            <a:avLst/>
+          </a:prstGeom>
+          <a:solidFill>
+            <a:schemeClr val="accent1"/>
+          </a:solidFill>
+          <a:ln>
+            <a:solidFill>
+              <a:schemeClr val="bg1"/>
+            </a:solidFill>
+          </a:ln>
+          <a:extLst>
+            <a:ext uri="{91240B29-F687-4f45-9708-019B960494DF}">
+              <a14:hiddenLine xmlns:a14="http://schemas.microsoft.com/office/drawing/2010/main" xmlns="" w="12700" cap="sq">
+                <a:solidFill>
+                  <a:srgbClr val="000000"/>
+                </a:solidFill>
+                <a:miter lim="800000"/>
+                <a:headEnd/>
+                <a:tailEnd/>
+              </a14:hiddenLine>
+            </a:ext>
+          </a:extLst>
+        </p:spPr>
+        <p:txBody>
+          <a:bodyPr wrap="none" anchor="ctr">
+            <a:spAutoFit/>
+          </a:bodyPr>
+          <a:lstStyle>
+            <a:lvl1pPr>
+              <a:defRPr sz="2800">
+                <a:solidFill>
+                  <a:schemeClr val="tx1"/>
+                </a:solidFill>
+                <a:latin typeface="Tahoma" charset="0"/>
+                <a:ea typeface="ＭＳ Ｐゴシック" charset="0"/>
+                <a:cs typeface="ＭＳ Ｐゴシック" charset="0"/>
+              </a:defRPr>
+            </a:lvl1pPr>
+            <a:lvl2pPr marL="742950" indent="-285750">
+              <a:defRPr sz="2800">
+                <a:solidFill>
+                  <a:schemeClr val="tx1"/>
+                </a:solidFill>
+                <a:latin typeface="Tahoma" charset="0"/>
+                <a:ea typeface="ＭＳ Ｐゴシック" charset="0"/>
+              </a:defRPr>
+            </a:lvl2pPr>
+            <a:lvl3pPr marL="1143000" indent="-228600">
+              <a:defRPr sz="2800">
+                <a:solidFill>
+                  <a:schemeClr val="tx1"/>
+                </a:solidFill>
+                <a:latin typeface="Tahoma" charset="0"/>
+                <a:ea typeface="ＭＳ Ｐゴシック" charset="0"/>
+              </a:defRPr>
+            </a:lvl3pPr>
+            <a:lvl4pPr marL="1600200" indent="-228600">
+              <a:defRPr sz="2800">
+                <a:solidFill>
+                  <a:schemeClr val="tx1"/>
+                </a:solidFill>
+                <a:latin typeface="Tahoma" charset="0"/>
+                <a:ea typeface="ＭＳ Ｐゴシック" charset="0"/>
+              </a:defRPr>
+            </a:lvl4pPr>
+            <a:lvl5pPr marL="2057400" indent="-228600">
+              <a:defRPr sz="2800">
+                <a:solidFill>
+                  <a:schemeClr val="tx1"/>
+                </a:solidFill>
+                <a:latin typeface="Tahoma" charset="0"/>
+                <a:ea typeface="ＭＳ Ｐゴシック" charset="0"/>
+              </a:defRPr>
+            </a:lvl5pPr>
+            <a:lvl6pPr marL="2514600" indent="-228600" eaLnBrk="0" fontAlgn="base" hangingPunct="0">
+              <a:spcBef>
+                <a:spcPct val="0"/>
+              </a:spcBef>
+              <a:spcAft>
+                <a:spcPct val="0"/>
+              </a:spcAft>
+              <a:defRPr sz="2800">
+                <a:solidFill>
+                  <a:schemeClr val="tx1"/>
+                </a:solidFill>
+                <a:latin typeface="Tahoma" charset="0"/>
+                <a:ea typeface="ＭＳ Ｐゴシック" charset="0"/>
+              </a:defRPr>
+            </a:lvl6pPr>
+            <a:lvl7pPr marL="2971800" indent="-228600" eaLnBrk="0" fontAlgn="base" hangingPunct="0">
+              <a:spcBef>
+                <a:spcPct val="0"/>
+              </a:spcBef>
+              <a:spcAft>
+                <a:spcPct val="0"/>
+              </a:spcAft>
+              <a:defRPr sz="2800">
+                <a:solidFill>
+                  <a:schemeClr val="tx1"/>
+                </a:solidFill>
+                <a:latin typeface="Tahoma" charset="0"/>
+                <a:ea typeface="ＭＳ Ｐゴシック" charset="0"/>
+              </a:defRPr>
+            </a:lvl7pPr>
+            <a:lvl8pPr marL="3429000" indent="-228600" eaLnBrk="0" fontAlgn="base" hangingPunct="0">
+              <a:spcBef>
+                <a:spcPct val="0"/>
+              </a:spcBef>
+              <a:spcAft>
+                <a:spcPct val="0"/>
+              </a:spcAft>
+              <a:defRPr sz="2800">
+                <a:solidFill>
+                  <a:schemeClr val="tx1"/>
+                </a:solidFill>
+                <a:latin typeface="Tahoma" charset="0"/>
+                <a:ea typeface="ＭＳ Ｐゴシック" charset="0"/>
+              </a:defRPr>
+            </a:lvl8pPr>
+            <a:lvl9pPr marL="3886200" indent="-228600" eaLnBrk="0" fontAlgn="base" hangingPunct="0">
+              <a:spcBef>
+                <a:spcPct val="0"/>
+              </a:spcBef>
+              <a:spcAft>
+                <a:spcPct val="0"/>
+              </a:spcAft>
+              <a:defRPr sz="2800">
+                <a:solidFill>
+                  <a:schemeClr val="tx1"/>
+                </a:solidFill>
+                <a:latin typeface="Tahoma" charset="0"/>
+                <a:ea typeface="ＭＳ Ｐゴシック" charset="0"/>
+              </a:defRPr>
+            </a:lvl9pPr>
+          </a:lstStyle>
+          <a:p>
+            <a:r>
+              <a:rPr lang="en-US" sz="2400" dirty="0">
+                <a:latin typeface="Lucida Sans Typewriter" charset="0"/>
+              </a:rPr>
+              <a:t>&gt; sorted [1,2,3,4]</a:t>
+            </a:r>
+          </a:p>
+          <a:p>
+            <a:r>
+              <a:rPr lang="en-US" sz="2400" dirty="0">
+                <a:latin typeface="Lucida Sans Typewriter" charset="0"/>
+              </a:rPr>
+              <a:t>True</a:t>
+            </a:r>
+          </a:p>
+          <a:p>
+            <a:endParaRPr lang="en-US" sz="2400" dirty="0">
+              <a:latin typeface="Lucida Sans Typewriter" charset="0"/>
+            </a:endParaRPr>
+          </a:p>
+          <a:p>
+            <a:r>
+              <a:rPr lang="en-US" sz="2400" dirty="0">
+                <a:latin typeface="Lucida Sans Typewriter" charset="0"/>
+              </a:rPr>
+              <a:t>&gt; sorted [1,3,2,4]</a:t>
+            </a:r>
+          </a:p>
+          <a:p>
+            <a:r>
+              <a:rPr lang="en-US" sz="2400" dirty="0">
+                <a:latin typeface="Lucida Sans Typewriter" charset="0"/>
+              </a:rPr>
+              <a:t>False</a:t>
             </a:r>
           </a:p>
         </p:txBody>
@@ -16987,7 +17001,7 @@
                                           </p:stCondLst>
                                         </p:cTn>
                                         <p:tgtEl>
-                                          <p:spTgt spid="30723"/>
+                                          <p:spTgt spid="3"/>
                                         </p:tgtEl>
                                         <p:attrNameLst>
                                           <p:attrName>style.visibility</p:attrName>
@@ -17001,7 +17015,7 @@
                                       <p:cBhvr additive="base">
                                         <p:cTn id="19" dur="500" fill="hold"/>
                                         <p:tgtEl>
-                                          <p:spTgt spid="30723"/>
+                                          <p:spTgt spid="3"/>
                                         </p:tgtEl>
                                         <p:attrNameLst>
                                           <p:attrName>ppt_x</p:attrName>
@@ -17024,80 +17038,7 @@
                                       <p:cBhvr additive="base">
                                         <p:cTn id="20" dur="500" fill="hold"/>
                                         <p:tgtEl>
-                                          <p:spTgt spid="30723"/>
-                                        </p:tgtEl>
-                                        <p:attrNameLst>
-                                          <p:attrName>ppt_y</p:attrName>
-                                        </p:attrNameLst>
-                                      </p:cBhvr>
-                                      <p:tavLst>
-                                        <p:tav tm="0">
-                                          <p:val>
-                                            <p:strVal val="1+#ppt_h/2"/>
-                                          </p:val>
-                                        </p:tav>
-                                        <p:tav tm="100000">
-                                          <p:val>
-                                            <p:strVal val="#ppt_y"/>
-                                          </p:val>
-                                        </p:tav>
-                                      </p:tavLst>
-                                    </p:anim>
-                                  </p:childTnLst>
-                                </p:cTn>
-                              </p:par>
-                              <p:par>
-                                <p:cTn id="21" presetID="2" presetClass="entr" presetSubtype="4" fill="hold" grpId="0" nodeType="withEffect">
-                                  <p:stCondLst>
-                                    <p:cond delay="0"/>
-                                  </p:stCondLst>
-                                  <p:childTnLst>
-                                    <p:set>
-                                      <p:cBhvr>
-                                        <p:cTn id="22" dur="1" fill="hold">
-                                          <p:stCondLst>
-                                            <p:cond delay="0"/>
-                                          </p:stCondLst>
-                                        </p:cTn>
-                                        <p:tgtEl>
-                                          <p:spTgt spid="30725"/>
-                                        </p:tgtEl>
-                                        <p:attrNameLst>
-                                          <p:attrName>style.visibility</p:attrName>
-                                        </p:attrNameLst>
-                                      </p:cBhvr>
-                                      <p:to>
-                                        <p:strVal val="visible"/>
-                                      </p:to>
-                                    </p:set>
-                                    <p:anim calcmode="lin" valueType="num">
-                                      <p:cBhvr additive="base">
-                                        <p:cTn id="23" dur="500" fill="hold"/>
-                                        <p:tgtEl>
-                                          <p:spTgt spid="30725"/>
-                                        </p:tgtEl>
-                                        <p:attrNameLst>
-                                          <p:attrName>ppt_x</p:attrName>
-                                        </p:attrNameLst>
-                                      </p:cBhvr>
-                                      <p:tavLst>
-                                        <p:tav tm="0">
-                                          <p:val>
-                                            <p:strVal val="#ppt_x"/>
-                                          </p:val>
-                                        </p:tav>
-                                        <p:tav tm="100000">
-                                          <p:val>
-                                            <p:strVal val="#ppt_x"/>
-                                          </p:val>
-                                        </p:tav>
-                                      </p:tavLst>
-                                    </p:anim>
-                                    <p:anim calcmode="lin" valueType="num">
-                                      <p:cBhvr additive="base">
-                                        <p:cTn id="24" dur="500" fill="hold"/>
-                                        <p:tgtEl>
-                                          <p:spTgt spid="30725"/>
+                                          <p:spTgt spid="3"/>
                                         </p:tgtEl>
                                         <p:attrNameLst>
                                           <p:attrName>ppt_y</p:attrName>
@@ -17126,19 +17067,92 @@
                     </p:cTn>
                   </p:par>
                   <p:par>
-                    <p:cTn id="25" fill="hold">
+                    <p:cTn id="21" fill="hold">
                       <p:stCondLst>
                         <p:cond delay="indefinite"/>
                       </p:stCondLst>
                       <p:childTnLst>
                         <p:par>
-                          <p:cTn id="26" fill="hold">
+                          <p:cTn id="22" fill="hold">
                             <p:stCondLst>
                               <p:cond delay="0"/>
                             </p:stCondLst>
                             <p:childTnLst>
                               <p:par>
-                                <p:cTn id="27" presetID="2" presetClass="entr" presetSubtype="4" fill="hold" grpId="0" nodeType="clickEffect">
+                                <p:cTn id="23" presetID="2" presetClass="entr" presetSubtype="4" fill="hold" grpId="0" nodeType="clickEffect">
+                                  <p:stCondLst>
+                                    <p:cond delay="0"/>
+                                  </p:stCondLst>
+                                  <p:childTnLst>
+                                    <p:set>
+                                      <p:cBhvr>
+                                        <p:cTn id="24" dur="1" fill="hold">
+                                          <p:stCondLst>
+                                            <p:cond delay="0"/>
+                                          </p:stCondLst>
+                                        </p:cTn>
+                                        <p:tgtEl>
+                                          <p:spTgt spid="30723"/>
+                                        </p:tgtEl>
+                                        <p:attrNameLst>
+                                          <p:attrName>style.visibility</p:attrName>
+                                        </p:attrNameLst>
+                                      </p:cBhvr>
+                                      <p:to>
+                                        <p:strVal val="visible"/>
+                                      </p:to>
+                                    </p:set>
+                                    <p:anim calcmode="lin" valueType="num">
+                                      <p:cBhvr additive="base">
+                                        <p:cTn id="25" dur="500" fill="hold"/>
+                                        <p:tgtEl>
+                                          <p:spTgt spid="30723"/>
+                                        </p:tgtEl>
+                                        <p:attrNameLst>
+                                          <p:attrName>ppt_x</p:attrName>
+                                        </p:attrNameLst>
+                                      </p:cBhvr>
+                                      <p:tavLst>
+                                        <p:tav tm="0">
+                                          <p:val>
+                                            <p:strVal val="#ppt_x"/>
+                                          </p:val>
+                                        </p:tav>
+                                        <p:tav tm="100000">
+                                          <p:val>
+                                            <p:strVal val="#ppt_x"/>
+                                          </p:val>
+                                        </p:tav>
+                                      </p:tavLst>
+                                    </p:anim>
+                                    <p:anim calcmode="lin" valueType="num">
+                                      <p:cBhvr additive="base">
+                                        <p:cTn id="26" dur="500" fill="hold"/>
+                                        <p:tgtEl>
+                                          <p:spTgt spid="30723"/>
+                                        </p:tgtEl>
+                                        <p:attrNameLst>
+                                          <p:attrName>ppt_y</p:attrName>
+                                        </p:attrNameLst>
+                                      </p:cBhvr>
+                                      <p:tavLst>
+                                        <p:tav tm="0">
+                                          <p:val>
+                                            <p:strVal val="1+#ppt_h/2"/>
+                                          </p:val>
+                                        </p:tav>
+                                        <p:tav tm="100000">
+                                          <p:val>
+                                            <p:strVal val="#ppt_y"/>
+                                          </p:val>
+                                        </p:tav>
+                                      </p:tavLst>
+                                    </p:anim>
+                                  </p:childTnLst>
+                                </p:cTn>
+                              </p:par>
+                              <p:par>
+                                <p:cTn id="27" presetID="2" presetClass="entr" presetSubtype="4" fill="hold" grpId="0" nodeType="withEffect">
                                   <p:stCondLst>
                                     <p:cond delay="0"/>
                                   </p:stCondLst>
@@ -17151,7 +17165,7 @@
                                           </p:stCondLst>
                                         </p:cTn>
                                         <p:tgtEl>
-                                          <p:spTgt spid="3"/>
+                                          <p:spTgt spid="30725"/>
                                         </p:tgtEl>
                                         <p:attrNameLst>
                                           <p:attrName>style.visibility</p:attrName>
@@ -17165,7 +17179,7 @@
                                       <p:cBhvr additive="base">
                                         <p:cTn id="29" dur="500" fill="hold"/>
                                         <p:tgtEl>
-                                          <p:spTgt spid="3"/>
+                                          <p:spTgt spid="30725"/>
                                         </p:tgtEl>
                                         <p:attrNameLst>
                                           <p:attrName>ppt_x</p:attrName>
@@ -17188,7 +17202,7 @@
                                       <p:cBhvr additive="base">
                                         <p:cTn id="30" dur="500" fill="hold"/>
                                         <p:tgtEl>
-                                          <p:spTgt spid="3"/>
+                                          <p:spTgt spid="30725"/>
                                         </p:tgtEl>
                                         <p:attrNameLst>
                                           <p:attrName>ppt_y</p:attrName>
@@ -17241,8 +17255,8 @@
       <p:bldP spid="30722" grpId="0"/>
       <p:bldP spid="30723" grpId="0"/>
       <p:bldP spid="30724" grpId="0" animBg="1"/>
+      <p:bldP spid="3" grpId="0" animBg="1"/>
       <p:bldP spid="30725" grpId="0" animBg="1"/>
-      <p:bldP spid="3" grpId="0" animBg="1"/>
     </p:bldLst>
   </p:timing>
 </p:sld>
@@ -17310,14 +17324,14 @@
           <a:ln/>
           <a:extLst>
             <a:ext uri="{909E8E84-426E-40dd-AFC4-6F175D3DCCD1}">
-              <a14:hiddenFill xmlns="" xmlns:a14="http://schemas.microsoft.com/office/drawing/2010/main">
+              <a14:hiddenFill xmlns:a14="http://schemas.microsoft.com/office/drawing/2010/main" xmlns="">
                 <a:solidFill>
                   <a:srgbClr val="FFFFFF"/>
                 </a:solidFill>
               </a14:hiddenFill>
             </a:ext>
             <a:ext uri="{91240B29-F687-4f45-9708-019B960494DF}">
-              <a14:hiddenLine xmlns="" xmlns:a14="http://schemas.microsoft.com/office/drawing/2010/main" w="9525">
+              <a14:hiddenLine xmlns:a14="http://schemas.microsoft.com/office/drawing/2010/main" xmlns="" w="9525">
                 <a:solidFill>
                   <a:srgbClr val="000000"/>
                 </a:solidFill>
@@ -17470,14 +17484,14 @@
           </a:ln>
           <a:extLst>
             <a:ext uri="{909E8E84-426E-40dd-AFC4-6F175D3DCCD1}">
-              <a14:hiddenFill xmlns="" xmlns:a14="http://schemas.microsoft.com/office/drawing/2010/main">
+              <a14:hiddenFill xmlns:a14="http://schemas.microsoft.com/office/drawing/2010/main" xmlns="">
                 <a:solidFill>
                   <a:srgbClr val="FFFFFF"/>
                 </a:solidFill>
               </a14:hiddenFill>
             </a:ext>
             <a:ext uri="{91240B29-F687-4f45-9708-019B960494DF}">
-              <a14:hiddenLine xmlns="" xmlns:a14="http://schemas.microsoft.com/office/drawing/2010/main" w="12700" cap="sq">
+              <a14:hiddenLine xmlns:a14="http://schemas.microsoft.com/office/drawing/2010/main" xmlns="" w="12700" cap="sq">
                 <a:solidFill>
                   <a:srgbClr val="000000"/>
                 </a:solidFill>
@@ -17642,7 +17656,7 @@
           </a:ln>
           <a:extLst>
             <a:ext uri="{91240B29-F687-4f45-9708-019B960494DF}">
-              <a14:hiddenLine xmlns="" xmlns:a14="http://schemas.microsoft.com/office/drawing/2010/main" w="12700" cap="sq">
+              <a14:hiddenLine xmlns:a14="http://schemas.microsoft.com/office/drawing/2010/main" xmlns="" w="12700" cap="sq">
                 <a:solidFill>
                   <a:srgbClr val="000000"/>
                 </a:solidFill>
@@ -17964,14 +17978,14 @@
           </a:ln>
           <a:extLst>
             <a:ext uri="{909E8E84-426E-40dd-AFC4-6F175D3DCCD1}">
-              <a14:hiddenFill xmlns="" xmlns:a14="http://schemas.microsoft.com/office/drawing/2010/main">
+              <a14:hiddenFill xmlns:a14="http://schemas.microsoft.com/office/drawing/2010/main" xmlns="">
                 <a:solidFill>
                   <a:srgbClr val="FFFFFF"/>
                 </a:solidFill>
               </a14:hiddenFill>
             </a:ext>
             <a:ext uri="{91240B29-F687-4f45-9708-019B960494DF}">
-              <a14:hiddenLine xmlns="" xmlns:a14="http://schemas.microsoft.com/office/drawing/2010/main" w="12700" cap="sq">
+              <a14:hiddenLine xmlns:a14="http://schemas.microsoft.com/office/drawing/2010/main" xmlns="" w="12700" cap="sq">
                 <a:solidFill>
                   <a:srgbClr val="000000"/>
                 </a:solidFill>
@@ -18128,7 +18142,7 @@
           </a:ln>
           <a:extLst>
             <a:ext uri="{91240B29-F687-4f45-9708-019B960494DF}">
-              <a14:hiddenLine xmlns="" xmlns:a14="http://schemas.microsoft.com/office/drawing/2010/main" w="12700" cap="sq">
+              <a14:hiddenLine xmlns:a14="http://schemas.microsoft.com/office/drawing/2010/main" xmlns="" w="12700" cap="sq">
                 <a:solidFill>
                   <a:srgbClr val="000000"/>
                 </a:solidFill>
@@ -18318,7 +18332,7 @@
           </a:ln>
           <a:extLst>
             <a:ext uri="{909E8E84-426E-40dd-AFC4-6F175D3DCCD1}">
-              <a14:hiddenFill xmlns="" xmlns:a14="http://schemas.microsoft.com/office/drawing/2010/main">
+              <a14:hiddenFill xmlns:a14="http://schemas.microsoft.com/office/drawing/2010/main" xmlns="">
                 <a:solidFill>
                   <a:srgbClr val="FFFFFF"/>
                 </a:solidFill>
@@ -18808,14 +18822,14 @@
           <a:ln/>
           <a:extLst>
             <a:ext uri="{909E8E84-426E-40dd-AFC4-6F175D3DCCD1}">
-              <a14:hiddenFill xmlns="" xmlns:a14="http://schemas.microsoft.com/office/drawing/2010/main">
+              <a14:hiddenFill xmlns:a14="http://schemas.microsoft.com/office/drawing/2010/main" xmlns="">
                 <a:solidFill>
                   <a:srgbClr val="FFFFFF"/>
                 </a:solidFill>
               </a14:hiddenFill>
             </a:ext>
             <a:ext uri="{91240B29-F687-4f45-9708-019B960494DF}">
-              <a14:hiddenLine xmlns="" xmlns:a14="http://schemas.microsoft.com/office/drawing/2010/main" w="9525">
+              <a14:hiddenLine xmlns:a14="http://schemas.microsoft.com/office/drawing/2010/main" xmlns="" w="9525">
                 <a:solidFill>
                   <a:srgbClr val="000000"/>
                 </a:solidFill>
@@ -18968,14 +18982,14 @@
           </a:ln>
           <a:extLst>
             <a:ext uri="{909E8E84-426E-40dd-AFC4-6F175D3DCCD1}">
-              <a14:hiddenFill xmlns="" xmlns:a14="http://schemas.microsoft.com/office/drawing/2010/main">
+              <a14:hiddenFill xmlns:a14="http://schemas.microsoft.com/office/drawing/2010/main" xmlns="">
                 <a:solidFill>
                   <a:srgbClr val="FFFFFF"/>
                 </a:solidFill>
               </a14:hiddenFill>
             </a:ext>
             <a:ext uri="{91240B29-F687-4f45-9708-019B960494DF}">
-              <a14:hiddenLine xmlns="" xmlns:a14="http://schemas.microsoft.com/office/drawing/2010/main" w="12700" cap="sq">
+              <a14:hiddenLine xmlns:a14="http://schemas.microsoft.com/office/drawing/2010/main" xmlns="" w="12700" cap="sq">
                 <a:solidFill>
                   <a:srgbClr val="000000"/>
                 </a:solidFill>
@@ -19132,7 +19146,7 @@
           </a:ln>
           <a:extLst>
             <a:ext uri="{91240B29-F687-4f45-9708-019B960494DF}">
-              <a14:hiddenLine xmlns="" xmlns:a14="http://schemas.microsoft.com/office/drawing/2010/main" w="12700" cap="sq">
+              <a14:hiddenLine xmlns:a14="http://schemas.microsoft.com/office/drawing/2010/main" xmlns="" w="12700" cap="sq">
                 <a:solidFill>
                   <a:srgbClr val="000000"/>
                 </a:solidFill>
@@ -19312,14 +19326,14 @@
           </a:ln>
           <a:extLst>
             <a:ext uri="{909E8E84-426E-40dd-AFC4-6F175D3DCCD1}">
-              <a14:hiddenFill xmlns="" xmlns:a14="http://schemas.microsoft.com/office/drawing/2010/main">
+              <a14:hiddenFill xmlns:a14="http://schemas.microsoft.com/office/drawing/2010/main" xmlns="">
                 <a:solidFill>
                   <a:srgbClr val="FFFFFF"/>
                 </a:solidFill>
               </a14:hiddenFill>
             </a:ext>
             <a:ext uri="{91240B29-F687-4f45-9708-019B960494DF}">
-              <a14:hiddenLine xmlns="" xmlns:a14="http://schemas.microsoft.com/office/drawing/2010/main" w="12700" cap="sq">
+              <a14:hiddenLine xmlns:a14="http://schemas.microsoft.com/office/drawing/2010/main" xmlns="" w="12700" cap="sq">
                 <a:solidFill>
                   <a:srgbClr val="000000"/>
                 </a:solidFill>
@@ -19476,7 +19490,7 @@
           </a:ln>
           <a:extLst>
             <a:ext uri="{91240B29-F687-4f45-9708-019B960494DF}">
-              <a14:hiddenLine xmlns="" xmlns:a14="http://schemas.microsoft.com/office/drawing/2010/main" w="12700" cap="sq">
+              <a14:hiddenLine xmlns:a14="http://schemas.microsoft.com/office/drawing/2010/main" xmlns="" w="12700" cap="sq">
                 <a:solidFill>
                   <a:srgbClr val="000000"/>
                 </a:solidFill>
@@ -20254,14 +20268,14 @@
           <a:ln/>
           <a:extLst>
             <a:ext uri="{909E8E84-426E-40dd-AFC4-6F175D3DCCD1}">
-              <a14:hiddenFill xmlns="" xmlns:a14="http://schemas.microsoft.com/office/drawing/2010/main">
+              <a14:hiddenFill xmlns:a14="http://schemas.microsoft.com/office/drawing/2010/main" xmlns="">
                 <a:solidFill>
                   <a:srgbClr val="FFFFFF"/>
                 </a:solidFill>
               </a14:hiddenFill>
             </a:ext>
             <a:ext uri="{91240B29-F687-4f45-9708-019B960494DF}">
-              <a14:hiddenLine xmlns="" xmlns:a14="http://schemas.microsoft.com/office/drawing/2010/main" w="9525">
+              <a14:hiddenLine xmlns:a14="http://schemas.microsoft.com/office/drawing/2010/main" xmlns="" w="9525">
                 <a:solidFill>
                   <a:srgbClr val="000000"/>
                 </a:solidFill>
@@ -20414,14 +20428,14 @@
           </a:ln>
           <a:extLst>
             <a:ext uri="{909E8E84-426E-40dd-AFC4-6F175D3DCCD1}">
-              <a14:hiddenFill xmlns="" xmlns:a14="http://schemas.microsoft.com/office/drawing/2010/main">
+              <a14:hiddenFill xmlns:a14="http://schemas.microsoft.com/office/drawing/2010/main" xmlns="">
                 <a:solidFill>
                   <a:srgbClr val="FFFFFF"/>
                 </a:solidFill>
               </a14:hiddenFill>
             </a:ext>
             <a:ext uri="{91240B29-F687-4f45-9708-019B960494DF}">
-              <a14:hiddenLine xmlns="" xmlns:a14="http://schemas.microsoft.com/office/drawing/2010/main" w="12700" cap="sq">
+              <a14:hiddenLine xmlns:a14="http://schemas.microsoft.com/office/drawing/2010/main" xmlns="" w="12700" cap="sq">
                 <a:solidFill>
                   <a:srgbClr val="000000"/>
                 </a:solidFill>
@@ -20586,7 +20600,7 @@
           </a:ln>
           <a:extLst>
             <a:ext uri="{91240B29-F687-4f45-9708-019B960494DF}">
-              <a14:hiddenLine xmlns="" xmlns:a14="http://schemas.microsoft.com/office/drawing/2010/main" w="12700" cap="sq">
+              <a14:hiddenLine xmlns:a14="http://schemas.microsoft.com/office/drawing/2010/main" xmlns="" w="12700" cap="sq">
                 <a:solidFill>
                   <a:srgbClr val="000000"/>
                 </a:solidFill>
@@ -20769,7 +20783,7 @@
           </a:ln>
           <a:extLst>
             <a:ext uri="{909E8E84-426E-40dd-AFC4-6F175D3DCCD1}">
-              <a14:hiddenFill xmlns="" xmlns:a14="http://schemas.microsoft.com/office/drawing/2010/main">
+              <a14:hiddenFill xmlns:a14="http://schemas.microsoft.com/office/drawing/2010/main" xmlns="">
                 <a:solidFill>
                   <a:srgbClr val="FFFFFF"/>
                 </a:solidFill>
@@ -21246,14 +21260,14 @@
           <a:ln/>
           <a:extLst>
             <a:ext uri="{909E8E84-426E-40dd-AFC4-6F175D3DCCD1}">
-              <a14:hiddenFill xmlns="" xmlns:a14="http://schemas.microsoft.com/office/drawing/2010/main">
+              <a14:hiddenFill xmlns:a14="http://schemas.microsoft.com/office/drawing/2010/main" xmlns="">
                 <a:solidFill>
                   <a:srgbClr val="FFFFFF"/>
                 </a:solidFill>
               </a14:hiddenFill>
             </a:ext>
             <a:ext uri="{91240B29-F687-4f45-9708-019B960494DF}">
-              <a14:hiddenLine xmlns="" xmlns:a14="http://schemas.microsoft.com/office/drawing/2010/main" w="9525">
+              <a14:hiddenLine xmlns:a14="http://schemas.microsoft.com/office/drawing/2010/main" xmlns="" w="9525">
                 <a:solidFill>
                   <a:srgbClr val="000000"/>
                 </a:solidFill>
@@ -21406,14 +21420,14 @@
           </a:ln>
           <a:extLst>
             <a:ext uri="{909E8E84-426E-40dd-AFC4-6F175D3DCCD1}">
-              <a14:hiddenFill xmlns="" xmlns:a14="http://schemas.microsoft.com/office/drawing/2010/main">
+              <a14:hiddenFill xmlns:a14="http://schemas.microsoft.com/office/drawing/2010/main" xmlns="">
                 <a:solidFill>
                   <a:srgbClr val="FFFFFF"/>
                 </a:solidFill>
               </a14:hiddenFill>
             </a:ext>
             <a:ext uri="{91240B29-F687-4f45-9708-019B960494DF}">
-              <a14:hiddenLine xmlns="" xmlns:a14="http://schemas.microsoft.com/office/drawing/2010/main" w="12700" cap="sq">
+              <a14:hiddenLine xmlns:a14="http://schemas.microsoft.com/office/drawing/2010/main" xmlns="" w="12700" cap="sq">
                 <a:solidFill>
                   <a:srgbClr val="000000"/>
                 </a:solidFill>
@@ -21578,7 +21592,7 @@
           </a:ln>
           <a:extLst>
             <a:ext uri="{91240B29-F687-4f45-9708-019B960494DF}">
-              <a14:hiddenLine xmlns="" xmlns:a14="http://schemas.microsoft.com/office/drawing/2010/main" w="12700" cap="sq">
+              <a14:hiddenLine xmlns:a14="http://schemas.microsoft.com/office/drawing/2010/main" xmlns="" w="12700" cap="sq">
                 <a:solidFill>
                   <a:srgbClr val="000000"/>
                 </a:solidFill>
@@ -21773,7 +21787,7 @@
           </a:ln>
           <a:extLst>
             <a:ext uri="{91240B29-F687-4f45-9708-019B960494DF}">
-              <a14:hiddenLine xmlns="" xmlns:a14="http://schemas.microsoft.com/office/drawing/2010/main" w="12700" cap="sq">
+              <a14:hiddenLine xmlns:a14="http://schemas.microsoft.com/office/drawing/2010/main" xmlns="" w="12700" cap="sq">
                 <a:solidFill>
                   <a:srgbClr val="000000"/>
                 </a:solidFill>
@@ -21980,7 +21994,7 @@
           </a:ln>
           <a:extLst>
             <a:ext uri="{91240B29-F687-4f45-9708-019B960494DF}">
-              <a14:hiddenLine xmlns="" xmlns:a14="http://schemas.microsoft.com/office/drawing/2010/main" w="12700" cap="sq">
+              <a14:hiddenLine xmlns:a14="http://schemas.microsoft.com/office/drawing/2010/main" xmlns="" w="12700" cap="sq">
                 <a:solidFill>
                   <a:srgbClr val="000000"/>
                 </a:solidFill>
@@ -22698,14 +22712,14 @@
           <a:ln/>
           <a:extLst>
             <a:ext uri="{909E8E84-426E-40dd-AFC4-6F175D3DCCD1}">
-              <a14:hiddenFill xmlns="" xmlns:a14="http://schemas.microsoft.com/office/drawing/2010/main">
+              <a14:hiddenFill xmlns:a14="http://schemas.microsoft.com/office/drawing/2010/main" xmlns="">
                 <a:solidFill>
                   <a:srgbClr val="FFFFFF"/>
                 </a:solidFill>
               </a14:hiddenFill>
             </a:ext>
             <a:ext uri="{91240B29-F687-4f45-9708-019B960494DF}">
-              <a14:hiddenLine xmlns="" xmlns:a14="http://schemas.microsoft.com/office/drawing/2010/main" w="9525">
+              <a14:hiddenLine xmlns:a14="http://schemas.microsoft.com/office/drawing/2010/main" xmlns="" w="9525">
                 <a:solidFill>
                   <a:srgbClr val="000000"/>
                 </a:solidFill>
@@ -22858,14 +22872,14 @@
           </a:ln>
           <a:extLst>
             <a:ext uri="{909E8E84-426E-40dd-AFC4-6F175D3DCCD1}">
-              <a14:hiddenFill xmlns="" xmlns:a14="http://schemas.microsoft.com/office/drawing/2010/main">
+              <a14:hiddenFill xmlns:a14="http://schemas.microsoft.com/office/drawing/2010/main" xmlns="">
                 <a:solidFill>
                   <a:srgbClr val="FFFFFF"/>
                 </a:solidFill>
               </a14:hiddenFill>
             </a:ext>
             <a:ext uri="{91240B29-F687-4f45-9708-019B960494DF}">
-              <a14:hiddenLine xmlns="" xmlns:a14="http://schemas.microsoft.com/office/drawing/2010/main" w="12700" cap="sq">
+              <a14:hiddenLine xmlns:a14="http://schemas.microsoft.com/office/drawing/2010/main" xmlns="" w="12700" cap="sq">
                 <a:solidFill>
                   <a:srgbClr val="000000"/>
                 </a:solidFill>
@@ -23032,7 +23046,7 @@
           </a:ln>
           <a:extLst>
             <a:ext uri="{91240B29-F687-4f45-9708-019B960494DF}">
-              <a14:hiddenLine xmlns="" xmlns:a14="http://schemas.microsoft.com/office/drawing/2010/main" w="12700" cap="sq">
+              <a14:hiddenLine xmlns:a14="http://schemas.microsoft.com/office/drawing/2010/main" xmlns="" w="12700" cap="sq">
                 <a:solidFill>
                   <a:srgbClr val="000000"/>
                 </a:solidFill>
@@ -23236,7 +23250,7 @@
           </a:ln>
           <a:extLst>
             <a:ext uri="{909E8E84-426E-40dd-AFC4-6F175D3DCCD1}">
-              <a14:hiddenFill xmlns="" xmlns:a14="http://schemas.microsoft.com/office/drawing/2010/main">
+              <a14:hiddenFill xmlns:a14="http://schemas.microsoft.com/office/drawing/2010/main" xmlns="">
                 <a:solidFill>
                   <a:srgbClr val="FFFFFF"/>
                 </a:solidFill>
@@ -23550,14 +23564,14 @@
           <a:ln/>
           <a:extLst>
             <a:ext uri="{909E8E84-426E-40dd-AFC4-6F175D3DCCD1}">
-              <a14:hiddenFill xmlns="" xmlns:a14="http://schemas.microsoft.com/office/drawing/2010/main">
+              <a14:hiddenFill xmlns:a14="http://schemas.microsoft.com/office/drawing/2010/main" xmlns="">
                 <a:solidFill>
                   <a:srgbClr val="FFFFFF"/>
                 </a:solidFill>
               </a14:hiddenFill>
             </a:ext>
             <a:ext uri="{91240B29-F687-4f45-9708-019B960494DF}">
-              <a14:hiddenLine xmlns="" xmlns:a14="http://schemas.microsoft.com/office/drawing/2010/main" w="9525">
+              <a14:hiddenLine xmlns:a14="http://schemas.microsoft.com/office/drawing/2010/main" xmlns="" w="9525">
                 <a:solidFill>
                   <a:srgbClr val="000000"/>
                 </a:solidFill>
@@ -23710,14 +23724,14 @@
           </a:ln>
           <a:extLst>
             <a:ext uri="{909E8E84-426E-40dd-AFC4-6F175D3DCCD1}">
-              <a14:hiddenFill xmlns="" xmlns:a14="http://schemas.microsoft.com/office/drawing/2010/main">
+              <a14:hiddenFill xmlns:a14="http://schemas.microsoft.com/office/drawing/2010/main" xmlns="">
                 <a:solidFill>
                   <a:srgbClr val="FFFFFF"/>
                 </a:solidFill>
               </a14:hiddenFill>
             </a:ext>
             <a:ext uri="{91240B29-F687-4f45-9708-019B960494DF}">
-              <a14:hiddenLine xmlns="" xmlns:a14="http://schemas.microsoft.com/office/drawing/2010/main" w="12700" cap="sq">
+              <a14:hiddenLine xmlns:a14="http://schemas.microsoft.com/office/drawing/2010/main" xmlns="" w="12700" cap="sq">
                 <a:solidFill>
                   <a:srgbClr val="000000"/>
                 </a:solidFill>
@@ -23874,7 +23888,7 @@
           </a:ln>
           <a:extLst>
             <a:ext uri="{91240B29-F687-4f45-9708-019B960494DF}">
-              <a14:hiddenLine xmlns="" xmlns:a14="http://schemas.microsoft.com/office/drawing/2010/main" w="12700" cap="sq">
+              <a14:hiddenLine xmlns:a14="http://schemas.microsoft.com/office/drawing/2010/main" xmlns="" w="12700" cap="sq">
                 <a:solidFill>
                   <a:srgbClr val="000000"/>
                 </a:solidFill>
@@ -24158,14 +24172,14 @@
           </a:ln>
           <a:extLst>
             <a:ext uri="{909E8E84-426E-40dd-AFC4-6F175D3DCCD1}">
-              <a14:hiddenFill xmlns="" xmlns:a14="http://schemas.microsoft.com/office/drawing/2010/main">
+              <a14:hiddenFill xmlns:a14="http://schemas.microsoft.com/office/drawing/2010/main" xmlns="">
                 <a:solidFill>
                   <a:srgbClr val="FFFFFF"/>
                 </a:solidFill>
               </a14:hiddenFill>
             </a:ext>
             <a:ext uri="{91240B29-F687-4f45-9708-019B960494DF}">
-              <a14:hiddenLine xmlns="" xmlns:a14="http://schemas.microsoft.com/office/drawing/2010/main" w="12700" cap="sq">
+              <a14:hiddenLine xmlns:a14="http://schemas.microsoft.com/office/drawing/2010/main" xmlns="" w="12700" cap="sq">
                 <a:solidFill>
                   <a:srgbClr val="000000"/>
                 </a:solidFill>
@@ -24322,7 +24336,7 @@
           </a:ln>
           <a:extLst>
             <a:ext uri="{91240B29-F687-4f45-9708-019B960494DF}">
-              <a14:hiddenLine xmlns="" xmlns:a14="http://schemas.microsoft.com/office/drawing/2010/main" w="12700" cap="sq">
+              <a14:hiddenLine xmlns:a14="http://schemas.microsoft.com/office/drawing/2010/main" xmlns="" w="12700" cap="sq">
                 <a:solidFill>
                   <a:srgbClr val="000000"/>
                 </a:solidFill>
@@ -24743,6 +24757,97 @@
                                           </p:stCondLst>
                                         </p:cTn>
                                         <p:tgtEl>
+                                          <p:spTgt spid="34820"/>
+                                        </p:tgtEl>
+                                        <p:attrNameLst>
+                                          <p:attrName>style.visibility</p:attrName>
+                                        </p:attrNameLst>
+                                      </p:cBhvr>
+                                      <p:to>
+                                        <p:strVal val="visible"/>
+                                      </p:to>
+                                    </p:set>
+                                    <p:anim calcmode="lin" valueType="num">
+                                      <p:cBhvr additive="base">
+                                        <p:cTn id="19" dur="500" fill="hold"/>
+                                        <p:tgtEl>
+                                          <p:spTgt spid="34820"/>
+                                        </p:tgtEl>
+                                        <p:attrNameLst>
+                                          <p:attrName>ppt_x</p:attrName>
+                                        </p:attrNameLst>
+                                      </p:cBhvr>
+                                      <p:tavLst>
+                                        <p:tav tm="0">
+                                          <p:val>
+                                            <p:strVal val="#ppt_x"/>
+                                          </p:val>
+                                        </p:tav>
+                                        <p:tav tm="100000">
+                                          <p:val>
+                                            <p:strVal val="#ppt_x"/>
+                                          </p:val>
+                                        </p:tav>
+                                      </p:tavLst>
+                                    </p:anim>
+                                    <p:anim calcmode="lin" valueType="num">
+                                      <p:cBhvr additive="base">
+                                        <p:cTn id="20" dur="500" fill="hold"/>
+                                        <p:tgtEl>
+                                          <p:spTgt spid="34820"/>
+                                        </p:tgtEl>
+                                        <p:attrNameLst>
+                                          <p:attrName>ppt_y</p:attrName>
+                                        </p:attrNameLst>
+                                      </p:cBhvr>
+                                      <p:tavLst>
+                                        <p:tav tm="0">
+                                          <p:val>
+                                            <p:strVal val="1+#ppt_h/2"/>
+                                          </p:val>
+                                        </p:tav>
+                                        <p:tav tm="100000">
+                                          <p:val>
+                                            <p:strVal val="#ppt_y"/>
+                                          </p:val>
+                                        </p:tav>
+                                      </p:tavLst>
+                                    </p:anim>
+                                  </p:childTnLst>
+                                </p:cTn>
+                              </p:par>
+                            </p:childTnLst>
+                          </p:cTn>
+                        </p:par>
+                      </p:childTnLst>
+                    </p:cTn>
+                  </p:par>
+                  <p:par>
+                    <p:cTn id="21" fill="hold">
+                      <p:stCondLst>
+                        <p:cond delay="indefinite"/>
+                      </p:stCondLst>
+                      <p:childTnLst>
+                        <p:par>
+                          <p:cTn id="22" fill="hold">
+                            <p:stCondLst>
+                              <p:cond delay="0"/>
+                            </p:stCondLst>
+                            <p:childTnLst>
+                              <p:par>
+                                <p:cTn id="23" presetID="2" presetClass="entr" presetSubtype="4" fill="hold" grpId="0" nodeType="clickEffect">
+                                  <p:stCondLst>
+                                    <p:cond delay="0"/>
+                                  </p:stCondLst>
+                                  <p:childTnLst>
+                                    <p:set>
+                                      <p:cBhvr>
+                                        <p:cTn id="24" dur="1" fill="hold">
+                                          <p:stCondLst>
+                                            <p:cond delay="0"/>
+                                          </p:stCondLst>
+                                        </p:cTn>
+                                        <p:tgtEl>
                                           <p:spTgt spid="34821"/>
                                         </p:tgtEl>
                                         <p:attrNameLst>
@@ -24755,7 +24860,7 @@
                                     </p:set>
                                     <p:anim calcmode="lin" valueType="num">
                                       <p:cBhvr additive="base">
-                                        <p:cTn id="19" dur="500" fill="hold"/>
+                                        <p:cTn id="25" dur="500" fill="hold"/>
                                         <p:tgtEl>
                                           <p:spTgt spid="34821"/>
                                         </p:tgtEl>
@@ -24778,7 +24883,7 @@
                                     </p:anim>
                                     <p:anim calcmode="lin" valueType="num">
                                       <p:cBhvr additive="base">
-                                        <p:cTn id="20" dur="500" fill="hold"/>
+                                        <p:cTn id="26" dur="500" fill="hold"/>
                                         <p:tgtEl>
                                           <p:spTgt spid="34821"/>
                                         </p:tgtEl>
@@ -24832,6 +24937,7 @@
     <p:bldLst>
       <p:bldP spid="34818" grpId="0"/>
       <p:bldP spid="34819" grpId="0" animBg="1"/>
+      <p:bldP spid="34820" grpId="0"/>
       <p:bldP spid="34821" grpId="0" animBg="1"/>
     </p:bldLst>
   </p:timing>
@@ -24899,14 +25005,14 @@
         <p:spPr>
           <a:extLst>
             <a:ext uri="{909E8E84-426E-40dd-AFC4-6F175D3DCCD1}">
-              <a14:hiddenFill xmlns="" xmlns:a14="http://schemas.microsoft.com/office/drawing/2010/main">
+              <a14:hiddenFill xmlns:a14="http://schemas.microsoft.com/office/drawing/2010/main" xmlns="">
                 <a:solidFill>
                   <a:srgbClr val="FFFFFF"/>
                 </a:solidFill>
               </a14:hiddenFill>
             </a:ext>
             <a:ext uri="{91240B29-F687-4f45-9708-019B960494DF}">
-              <a14:hiddenLine xmlns="" xmlns:a14="http://schemas.microsoft.com/office/drawing/2010/main" w="9525">
+              <a14:hiddenLine xmlns:a14="http://schemas.microsoft.com/office/drawing/2010/main" xmlns="" w="9525">
                 <a:solidFill>
                   <a:srgbClr val="000000"/>
                 </a:solidFill>
@@ -25160,14 +25266,14 @@
           <a:ln/>
           <a:extLst>
             <a:ext uri="{909E8E84-426E-40dd-AFC4-6F175D3DCCD1}">
-              <a14:hiddenFill xmlns="" xmlns:a14="http://schemas.microsoft.com/office/drawing/2010/main">
+              <a14:hiddenFill xmlns:a14="http://schemas.microsoft.com/office/drawing/2010/main" xmlns="">
                 <a:solidFill>
                   <a:srgbClr val="FFFFFF"/>
                 </a:solidFill>
               </a14:hiddenFill>
             </a:ext>
             <a:ext uri="{91240B29-F687-4f45-9708-019B960494DF}">
-              <a14:hiddenLine xmlns="" xmlns:a14="http://schemas.microsoft.com/office/drawing/2010/main" w="9525">
+              <a14:hiddenLine xmlns:a14="http://schemas.microsoft.com/office/drawing/2010/main" xmlns="" w="9525">
                 <a:solidFill>
                   <a:srgbClr val="000000"/>
                 </a:solidFill>
@@ -25320,14 +25426,14 @@
           </a:ln>
           <a:extLst>
             <a:ext uri="{909E8E84-426E-40dd-AFC4-6F175D3DCCD1}">
-              <a14:hiddenFill xmlns="" xmlns:a14="http://schemas.microsoft.com/office/drawing/2010/main">
+              <a14:hiddenFill xmlns:a14="http://schemas.microsoft.com/office/drawing/2010/main" xmlns="">
                 <a:solidFill>
                   <a:srgbClr val="FFFFFF"/>
                 </a:solidFill>
               </a14:hiddenFill>
             </a:ext>
             <a:ext uri="{91240B29-F687-4f45-9708-019B960494DF}">
-              <a14:hiddenLine xmlns="" xmlns:a14="http://schemas.microsoft.com/office/drawing/2010/main" w="12700" cap="sq">
+              <a14:hiddenLine xmlns:a14="http://schemas.microsoft.com/office/drawing/2010/main" xmlns="" w="12700" cap="sq">
                 <a:solidFill>
                   <a:srgbClr val="000000"/>
                 </a:solidFill>
@@ -25490,7 +25596,7 @@
           </a:ln>
           <a:extLst>
             <a:ext uri="{91240B29-F687-4f45-9708-019B960494DF}">
-              <a14:hiddenLine xmlns="" xmlns:a14="http://schemas.microsoft.com/office/drawing/2010/main" w="12700" cap="sq">
+              <a14:hiddenLine xmlns:a14="http://schemas.microsoft.com/office/drawing/2010/main" xmlns="" w="12700" cap="sq">
                 <a:solidFill>
                   <a:srgbClr val="000000"/>
                 </a:solidFill>
@@ -25674,7 +25780,7 @@
           </a:ln>
           <a:extLst>
             <a:ext uri="{909E8E84-426E-40dd-AFC4-6F175D3DCCD1}">
-              <a14:hiddenFill xmlns="" xmlns:a14="http://schemas.microsoft.com/office/drawing/2010/main">
+              <a14:hiddenFill xmlns:a14="http://schemas.microsoft.com/office/drawing/2010/main" xmlns="">
                 <a:solidFill>
                   <a:srgbClr val="FFFFFF"/>
                 </a:solidFill>
@@ -25988,14 +26094,14 @@
           <a:ln/>
           <a:extLst>
             <a:ext uri="{909E8E84-426E-40dd-AFC4-6F175D3DCCD1}">
-              <a14:hiddenFill xmlns="" xmlns:a14="http://schemas.microsoft.com/office/drawing/2010/main">
+              <a14:hiddenFill xmlns:a14="http://schemas.microsoft.com/office/drawing/2010/main" xmlns="">
                 <a:solidFill>
                   <a:srgbClr val="FFFFFF"/>
                 </a:solidFill>
               </a14:hiddenFill>
             </a:ext>
             <a:ext uri="{91240B29-F687-4f45-9708-019B960494DF}">
-              <a14:hiddenLine xmlns="" xmlns:a14="http://schemas.microsoft.com/office/drawing/2010/main" w="9525">
+              <a14:hiddenLine xmlns:a14="http://schemas.microsoft.com/office/drawing/2010/main" xmlns="" w="9525">
                 <a:solidFill>
                   <a:srgbClr val="000000"/>
                 </a:solidFill>
@@ -26148,14 +26254,14 @@
           </a:ln>
           <a:extLst>
             <a:ext uri="{909E8E84-426E-40dd-AFC4-6F175D3DCCD1}">
-              <a14:hiddenFill xmlns="" xmlns:a14="http://schemas.microsoft.com/office/drawing/2010/main">
+              <a14:hiddenFill xmlns:a14="http://schemas.microsoft.com/office/drawing/2010/main" xmlns="">
                 <a:solidFill>
                   <a:srgbClr val="FFFFFF"/>
                 </a:solidFill>
               </a14:hiddenFill>
             </a:ext>
             <a:ext uri="{91240B29-F687-4f45-9708-019B960494DF}">
-              <a14:hiddenLine xmlns="" xmlns:a14="http://schemas.microsoft.com/office/drawing/2010/main" w="12700" cap="sq">
+              <a14:hiddenLine xmlns:a14="http://schemas.microsoft.com/office/drawing/2010/main" xmlns="" w="12700" cap="sq">
                 <a:solidFill>
                   <a:srgbClr val="000000"/>
                 </a:solidFill>
@@ -26310,14 +26416,14 @@
           </a:ln>
           <a:extLst>
             <a:ext uri="{909E8E84-426E-40dd-AFC4-6F175D3DCCD1}">
-              <a14:hiddenFill xmlns="" xmlns:a14="http://schemas.microsoft.com/office/drawing/2010/main">
+              <a14:hiddenFill xmlns:a14="http://schemas.microsoft.com/office/drawing/2010/main" xmlns="">
                 <a:solidFill>
                   <a:srgbClr val="FFFFFF"/>
                 </a:solidFill>
               </a14:hiddenFill>
             </a:ext>
             <a:ext uri="{91240B29-F687-4f45-9708-019B960494DF}">
-              <a14:hiddenLine xmlns="" xmlns:a14="http://schemas.microsoft.com/office/drawing/2010/main" w="9525">
+              <a14:hiddenLine xmlns:a14="http://schemas.microsoft.com/office/drawing/2010/main" xmlns="" w="9525">
                 <a:solidFill>
                   <a:srgbClr val="000000"/>
                 </a:solidFill>
@@ -26433,7 +26539,7 @@
           </a:ln>
           <a:extLst>
             <a:ext uri="{91240B29-F687-4f45-9708-019B960494DF}">
-              <a14:hiddenLine xmlns="" xmlns:a14="http://schemas.microsoft.com/office/drawing/2010/main" w="12700" cap="sq">
+              <a14:hiddenLine xmlns:a14="http://schemas.microsoft.com/office/drawing/2010/main" xmlns="" w="12700" cap="sq">
                 <a:solidFill>
                   <a:srgbClr val="000000"/>
                 </a:solidFill>
@@ -27023,14 +27129,14 @@
           <a:ln/>
           <a:extLst>
             <a:ext uri="{909E8E84-426E-40dd-AFC4-6F175D3DCCD1}">
-              <a14:hiddenFill xmlns="" xmlns:a14="http://schemas.microsoft.com/office/drawing/2010/main">
+              <a14:hiddenFill xmlns:a14="http://schemas.microsoft.com/office/drawing/2010/main" xmlns="">
                 <a:solidFill>
                   <a:srgbClr val="FFFFFF"/>
                 </a:solidFill>
               </a14:hiddenFill>
             </a:ext>
             <a:ext uri="{91240B29-F687-4f45-9708-019B960494DF}">
-              <a14:hiddenLine xmlns="" xmlns:a14="http://schemas.microsoft.com/office/drawing/2010/main" w="9525">
+              <a14:hiddenLine xmlns:a14="http://schemas.microsoft.com/office/drawing/2010/main" xmlns="" w="9525">
                 <a:solidFill>
                   <a:srgbClr val="000000"/>
                 </a:solidFill>
@@ -27183,14 +27289,14 @@
           </a:ln>
           <a:extLst>
             <a:ext uri="{909E8E84-426E-40dd-AFC4-6F175D3DCCD1}">
-              <a14:hiddenFill xmlns="" xmlns:a14="http://schemas.microsoft.com/office/drawing/2010/main">
+              <a14:hiddenFill xmlns:a14="http://schemas.microsoft.com/office/drawing/2010/main" xmlns="">
                 <a:solidFill>
                   <a:srgbClr val="FFFFFF"/>
                 </a:solidFill>
               </a14:hiddenFill>
             </a:ext>
             <a:ext uri="{91240B29-F687-4f45-9708-019B960494DF}">
-              <a14:hiddenLine xmlns="" xmlns:a14="http://schemas.microsoft.com/office/drawing/2010/main" w="9525">
+              <a14:hiddenLine xmlns:a14="http://schemas.microsoft.com/office/drawing/2010/main" xmlns="" w="9525">
                 <a:solidFill>
                   <a:srgbClr val="000000"/>
                 </a:solidFill>
@@ -27256,7 +27362,7 @@
           </a:ln>
           <a:extLst>
             <a:ext uri="{91240B29-F687-4f45-9708-019B960494DF}">
-              <a14:hiddenLine xmlns="" xmlns:a14="http://schemas.microsoft.com/office/drawing/2010/main" w="12700" cap="sq">
+              <a14:hiddenLine xmlns:a14="http://schemas.microsoft.com/office/drawing/2010/main" xmlns="" w="12700" cap="sq">
                 <a:solidFill>
                   <a:srgbClr val="000000"/>
                 </a:solidFill>
@@ -27462,14 +27568,14 @@
           </a:ln>
           <a:extLst>
             <a:ext uri="{909E8E84-426E-40dd-AFC4-6F175D3DCCD1}">
-              <a14:hiddenFill xmlns="" xmlns:a14="http://schemas.microsoft.com/office/drawing/2010/main">
+              <a14:hiddenFill xmlns:a14="http://schemas.microsoft.com/office/drawing/2010/main" xmlns="">
                 <a:solidFill>
                   <a:srgbClr val="FFFFFF"/>
                 </a:solidFill>
               </a14:hiddenFill>
             </a:ext>
             <a:ext uri="{91240B29-F687-4f45-9708-019B960494DF}">
-              <a14:hiddenLine xmlns="" xmlns:a14="http://schemas.microsoft.com/office/drawing/2010/main" w="9525">
+              <a14:hiddenLine xmlns:a14="http://schemas.microsoft.com/office/drawing/2010/main" xmlns="" w="9525">
                 <a:solidFill>
                   <a:srgbClr val="000000"/>
                 </a:solidFill>
@@ -28623,14 +28729,14 @@
           <a:ln/>
           <a:extLst>
             <a:ext uri="{909E8E84-426E-40dd-AFC4-6F175D3DCCD1}">
-              <a14:hiddenFill xmlns="" xmlns:a14="http://schemas.microsoft.com/office/drawing/2010/main">
+              <a14:hiddenFill xmlns:a14="http://schemas.microsoft.com/office/drawing/2010/main" xmlns="">
                 <a:solidFill>
                   <a:srgbClr val="FFFFFF"/>
                 </a:solidFill>
               </a14:hiddenFill>
             </a:ext>
             <a:ext uri="{91240B29-F687-4f45-9708-019B960494DF}">
-              <a14:hiddenLine xmlns="" xmlns:a14="http://schemas.microsoft.com/office/drawing/2010/main" w="9525">
+              <a14:hiddenLine xmlns:a14="http://schemas.microsoft.com/office/drawing/2010/main" xmlns="" w="9525">
                 <a:solidFill>
                   <a:srgbClr val="000000"/>
                 </a:solidFill>
@@ -28787,7 +28893,7 @@
           </a:ln>
           <a:extLst>
             <a:ext uri="{91240B29-F687-4f45-9708-019B960494DF}">
-              <a14:hiddenLine xmlns="" xmlns:a14="http://schemas.microsoft.com/office/drawing/2010/main" w="12700" cap="sq">
+              <a14:hiddenLine xmlns:a14="http://schemas.microsoft.com/office/drawing/2010/main" xmlns="" w="12700" cap="sq">
                 <a:solidFill>
                   <a:srgbClr val="000000"/>
                 </a:solidFill>
@@ -28993,14 +29099,14 @@
           </a:ln>
           <a:extLst>
             <a:ext uri="{909E8E84-426E-40dd-AFC4-6F175D3DCCD1}">
-              <a14:hiddenFill xmlns="" xmlns:a14="http://schemas.microsoft.com/office/drawing/2010/main">
+              <a14:hiddenFill xmlns:a14="http://schemas.microsoft.com/office/drawing/2010/main" xmlns="">
                 <a:solidFill>
                   <a:srgbClr val="FFFFFF"/>
                 </a:solidFill>
               </a14:hiddenFill>
             </a:ext>
             <a:ext uri="{91240B29-F687-4f45-9708-019B960494DF}">
-              <a14:hiddenLine xmlns="" xmlns:a14="http://schemas.microsoft.com/office/drawing/2010/main" w="9525">
+              <a14:hiddenLine xmlns:a14="http://schemas.microsoft.com/office/drawing/2010/main" xmlns="" w="9525">
                 <a:solidFill>
                   <a:srgbClr val="000000"/>
                 </a:solidFill>
@@ -29065,7 +29171,7 @@
           </a:ln>
           <a:extLst>
             <a:ext uri="{909E8E84-426E-40dd-AFC4-6F175D3DCCD1}">
-              <a14:hiddenFill xmlns="" xmlns:a14="http://schemas.microsoft.com/office/drawing/2010/main">
+              <a14:hiddenFill xmlns:a14="http://schemas.microsoft.com/office/drawing/2010/main" xmlns="">
                 <a:solidFill>
                   <a:srgbClr val="FFFFFF"/>
                 </a:solidFill>
@@ -29124,7 +29230,7 @@
           </a:ln>
           <a:extLst>
             <a:ext uri="{909E8E84-426E-40dd-AFC4-6F175D3DCCD1}">
-              <a14:hiddenFill xmlns="" xmlns:a14="http://schemas.microsoft.com/office/drawing/2010/main">
+              <a14:hiddenFill xmlns:a14="http://schemas.microsoft.com/office/drawing/2010/main" xmlns="">
                 <a:noFill/>
               </a14:hiddenFill>
             </a:ext>
@@ -29167,7 +29273,7 @@
           </a:ln>
           <a:extLst>
             <a:ext uri="{909E8E84-426E-40dd-AFC4-6F175D3DCCD1}">
-              <a14:hiddenFill xmlns="" xmlns:a14="http://schemas.microsoft.com/office/drawing/2010/main">
+              <a14:hiddenFill xmlns:a14="http://schemas.microsoft.com/office/drawing/2010/main" xmlns="">
                 <a:noFill/>
               </a14:hiddenFill>
             </a:ext>
@@ -29210,7 +29316,7 @@
           </a:ln>
           <a:extLst>
             <a:ext uri="{909E8E84-426E-40dd-AFC4-6F175D3DCCD1}">
-              <a14:hiddenFill xmlns="" xmlns:a14="http://schemas.microsoft.com/office/drawing/2010/main">
+              <a14:hiddenFill xmlns:a14="http://schemas.microsoft.com/office/drawing/2010/main" xmlns="">
                 <a:noFill/>
               </a14:hiddenFill>
             </a:ext>
@@ -29253,7 +29359,7 @@
           </a:ln>
           <a:extLst>
             <a:ext uri="{909E8E84-426E-40dd-AFC4-6F175D3DCCD1}">
-              <a14:hiddenFill xmlns="" xmlns:a14="http://schemas.microsoft.com/office/drawing/2010/main">
+              <a14:hiddenFill xmlns:a14="http://schemas.microsoft.com/office/drawing/2010/main" xmlns="">
                 <a:noFill/>
               </a14:hiddenFill>
             </a:ext>
@@ -29296,7 +29402,7 @@
           </a:ln>
           <a:extLst>
             <a:ext uri="{909E8E84-426E-40dd-AFC4-6F175D3DCCD1}">
-              <a14:hiddenFill xmlns="" xmlns:a14="http://schemas.microsoft.com/office/drawing/2010/main">
+              <a14:hiddenFill xmlns:a14="http://schemas.microsoft.com/office/drawing/2010/main" xmlns="">
                 <a:noFill/>
               </a14:hiddenFill>
             </a:ext>
@@ -29339,7 +29445,7 @@
           </a:ln>
           <a:extLst>
             <a:ext uri="{909E8E84-426E-40dd-AFC4-6F175D3DCCD1}">
-              <a14:hiddenFill xmlns="" xmlns:a14="http://schemas.microsoft.com/office/drawing/2010/main">
+              <a14:hiddenFill xmlns:a14="http://schemas.microsoft.com/office/drawing/2010/main" xmlns="">
                 <a:noFill/>
               </a14:hiddenFill>
             </a:ext>
@@ -29382,7 +29488,7 @@
           </a:ln>
           <a:extLst>
             <a:ext uri="{909E8E84-426E-40dd-AFC4-6F175D3DCCD1}">
-              <a14:hiddenFill xmlns="" xmlns:a14="http://schemas.microsoft.com/office/drawing/2010/main">
+              <a14:hiddenFill xmlns:a14="http://schemas.microsoft.com/office/drawing/2010/main" xmlns="">
                 <a:noFill/>
               </a14:hiddenFill>
             </a:ext>
@@ -29425,7 +29531,7 @@
           </a:ln>
           <a:extLst>
             <a:ext uri="{909E8E84-426E-40dd-AFC4-6F175D3DCCD1}">
-              <a14:hiddenFill xmlns="" xmlns:a14="http://schemas.microsoft.com/office/drawing/2010/main">
+              <a14:hiddenFill xmlns:a14="http://schemas.microsoft.com/office/drawing/2010/main" xmlns="">
                 <a:noFill/>
               </a14:hiddenFill>
             </a:ext>
@@ -29468,7 +29574,7 @@
           </a:ln>
           <a:extLst>
             <a:ext uri="{909E8E84-426E-40dd-AFC4-6F175D3DCCD1}">
-              <a14:hiddenFill xmlns="" xmlns:a14="http://schemas.microsoft.com/office/drawing/2010/main">
+              <a14:hiddenFill xmlns:a14="http://schemas.microsoft.com/office/drawing/2010/main" xmlns="">
                 <a:noFill/>
               </a14:hiddenFill>
             </a:ext>
@@ -29511,7 +29617,7 @@
           </a:ln>
           <a:extLst>
             <a:ext uri="{909E8E84-426E-40dd-AFC4-6F175D3DCCD1}">
-              <a14:hiddenFill xmlns="" xmlns:a14="http://schemas.microsoft.com/office/drawing/2010/main">
+              <a14:hiddenFill xmlns:a14="http://schemas.microsoft.com/office/drawing/2010/main" xmlns="">
                 <a:noFill/>
               </a14:hiddenFill>
             </a:ext>
@@ -29554,7 +29660,7 @@
           </a:ln>
           <a:extLst>
             <a:ext uri="{909E8E84-426E-40dd-AFC4-6F175D3DCCD1}">
-              <a14:hiddenFill xmlns="" xmlns:a14="http://schemas.microsoft.com/office/drawing/2010/main">
+              <a14:hiddenFill xmlns:a14="http://schemas.microsoft.com/office/drawing/2010/main" xmlns="">
                 <a:noFill/>
               </a14:hiddenFill>
             </a:ext>
@@ -29597,7 +29703,7 @@
           </a:ln>
           <a:extLst>
             <a:ext uri="{909E8E84-426E-40dd-AFC4-6F175D3DCCD1}">
-              <a14:hiddenFill xmlns="" xmlns:a14="http://schemas.microsoft.com/office/drawing/2010/main">
+              <a14:hiddenFill xmlns:a14="http://schemas.microsoft.com/office/drawing/2010/main" xmlns="">
                 <a:noFill/>
               </a14:hiddenFill>
             </a:ext>
@@ -30905,14 +31011,14 @@
           <a:ln/>
           <a:extLst>
             <a:ext uri="{909E8E84-426E-40dd-AFC4-6F175D3DCCD1}">
-              <a14:hiddenFill xmlns="" xmlns:a14="http://schemas.microsoft.com/office/drawing/2010/main">
+              <a14:hiddenFill xmlns:a14="http://schemas.microsoft.com/office/drawing/2010/main" xmlns="">
                 <a:solidFill>
                   <a:srgbClr val="FFFFFF"/>
                 </a:solidFill>
               </a14:hiddenFill>
             </a:ext>
             <a:ext uri="{91240B29-F687-4f45-9708-019B960494DF}">
-              <a14:hiddenLine xmlns="" xmlns:a14="http://schemas.microsoft.com/office/drawing/2010/main" w="9525">
+              <a14:hiddenLine xmlns:a14="http://schemas.microsoft.com/office/drawing/2010/main" xmlns="" w="9525">
                 <a:solidFill>
                   <a:srgbClr val="000000"/>
                 </a:solidFill>
@@ -31065,14 +31171,14 @@
           </a:ln>
           <a:extLst>
             <a:ext uri="{909E8E84-426E-40dd-AFC4-6F175D3DCCD1}">
-              <a14:hiddenFill xmlns="" xmlns:a14="http://schemas.microsoft.com/office/drawing/2010/main">
+              <a14:hiddenFill xmlns:a14="http://schemas.microsoft.com/office/drawing/2010/main" xmlns="">
                 <a:solidFill>
                   <a:srgbClr val="FFFFFF"/>
                 </a:solidFill>
               </a14:hiddenFill>
             </a:ext>
             <a:ext uri="{91240B29-F687-4f45-9708-019B960494DF}">
-              <a14:hiddenLine xmlns="" xmlns:a14="http://schemas.microsoft.com/office/drawing/2010/main" w="12700" cap="sq">
+              <a14:hiddenLine xmlns:a14="http://schemas.microsoft.com/office/drawing/2010/main" xmlns="" w="12700" cap="sq">
                 <a:solidFill>
                   <a:srgbClr val="000000"/>
                 </a:solidFill>
@@ -31237,7 +31343,7 @@
           </a:ln>
           <a:extLst>
             <a:ext uri="{91240B29-F687-4f45-9708-019B960494DF}">
-              <a14:hiddenLine xmlns="" xmlns:a14="http://schemas.microsoft.com/office/drawing/2010/main" w="12700" cap="sq">
+              <a14:hiddenLine xmlns:a14="http://schemas.microsoft.com/office/drawing/2010/main" xmlns="" w="12700" cap="sq">
                 <a:solidFill>
                   <a:srgbClr val="000000"/>
                 </a:solidFill>
@@ -31446,7 +31552,7 @@
           </a:ln>
           <a:extLst>
             <a:ext uri="{909E8E84-426E-40dd-AFC4-6F175D3DCCD1}">
-              <a14:hiddenFill xmlns="" xmlns:a14="http://schemas.microsoft.com/office/drawing/2010/main">
+              <a14:hiddenFill xmlns:a14="http://schemas.microsoft.com/office/drawing/2010/main" xmlns="">
                 <a:solidFill>
                   <a:srgbClr val="FFFFFF"/>
                 </a:solidFill>
@@ -31771,14 +31877,14 @@
           <a:ln/>
           <a:extLst>
             <a:ext uri="{909E8E84-426E-40dd-AFC4-6F175D3DCCD1}">
-              <a14:hiddenFill xmlns="" xmlns:a14="http://schemas.microsoft.com/office/drawing/2010/main">
+              <a14:hiddenFill xmlns:a14="http://schemas.microsoft.com/office/drawing/2010/main" xmlns="">
                 <a:solidFill>
                   <a:srgbClr val="FFFFFF"/>
                 </a:solidFill>
               </a14:hiddenFill>
             </a:ext>
             <a:ext uri="{91240B29-F687-4f45-9708-019B960494DF}">
-              <a14:hiddenLine xmlns="" xmlns:a14="http://schemas.microsoft.com/office/drawing/2010/main" w="9525">
+              <a14:hiddenLine xmlns:a14="http://schemas.microsoft.com/office/drawing/2010/main" xmlns="" w="9525">
                 <a:solidFill>
                   <a:srgbClr val="000000"/>
                 </a:solidFill>
@@ -31931,14 +32037,14 @@
           </a:ln>
           <a:extLst>
             <a:ext uri="{909E8E84-426E-40dd-AFC4-6F175D3DCCD1}">
-              <a14:hiddenFill xmlns="" xmlns:a14="http://schemas.microsoft.com/office/drawing/2010/main">
+              <a14:hiddenFill xmlns:a14="http://schemas.microsoft.com/office/drawing/2010/main" xmlns="">
                 <a:solidFill>
                   <a:srgbClr val="FFFFFF"/>
                 </a:solidFill>
               </a14:hiddenFill>
             </a:ext>
             <a:ext uri="{91240B29-F687-4f45-9708-019B960494DF}">
-              <a14:hiddenLine xmlns="" xmlns:a14="http://schemas.microsoft.com/office/drawing/2010/main" w="12700" cap="sq">
+              <a14:hiddenLine xmlns:a14="http://schemas.microsoft.com/office/drawing/2010/main" xmlns="" w="12700" cap="sq">
                 <a:solidFill>
                   <a:srgbClr val="000000"/>
                 </a:solidFill>
@@ -32111,7 +32217,7 @@
           </a:ln>
           <a:extLst>
             <a:ext uri="{91240B29-F687-4f45-9708-019B960494DF}">
-              <a14:hiddenLine xmlns="" xmlns:a14="http://schemas.microsoft.com/office/drawing/2010/main" w="12700" cap="sq">
+              <a14:hiddenLine xmlns:a14="http://schemas.microsoft.com/office/drawing/2010/main" xmlns="" w="12700" cap="sq">
                 <a:solidFill>
                   <a:srgbClr val="000000"/>
                 </a:solidFill>
@@ -32401,14 +32507,14 @@
           </a:ln>
           <a:extLst>
             <a:ext uri="{909E8E84-426E-40dd-AFC4-6F175D3DCCD1}">
-              <a14:hiddenFill xmlns="" xmlns:a14="http://schemas.microsoft.com/office/drawing/2010/main">
+              <a14:hiddenFill xmlns:a14="http://schemas.microsoft.com/office/drawing/2010/main" xmlns="">
                 <a:solidFill>
                   <a:srgbClr val="FFFFFF"/>
                 </a:solidFill>
               </a14:hiddenFill>
             </a:ext>
             <a:ext uri="{91240B29-F687-4f45-9708-019B960494DF}">
-              <a14:hiddenLine xmlns="" xmlns:a14="http://schemas.microsoft.com/office/drawing/2010/main" w="12700" cap="sq">
+              <a14:hiddenLine xmlns:a14="http://schemas.microsoft.com/office/drawing/2010/main" xmlns="" w="12700" cap="sq">
                 <a:solidFill>
                   <a:srgbClr val="000000"/>
                 </a:solidFill>
@@ -32565,7 +32671,7 @@
           </a:ln>
           <a:extLst>
             <a:ext uri="{91240B29-F687-4f45-9708-019B960494DF}">
-              <a14:hiddenLine xmlns="" xmlns:a14="http://schemas.microsoft.com/office/drawing/2010/main" w="12700" cap="sq">
+              <a14:hiddenLine xmlns:a14="http://schemas.microsoft.com/office/drawing/2010/main" xmlns="" w="12700" cap="sq">
                 <a:solidFill>
                   <a:srgbClr val="000000"/>
                 </a:solidFill>
@@ -33091,14 +33197,14 @@
           <a:ln/>
           <a:extLst>
             <a:ext uri="{909E8E84-426E-40dd-AFC4-6F175D3DCCD1}">
-              <a14:hiddenFill xmlns="" xmlns:a14="http://schemas.microsoft.com/office/drawing/2010/main">
+              <a14:hiddenFill xmlns:a14="http://schemas.microsoft.com/office/drawing/2010/main" xmlns="">
                 <a:solidFill>
                   <a:srgbClr val="FFFFFF"/>
                 </a:solidFill>
               </a14:hiddenFill>
             </a:ext>
             <a:ext uri="{91240B29-F687-4f45-9708-019B960494DF}">
-              <a14:hiddenLine xmlns="" xmlns:a14="http://schemas.microsoft.com/office/drawing/2010/main" w="9525">
+              <a14:hiddenLine xmlns:a14="http://schemas.microsoft.com/office/drawing/2010/main" xmlns="" w="9525">
                 <a:solidFill>
                   <a:srgbClr val="000000"/>
                 </a:solidFill>
@@ -33251,14 +33357,14 @@
           </a:ln>
           <a:extLst>
             <a:ext uri="{909E8E84-426E-40dd-AFC4-6F175D3DCCD1}">
-              <a14:hiddenFill xmlns="" xmlns:a14="http://schemas.microsoft.com/office/drawing/2010/main">
+              <a14:hiddenFill xmlns:a14="http://schemas.microsoft.com/office/drawing/2010/main" xmlns="">
                 <a:solidFill>
                   <a:srgbClr val="FFFFFF"/>
                 </a:solidFill>
               </a14:hiddenFill>
             </a:ext>
             <a:ext uri="{91240B29-F687-4f45-9708-019B960494DF}">
-              <a14:hiddenLine xmlns="" xmlns:a14="http://schemas.microsoft.com/office/drawing/2010/main" w="12700" cap="sq">
+              <a14:hiddenLine xmlns:a14="http://schemas.microsoft.com/office/drawing/2010/main" xmlns="" w="12700" cap="sq">
                 <a:solidFill>
                   <a:srgbClr val="000000"/>
                 </a:solidFill>
@@ -33423,7 +33529,7 @@
           </a:ln>
           <a:extLst>
             <a:ext uri="{91240B29-F687-4f45-9708-019B960494DF}">
-              <a14:hiddenLine xmlns="" xmlns:a14="http://schemas.microsoft.com/office/drawing/2010/main" w="12700" cap="sq">
+              <a14:hiddenLine xmlns:a14="http://schemas.microsoft.com/office/drawing/2010/main" xmlns="" w="12700" cap="sq">
                 <a:solidFill>
                   <a:srgbClr val="000000"/>
                 </a:solidFill>
@@ -33610,7 +33716,7 @@
           </a:ln>
           <a:extLst>
             <a:ext uri="{909E8E84-426E-40dd-AFC4-6F175D3DCCD1}">
-              <a14:hiddenFill xmlns="" xmlns:a14="http://schemas.microsoft.com/office/drawing/2010/main">
+              <a14:hiddenFill xmlns:a14="http://schemas.microsoft.com/office/drawing/2010/main" xmlns="">
                 <a:solidFill>
                   <a:srgbClr val="FFFFFF"/>
                 </a:solidFill>

--- a/topic05-list-comprehensions/unit-05a-lectures/talk-1/a-list-comprehensions.pptx
+++ b/topic05-list-comprehensions/unit-05a-lectures/talk-1/a-list-comprehensions.pptx
@@ -556,14 +556,14 @@
           </a:ln>
           <a:extLst>
             <a:ext uri="{909E8E84-426E-40dd-AFC4-6F175D3DCCD1}">
-              <a14:hiddenFill xmlns:a14="http://schemas.microsoft.com/office/drawing/2010/main" xmlns="">
+              <a14:hiddenFill xmlns="" xmlns:a14="http://schemas.microsoft.com/office/drawing/2010/main">
                 <a:solidFill>
                   <a:srgbClr val="FFFFFF"/>
                 </a:solidFill>
               </a14:hiddenFill>
             </a:ext>
             <a:ext uri="{FAA26D3D-D897-4be2-8F04-BA451C77F1D7}">
-              <ma14:placeholderFlag xmlns:ma14="http://schemas.microsoft.com/office/mac/drawingml/2011/main" xmlns="" val="1"/>
+              <ma14:placeholderFlag xmlns="" xmlns:ma14="http://schemas.microsoft.com/office/mac/drawingml/2011/main" val="1"/>
             </a:ext>
           </a:extLst>
         </p:spPr>
@@ -907,14 +907,14 @@
           <a:ln w="9525"/>
           <a:extLst>
             <a:ext uri="{909E8E84-426E-40dd-AFC4-6F175D3DCCD1}">
-              <a14:hiddenFill xmlns:a14="http://schemas.microsoft.com/office/drawing/2010/main" xmlns="">
+              <a14:hiddenFill xmlns="" xmlns:a14="http://schemas.microsoft.com/office/drawing/2010/main">
                 <a:solidFill>
                   <a:srgbClr val="FFFFFF"/>
                 </a:solidFill>
               </a14:hiddenFill>
             </a:ext>
             <a:ext uri="{91240B29-F687-4f45-9708-019B960494DF}">
-              <a14:hiddenLine xmlns:a14="http://schemas.microsoft.com/office/drawing/2010/main" xmlns="" w="12700" cap="sq">
+              <a14:hiddenLine xmlns="" xmlns:a14="http://schemas.microsoft.com/office/drawing/2010/main" w="12700" cap="sq">
                 <a:solidFill>
                   <a:srgbClr val="000000"/>
                 </a:solidFill>
@@ -1078,14 +1078,14 @@
           <a:ln w="9525"/>
           <a:extLst>
             <a:ext uri="{909E8E84-426E-40dd-AFC4-6F175D3DCCD1}">
-              <a14:hiddenFill xmlns:a14="http://schemas.microsoft.com/office/drawing/2010/main" xmlns="">
+              <a14:hiddenFill xmlns="" xmlns:a14="http://schemas.microsoft.com/office/drawing/2010/main">
                 <a:solidFill>
                   <a:srgbClr val="FFFFFF"/>
                 </a:solidFill>
               </a14:hiddenFill>
             </a:ext>
             <a:ext uri="{91240B29-F687-4f45-9708-019B960494DF}">
-              <a14:hiddenLine xmlns:a14="http://schemas.microsoft.com/office/drawing/2010/main" xmlns="" w="9525" cap="sq">
+              <a14:hiddenLine xmlns="" xmlns:a14="http://schemas.microsoft.com/office/drawing/2010/main" w="9525" cap="sq">
                 <a:solidFill>
                   <a:srgbClr val="000000"/>
                 </a:solidFill>
@@ -1095,7 +1095,7 @@
               </a14:hiddenLine>
             </a:ext>
             <a:ext uri="{FAA26D3D-D897-4be2-8F04-BA451C77F1D7}">
-              <ma14:placeholderFlag xmlns:ma14="http://schemas.microsoft.com/office/mac/drawingml/2011/main" xmlns="" val="1"/>
+              <ma14:placeholderFlag xmlns="" xmlns:ma14="http://schemas.microsoft.com/office/mac/drawingml/2011/main" val="1"/>
             </a:ext>
           </a:extLst>
         </p:spPr>
@@ -1394,7 +1394,7 @@
             <a:fld id="{08B9EBBA-996F-894A-B54A-D6246ED52CEA}" type="datetimeFigureOut">
               <a:rPr lang="en-US" smtClean="0"/>
               <a:pPr/>
-              <a:t>2/5/26</a:t>
+              <a:t>2/19/26</a:t>
             </a:fld>
             <a:endParaRPr lang="en-US" dirty="0"/>
           </a:p>
@@ -1816,7 +1816,7 @@
             <a:fld id="{09B482E8-6E0E-1B4F-B1FD-C69DB9E858D9}" type="datetimeFigureOut">
               <a:rPr lang="en-US" smtClean="0"/>
               <a:pPr/>
-              <a:t>2/5/26</a:t>
+              <a:t>2/19/26</a:t>
             </a:fld>
             <a:endParaRPr lang="en-US" dirty="0"/>
           </a:p>
@@ -2160,7 +2160,7 @@
             <a:fld id="{09B482E8-6E0E-1B4F-B1FD-C69DB9E858D9}" type="datetimeFigureOut">
               <a:rPr lang="en-US" smtClean="0"/>
               <a:pPr/>
-              <a:t>2/5/26</a:t>
+              <a:t>2/19/26</a:t>
             </a:fld>
             <a:endParaRPr lang="en-US" dirty="0"/>
           </a:p>
@@ -2573,7 +2573,7 @@
             <a:fld id="{09B482E8-6E0E-1B4F-B1FD-C69DB9E858D9}" type="datetimeFigureOut">
               <a:rPr lang="en-US" smtClean="0"/>
               <a:pPr/>
-              <a:t>2/5/26</a:t>
+              <a:t>2/19/26</a:t>
             </a:fld>
             <a:endParaRPr lang="en-US" dirty="0"/>
           </a:p>
@@ -3149,7 +3149,7 @@
             <a:fld id="{09B482E8-6E0E-1B4F-B1FD-C69DB9E858D9}" type="datetimeFigureOut">
               <a:rPr lang="en-US" smtClean="0"/>
               <a:pPr/>
-              <a:t>2/5/26</a:t>
+              <a:t>2/19/26</a:t>
             </a:fld>
             <a:endParaRPr lang="en-US" dirty="0"/>
           </a:p>
@@ -3838,7 +3838,7 @@
             <a:fld id="{09B482E8-6E0E-1B4F-B1FD-C69DB9E858D9}" type="datetimeFigureOut">
               <a:rPr lang="en-US" smtClean="0"/>
               <a:pPr/>
-              <a:t>2/5/26</a:t>
+              <a:t>2/19/26</a:t>
             </a:fld>
             <a:endParaRPr lang="en-US" dirty="0"/>
           </a:p>
@@ -4759,7 +4759,7 @@
             <a:fld id="{09B482E8-6E0E-1B4F-B1FD-C69DB9E858D9}" type="datetimeFigureOut">
               <a:rPr lang="en-US" smtClean="0"/>
               <a:pPr/>
-              <a:t>2/5/26</a:t>
+              <a:t>2/19/26</a:t>
             </a:fld>
             <a:endParaRPr lang="en-US" dirty="0"/>
           </a:p>
@@ -5080,7 +5080,7 @@
             <a:fld id="{09B482E8-6E0E-1B4F-B1FD-C69DB9E858D9}" type="datetimeFigureOut">
               <a:rPr lang="en-US" smtClean="0"/>
               <a:pPr/>
-              <a:t>2/5/26</a:t>
+              <a:t>2/19/26</a:t>
             </a:fld>
             <a:endParaRPr lang="en-US" dirty="0"/>
           </a:p>
@@ -5351,7 +5351,7 @@
             <a:fld id="{09B482E8-6E0E-1B4F-B1FD-C69DB9E858D9}" type="datetimeFigureOut">
               <a:rPr lang="en-US" smtClean="0"/>
               <a:pPr/>
-              <a:t>2/5/26</a:t>
+              <a:t>2/19/26</a:t>
             </a:fld>
             <a:endParaRPr lang="en-US" dirty="0"/>
           </a:p>
@@ -5681,7 +5681,7 @@
             <a:fld id="{09B482E8-6E0E-1B4F-B1FD-C69DB9E858D9}" type="datetimeFigureOut">
               <a:rPr lang="en-US" smtClean="0"/>
               <a:pPr/>
-              <a:t>2/5/26</a:t>
+              <a:t>2/19/26</a:t>
             </a:fld>
             <a:endParaRPr lang="en-US" dirty="0"/>
           </a:p>
@@ -6077,7 +6077,7 @@
             <a:fld id="{8DFA1846-DA80-1C48-A609-854EA85C59AD}" type="datetimeFigureOut">
               <a:rPr lang="en-US" smtClean="0"/>
               <a:pPr/>
-              <a:t>2/5/26</a:t>
+              <a:t>2/19/26</a:t>
             </a:fld>
             <a:endParaRPr lang="en-US" dirty="0"/>
           </a:p>
@@ -6460,7 +6460,7 @@
             <a:fld id="{09B482E8-6E0E-1B4F-B1FD-C69DB9E858D9}" type="datetimeFigureOut">
               <a:rPr lang="en-US" smtClean="0"/>
               <a:pPr/>
-              <a:t>2/5/26</a:t>
+              <a:t>2/19/26</a:t>
             </a:fld>
             <a:endParaRPr lang="en-US" dirty="0"/>
           </a:p>
@@ -6973,7 +6973,7 @@
             <a:fld id="{09B482E8-6E0E-1B4F-B1FD-C69DB9E858D9}" type="datetimeFigureOut">
               <a:rPr lang="en-US" smtClean="0"/>
               <a:pPr/>
-              <a:t>2/5/26</a:t>
+              <a:t>2/19/26</a:t>
             </a:fld>
             <a:endParaRPr lang="en-US" dirty="0"/>
           </a:p>
@@ -7251,7 +7251,7 @@
             <a:fld id="{F13A34C8-038E-2045-AF43-DF7DBB8E0E9E}" type="datetimeFigureOut">
               <a:rPr lang="en-US" smtClean="0"/>
               <a:pPr/>
-              <a:t>2/5/26</a:t>
+              <a:t>2/19/26</a:t>
             </a:fld>
             <a:endParaRPr lang="en-US" dirty="0"/>
           </a:p>
@@ -7428,7 +7428,7 @@
             <a:fld id="{8818C68F-D26B-8F47-958C-23B49CF8A634}" type="datetimeFigureOut">
               <a:rPr lang="en-US" smtClean="0"/>
               <a:pPr/>
-              <a:t>2/5/26</a:t>
+              <a:t>2/19/26</a:t>
             </a:fld>
             <a:endParaRPr lang="en-US" dirty="0"/>
           </a:p>
@@ -7825,7 +7825,7 @@
             <a:fld id="{09B482E8-6E0E-1B4F-B1FD-C69DB9E858D9}" type="datetimeFigureOut">
               <a:rPr lang="en-US" smtClean="0"/>
               <a:pPr/>
-              <a:t>2/5/26</a:t>
+              <a:t>2/19/26</a:t>
             </a:fld>
             <a:endParaRPr lang="en-US" dirty="0"/>
           </a:p>
@@ -8241,7 +8241,7 @@
             <a:fld id="{09B482E8-6E0E-1B4F-B1FD-C69DB9E858D9}" type="datetimeFigureOut">
               <a:rPr lang="en-US" smtClean="0"/>
               <a:pPr/>
-              <a:t>2/5/26</a:t>
+              <a:t>2/19/26</a:t>
             </a:fld>
             <a:endParaRPr lang="en-US" dirty="0"/>
           </a:p>
@@ -8492,7 +8492,7 @@
             <a:fld id="{09B482E8-6E0E-1B4F-B1FD-C69DB9E858D9}" type="datetimeFigureOut">
               <a:rPr lang="en-US" smtClean="0"/>
               <a:pPr/>
-              <a:t>2/5/26</a:t>
+              <a:t>2/19/26</a:t>
             </a:fld>
             <a:endParaRPr lang="en-US" dirty="0"/>
           </a:p>
@@ -8930,14 +8930,14 @@
           <a:ln/>
           <a:extLst>
             <a:ext uri="{909E8E84-426E-40dd-AFC4-6F175D3DCCD1}">
-              <a14:hiddenFill xmlns:a14="http://schemas.microsoft.com/office/drawing/2010/main" xmlns="">
+              <a14:hiddenFill xmlns="" xmlns:a14="http://schemas.microsoft.com/office/drawing/2010/main">
                 <a:solidFill>
                   <a:srgbClr val="FFFFFF"/>
                 </a:solidFill>
               </a14:hiddenFill>
             </a:ext>
             <a:ext uri="{91240B29-F687-4f45-9708-019B960494DF}">
-              <a14:hiddenLine xmlns:a14="http://schemas.microsoft.com/office/drawing/2010/main" xmlns="" w="9525">
+              <a14:hiddenLine xmlns="" xmlns:a14="http://schemas.microsoft.com/office/drawing/2010/main" w="9525">
                 <a:solidFill>
                   <a:srgbClr val="000000"/>
                 </a:solidFill>
@@ -9090,14 +9090,14 @@
           </a:ln>
           <a:extLst>
             <a:ext uri="{909E8E84-426E-40dd-AFC4-6F175D3DCCD1}">
-              <a14:hiddenFill xmlns:a14="http://schemas.microsoft.com/office/drawing/2010/main" xmlns="">
+              <a14:hiddenFill xmlns="" xmlns:a14="http://schemas.microsoft.com/office/drawing/2010/main">
                 <a:solidFill>
                   <a:srgbClr val="FFFFFF"/>
                 </a:solidFill>
               </a14:hiddenFill>
             </a:ext>
             <a:ext uri="{91240B29-F687-4f45-9708-019B960494DF}">
-              <a14:hiddenLine xmlns:a14="http://schemas.microsoft.com/office/drawing/2010/main" xmlns="" w="9525">
+              <a14:hiddenLine xmlns="" xmlns:a14="http://schemas.microsoft.com/office/drawing/2010/main" w="9525">
                 <a:solidFill>
                   <a:srgbClr val="000000"/>
                 </a:solidFill>
@@ -9256,14 +9256,14 @@
           </a:ln>
           <a:extLst>
             <a:ext uri="{909E8E84-426E-40dd-AFC4-6F175D3DCCD1}">
-              <a14:hiddenFill xmlns:a14="http://schemas.microsoft.com/office/drawing/2010/main" xmlns="">
+              <a14:hiddenFill xmlns="" xmlns:a14="http://schemas.microsoft.com/office/drawing/2010/main">
                 <a:solidFill>
                   <a:srgbClr val="FFFFFF"/>
                 </a:solidFill>
               </a14:hiddenFill>
             </a:ext>
             <a:ext uri="{91240B29-F687-4f45-9708-019B960494DF}">
-              <a14:hiddenLine xmlns:a14="http://schemas.microsoft.com/office/drawing/2010/main" xmlns="" w="9525">
+              <a14:hiddenLine xmlns="" xmlns:a14="http://schemas.microsoft.com/office/drawing/2010/main" w="9525">
                 <a:solidFill>
                   <a:srgbClr val="000000"/>
                 </a:solidFill>
@@ -9321,14 +9321,14 @@
           </a:ln>
           <a:extLst>
             <a:ext uri="{909E8E84-426E-40dd-AFC4-6F175D3DCCD1}">
-              <a14:hiddenFill xmlns:a14="http://schemas.microsoft.com/office/drawing/2010/main" xmlns="">
+              <a14:hiddenFill xmlns="" xmlns:a14="http://schemas.microsoft.com/office/drawing/2010/main">
                 <a:solidFill>
                   <a:srgbClr val="FFFFFF"/>
                 </a:solidFill>
               </a14:hiddenFill>
             </a:ext>
             <a:ext uri="{91240B29-F687-4f45-9708-019B960494DF}">
-              <a14:hiddenLine xmlns:a14="http://schemas.microsoft.com/office/drawing/2010/main" xmlns="" w="9525">
+              <a14:hiddenLine xmlns="" xmlns:a14="http://schemas.microsoft.com/office/drawing/2010/main" w="9525">
                 <a:solidFill>
                   <a:srgbClr val="000000"/>
                 </a:solidFill>
@@ -9380,14 +9380,14 @@
           <a:ln/>
           <a:extLst>
             <a:ext uri="{909E8E84-426E-40dd-AFC4-6F175D3DCCD1}">
-              <a14:hiddenFill xmlns:a14="http://schemas.microsoft.com/office/drawing/2010/main" xmlns="">
+              <a14:hiddenFill xmlns="" xmlns:a14="http://schemas.microsoft.com/office/drawing/2010/main">
                 <a:solidFill>
                   <a:srgbClr val="FFFFFF"/>
                 </a:solidFill>
               </a14:hiddenFill>
             </a:ext>
             <a:ext uri="{91240B29-F687-4f45-9708-019B960494DF}">
-              <a14:hiddenLine xmlns:a14="http://schemas.microsoft.com/office/drawing/2010/main" xmlns="" w="9525">
+              <a14:hiddenLine xmlns="" xmlns:a14="http://schemas.microsoft.com/office/drawing/2010/main" w="9525">
                 <a:solidFill>
                   <a:srgbClr val="000000"/>
                 </a:solidFill>
@@ -9544,7 +9544,7 @@
           </a:ln>
           <a:extLst>
             <a:ext uri="{91240B29-F687-4f45-9708-019B960494DF}">
-              <a14:hiddenLine xmlns:a14="http://schemas.microsoft.com/office/drawing/2010/main" xmlns="" w="12700" cap="sq">
+              <a14:hiddenLine xmlns="" xmlns:a14="http://schemas.microsoft.com/office/drawing/2010/main" w="12700" cap="sq">
                 <a:solidFill>
                   <a:srgbClr val="000000"/>
                 </a:solidFill>
@@ -9763,14 +9763,14 @@
           </a:ln>
           <a:extLst>
             <a:ext uri="{909E8E84-426E-40dd-AFC4-6F175D3DCCD1}">
-              <a14:hiddenFill xmlns:a14="http://schemas.microsoft.com/office/drawing/2010/main" xmlns="">
+              <a14:hiddenFill xmlns="" xmlns:a14="http://schemas.microsoft.com/office/drawing/2010/main">
                 <a:solidFill>
                   <a:srgbClr val="FFFFFF"/>
                 </a:solidFill>
               </a14:hiddenFill>
             </a:ext>
             <a:ext uri="{91240B29-F687-4f45-9708-019B960494DF}">
-              <a14:hiddenLine xmlns:a14="http://schemas.microsoft.com/office/drawing/2010/main" xmlns="" w="12700" cap="sq">
+              <a14:hiddenLine xmlns="" xmlns:a14="http://schemas.microsoft.com/office/drawing/2010/main" w="12700" cap="sq">
                 <a:solidFill>
                   <a:srgbClr val="000000"/>
                 </a:solidFill>
@@ -9931,14 +9931,14 @@
           </a:ln>
           <a:extLst>
             <a:ext uri="{909E8E84-426E-40dd-AFC4-6F175D3DCCD1}">
-              <a14:hiddenFill xmlns:a14="http://schemas.microsoft.com/office/drawing/2010/main" xmlns="">
+              <a14:hiddenFill xmlns="" xmlns:a14="http://schemas.microsoft.com/office/drawing/2010/main">
                 <a:solidFill>
                   <a:srgbClr val="FFFFFF"/>
                 </a:solidFill>
               </a14:hiddenFill>
             </a:ext>
             <a:ext uri="{91240B29-F687-4f45-9708-019B960494DF}">
-              <a14:hiddenLine xmlns:a14="http://schemas.microsoft.com/office/drawing/2010/main" xmlns="" w="12700" cap="sq">
+              <a14:hiddenLine xmlns="" xmlns:a14="http://schemas.microsoft.com/office/drawing/2010/main" w="12700" cap="sq">
                 <a:solidFill>
                   <a:srgbClr val="000000"/>
                 </a:solidFill>
@@ -10095,7 +10095,7 @@
           </a:ln>
           <a:extLst>
             <a:ext uri="{91240B29-F687-4f45-9708-019B960494DF}">
-              <a14:hiddenLine xmlns:a14="http://schemas.microsoft.com/office/drawing/2010/main" xmlns="" w="12700" cap="sq">
+              <a14:hiddenLine xmlns="" xmlns:a14="http://schemas.microsoft.com/office/drawing/2010/main" w="12700" cap="sq">
                 <a:solidFill>
                   <a:srgbClr val="000000"/>
                 </a:solidFill>
@@ -10535,14 +10535,14 @@
           <a:ln/>
           <a:extLst>
             <a:ext uri="{909E8E84-426E-40dd-AFC4-6F175D3DCCD1}">
-              <a14:hiddenFill xmlns:a14="http://schemas.microsoft.com/office/drawing/2010/main" xmlns="">
+              <a14:hiddenFill xmlns="" xmlns:a14="http://schemas.microsoft.com/office/drawing/2010/main">
                 <a:solidFill>
                   <a:srgbClr val="FFFFFF"/>
                 </a:solidFill>
               </a14:hiddenFill>
             </a:ext>
             <a:ext uri="{91240B29-F687-4f45-9708-019B960494DF}">
-              <a14:hiddenLine xmlns:a14="http://schemas.microsoft.com/office/drawing/2010/main" xmlns="" w="9525">
+              <a14:hiddenLine xmlns="" xmlns:a14="http://schemas.microsoft.com/office/drawing/2010/main" w="9525">
                 <a:solidFill>
                   <a:srgbClr val="000000"/>
                 </a:solidFill>
@@ -10695,14 +10695,14 @@
           </a:ln>
           <a:extLst>
             <a:ext uri="{909E8E84-426E-40dd-AFC4-6F175D3DCCD1}">
-              <a14:hiddenFill xmlns:a14="http://schemas.microsoft.com/office/drawing/2010/main" xmlns="">
+              <a14:hiddenFill xmlns="" xmlns:a14="http://schemas.microsoft.com/office/drawing/2010/main">
                 <a:solidFill>
                   <a:srgbClr val="FFFFFF"/>
                 </a:solidFill>
               </a14:hiddenFill>
             </a:ext>
             <a:ext uri="{91240B29-F687-4f45-9708-019B960494DF}">
-              <a14:hiddenLine xmlns:a14="http://schemas.microsoft.com/office/drawing/2010/main" xmlns="" w="12700" cap="sq">
+              <a14:hiddenLine xmlns="" xmlns:a14="http://schemas.microsoft.com/office/drawing/2010/main" w="12700" cap="sq">
                 <a:solidFill>
                   <a:srgbClr val="000000"/>
                 </a:solidFill>
@@ -10867,7 +10867,7 @@
           </a:ln>
           <a:extLst>
             <a:ext uri="{91240B29-F687-4f45-9708-019B960494DF}">
-              <a14:hiddenLine xmlns:a14="http://schemas.microsoft.com/office/drawing/2010/main" xmlns="" w="12700" cap="sq">
+              <a14:hiddenLine xmlns="" xmlns:a14="http://schemas.microsoft.com/office/drawing/2010/main" w="12700" cap="sq">
                 <a:solidFill>
                   <a:srgbClr val="000000"/>
                 </a:solidFill>
@@ -11057,14 +11057,14 @@
           </a:ln>
           <a:extLst>
             <a:ext uri="{909E8E84-426E-40dd-AFC4-6F175D3DCCD1}">
-              <a14:hiddenFill xmlns:a14="http://schemas.microsoft.com/office/drawing/2010/main" xmlns="">
+              <a14:hiddenFill xmlns="" xmlns:a14="http://schemas.microsoft.com/office/drawing/2010/main">
                 <a:solidFill>
                   <a:srgbClr val="FFFFFF"/>
                 </a:solidFill>
               </a14:hiddenFill>
             </a:ext>
             <a:ext uri="{91240B29-F687-4f45-9708-019B960494DF}">
-              <a14:hiddenLine xmlns:a14="http://schemas.microsoft.com/office/drawing/2010/main" xmlns="" w="12700" cap="sq">
+              <a14:hiddenLine xmlns="" xmlns:a14="http://schemas.microsoft.com/office/drawing/2010/main" w="12700" cap="sq">
                 <a:solidFill>
                   <a:srgbClr val="000000"/>
                 </a:solidFill>
@@ -11221,7 +11221,7 @@
           </a:ln>
           <a:extLst>
             <a:ext uri="{91240B29-F687-4f45-9708-019B960494DF}">
-              <a14:hiddenLine xmlns:a14="http://schemas.microsoft.com/office/drawing/2010/main" xmlns="" w="12700" cap="sq">
+              <a14:hiddenLine xmlns="" xmlns:a14="http://schemas.microsoft.com/office/drawing/2010/main" w="12700" cap="sq">
                 <a:solidFill>
                   <a:srgbClr val="000000"/>
                 </a:solidFill>
@@ -11725,14 +11725,14 @@
           <a:ln/>
           <a:extLst>
             <a:ext uri="{909E8E84-426E-40dd-AFC4-6F175D3DCCD1}">
-              <a14:hiddenFill xmlns:a14="http://schemas.microsoft.com/office/drawing/2010/main" xmlns="">
+              <a14:hiddenFill xmlns="" xmlns:a14="http://schemas.microsoft.com/office/drawing/2010/main">
                 <a:solidFill>
                   <a:srgbClr val="FFFFFF"/>
                 </a:solidFill>
               </a14:hiddenFill>
             </a:ext>
             <a:ext uri="{91240B29-F687-4f45-9708-019B960494DF}">
-              <a14:hiddenLine xmlns:a14="http://schemas.microsoft.com/office/drawing/2010/main" xmlns="" w="9525">
+              <a14:hiddenLine xmlns="" xmlns:a14="http://schemas.microsoft.com/office/drawing/2010/main" w="9525">
                 <a:solidFill>
                   <a:srgbClr val="000000"/>
                 </a:solidFill>
@@ -11885,14 +11885,14 @@
           </a:ln>
           <a:extLst>
             <a:ext uri="{909E8E84-426E-40dd-AFC4-6F175D3DCCD1}">
-              <a14:hiddenFill xmlns:a14="http://schemas.microsoft.com/office/drawing/2010/main" xmlns="">
+              <a14:hiddenFill xmlns="" xmlns:a14="http://schemas.microsoft.com/office/drawing/2010/main">
                 <a:solidFill>
                   <a:srgbClr val="FFFFFF"/>
                 </a:solidFill>
               </a14:hiddenFill>
             </a:ext>
             <a:ext uri="{91240B29-F687-4f45-9708-019B960494DF}">
-              <a14:hiddenLine xmlns:a14="http://schemas.microsoft.com/office/drawing/2010/main" xmlns="" w="12700" cap="sq">
+              <a14:hiddenLine xmlns="" xmlns:a14="http://schemas.microsoft.com/office/drawing/2010/main" w="12700" cap="sq">
                 <a:solidFill>
                   <a:srgbClr val="000000"/>
                 </a:solidFill>
@@ -12057,7 +12057,7 @@
           </a:ln>
           <a:extLst>
             <a:ext uri="{91240B29-F687-4f45-9708-019B960494DF}">
-              <a14:hiddenLine xmlns:a14="http://schemas.microsoft.com/office/drawing/2010/main" xmlns="" w="12700" cap="sq">
+              <a14:hiddenLine xmlns="" xmlns:a14="http://schemas.microsoft.com/office/drawing/2010/main" w="12700" cap="sq">
                 <a:solidFill>
                   <a:srgbClr val="000000"/>
                 </a:solidFill>
@@ -12256,14 +12256,14 @@
           </a:ln>
           <a:extLst>
             <a:ext uri="{909E8E84-426E-40dd-AFC4-6F175D3DCCD1}">
-              <a14:hiddenFill xmlns:a14="http://schemas.microsoft.com/office/drawing/2010/main" xmlns="">
+              <a14:hiddenFill xmlns="" xmlns:a14="http://schemas.microsoft.com/office/drawing/2010/main">
                 <a:solidFill>
                   <a:srgbClr val="FFFFFF"/>
                 </a:solidFill>
               </a14:hiddenFill>
             </a:ext>
             <a:ext uri="{91240B29-F687-4f45-9708-019B960494DF}">
-              <a14:hiddenLine xmlns:a14="http://schemas.microsoft.com/office/drawing/2010/main" xmlns="" w="12700" cap="sq">
+              <a14:hiddenLine xmlns="" xmlns:a14="http://schemas.microsoft.com/office/drawing/2010/main" w="12700" cap="sq">
                 <a:solidFill>
                   <a:srgbClr val="000000"/>
                 </a:solidFill>
@@ -12420,7 +12420,7 @@
           </a:ln>
           <a:extLst>
             <a:ext uri="{91240B29-F687-4f45-9708-019B960494DF}">
-              <a14:hiddenLine xmlns:a14="http://schemas.microsoft.com/office/drawing/2010/main" xmlns="" w="12700" cap="sq">
+              <a14:hiddenLine xmlns="" xmlns:a14="http://schemas.microsoft.com/office/drawing/2010/main" w="12700" cap="sq">
                 <a:solidFill>
                   <a:srgbClr val="000000"/>
                 </a:solidFill>
@@ -12997,14 +12997,14 @@
           <a:ln/>
           <a:extLst>
             <a:ext uri="{909E8E84-426E-40dd-AFC4-6F175D3DCCD1}">
-              <a14:hiddenFill xmlns:a14="http://schemas.microsoft.com/office/drawing/2010/main" xmlns="">
+              <a14:hiddenFill xmlns="" xmlns:a14="http://schemas.microsoft.com/office/drawing/2010/main">
                 <a:solidFill>
                   <a:srgbClr val="FFFFFF"/>
                 </a:solidFill>
               </a14:hiddenFill>
             </a:ext>
             <a:ext uri="{91240B29-F687-4f45-9708-019B960494DF}">
-              <a14:hiddenLine xmlns:a14="http://schemas.microsoft.com/office/drawing/2010/main" xmlns="" w="9525">
+              <a14:hiddenLine xmlns="" xmlns:a14="http://schemas.microsoft.com/office/drawing/2010/main" w="9525">
                 <a:solidFill>
                   <a:srgbClr val="000000"/>
                 </a:solidFill>
@@ -13157,14 +13157,14 @@
           </a:ln>
           <a:extLst>
             <a:ext uri="{909E8E84-426E-40dd-AFC4-6F175D3DCCD1}">
-              <a14:hiddenFill xmlns:a14="http://schemas.microsoft.com/office/drawing/2010/main" xmlns="">
+              <a14:hiddenFill xmlns="" xmlns:a14="http://schemas.microsoft.com/office/drawing/2010/main">
                 <a:solidFill>
                   <a:srgbClr val="FFFFFF"/>
                 </a:solidFill>
               </a14:hiddenFill>
             </a:ext>
             <a:ext uri="{91240B29-F687-4f45-9708-019B960494DF}">
-              <a14:hiddenLine xmlns:a14="http://schemas.microsoft.com/office/drawing/2010/main" xmlns="" w="12700" cap="sq">
+              <a14:hiddenLine xmlns="" xmlns:a14="http://schemas.microsoft.com/office/drawing/2010/main" w="12700" cap="sq">
                 <a:solidFill>
                   <a:srgbClr val="000000"/>
                 </a:solidFill>
@@ -13329,7 +13329,7 @@
           </a:ln>
           <a:extLst>
             <a:ext uri="{91240B29-F687-4f45-9708-019B960494DF}">
-              <a14:hiddenLine xmlns:a14="http://schemas.microsoft.com/office/drawing/2010/main" xmlns="" w="12700" cap="sq">
+              <a14:hiddenLine xmlns="" xmlns:a14="http://schemas.microsoft.com/office/drawing/2010/main" w="12700" cap="sq">
                 <a:solidFill>
                   <a:srgbClr val="000000"/>
                 </a:solidFill>
@@ -13522,14 +13522,14 @@
           </a:ln>
           <a:extLst>
             <a:ext uri="{909E8E84-426E-40dd-AFC4-6F175D3DCCD1}">
-              <a14:hiddenFill xmlns:a14="http://schemas.microsoft.com/office/drawing/2010/main" xmlns="">
+              <a14:hiddenFill xmlns="" xmlns:a14="http://schemas.microsoft.com/office/drawing/2010/main">
                 <a:solidFill>
                   <a:srgbClr val="FFFFFF"/>
                 </a:solidFill>
               </a14:hiddenFill>
             </a:ext>
             <a:ext uri="{91240B29-F687-4f45-9708-019B960494DF}">
-              <a14:hiddenLine xmlns:a14="http://schemas.microsoft.com/office/drawing/2010/main" xmlns="" w="12700" cap="sq">
+              <a14:hiddenLine xmlns="" xmlns:a14="http://schemas.microsoft.com/office/drawing/2010/main" w="12700" cap="sq">
                 <a:solidFill>
                   <a:srgbClr val="000000"/>
                 </a:solidFill>
@@ -13686,7 +13686,7 @@
           </a:ln>
           <a:extLst>
             <a:ext uri="{91240B29-F687-4f45-9708-019B960494DF}">
-              <a14:hiddenLine xmlns:a14="http://schemas.microsoft.com/office/drawing/2010/main" xmlns="" w="12700" cap="sq">
+              <a14:hiddenLine xmlns="" xmlns:a14="http://schemas.microsoft.com/office/drawing/2010/main" w="12700" cap="sq">
                 <a:solidFill>
                   <a:srgbClr val="000000"/>
                 </a:solidFill>
@@ -14337,14 +14337,14 @@
           <a:ln/>
           <a:extLst>
             <a:ext uri="{909E8E84-426E-40dd-AFC4-6F175D3DCCD1}">
-              <a14:hiddenFill xmlns:a14="http://schemas.microsoft.com/office/drawing/2010/main" xmlns="">
+              <a14:hiddenFill xmlns="" xmlns:a14="http://schemas.microsoft.com/office/drawing/2010/main">
                 <a:solidFill>
                   <a:srgbClr val="FFFFFF"/>
                 </a:solidFill>
               </a14:hiddenFill>
             </a:ext>
             <a:ext uri="{91240B29-F687-4f45-9708-019B960494DF}">
-              <a14:hiddenLine xmlns:a14="http://schemas.microsoft.com/office/drawing/2010/main" xmlns="" w="9525">
+              <a14:hiddenLine xmlns="" xmlns:a14="http://schemas.microsoft.com/office/drawing/2010/main" w="9525">
                 <a:solidFill>
                   <a:srgbClr val="000000"/>
                 </a:solidFill>
@@ -14497,14 +14497,14 @@
           </a:ln>
           <a:extLst>
             <a:ext uri="{909E8E84-426E-40dd-AFC4-6F175D3DCCD1}">
-              <a14:hiddenFill xmlns:a14="http://schemas.microsoft.com/office/drawing/2010/main" xmlns="">
+              <a14:hiddenFill xmlns="" xmlns:a14="http://schemas.microsoft.com/office/drawing/2010/main">
                 <a:solidFill>
                   <a:srgbClr val="FFFFFF"/>
                 </a:solidFill>
               </a14:hiddenFill>
             </a:ext>
             <a:ext uri="{91240B29-F687-4f45-9708-019B960494DF}">
-              <a14:hiddenLine xmlns:a14="http://schemas.microsoft.com/office/drawing/2010/main" xmlns="" w="12700" cap="sq">
+              <a14:hiddenLine xmlns="" xmlns:a14="http://schemas.microsoft.com/office/drawing/2010/main" w="12700" cap="sq">
                 <a:solidFill>
                   <a:srgbClr val="000000"/>
                 </a:solidFill>
@@ -14665,14 +14665,14 @@
           </a:ln>
           <a:extLst>
             <a:ext uri="{909E8E84-426E-40dd-AFC4-6F175D3DCCD1}">
-              <a14:hiddenFill xmlns:a14="http://schemas.microsoft.com/office/drawing/2010/main" xmlns="">
+              <a14:hiddenFill xmlns="" xmlns:a14="http://schemas.microsoft.com/office/drawing/2010/main">
                 <a:solidFill>
                   <a:srgbClr val="FFFFFF"/>
                 </a:solidFill>
               </a14:hiddenFill>
             </a:ext>
             <a:ext uri="{91240B29-F687-4f45-9708-019B960494DF}">
-              <a14:hiddenLine xmlns:a14="http://schemas.microsoft.com/office/drawing/2010/main" xmlns="" w="12700" cap="sq">
+              <a14:hiddenLine xmlns="" xmlns:a14="http://schemas.microsoft.com/office/drawing/2010/main" w="12700" cap="sq">
                 <a:solidFill>
                   <a:srgbClr val="000000"/>
                 </a:solidFill>
@@ -14827,7 +14827,7 @@
           </a:ln>
           <a:extLst>
             <a:ext uri="{91240B29-F687-4f45-9708-019B960494DF}">
-              <a14:hiddenLine xmlns:a14="http://schemas.microsoft.com/office/drawing/2010/main" xmlns="" w="12700" cap="sq">
+              <a14:hiddenLine xmlns="" xmlns:a14="http://schemas.microsoft.com/office/drawing/2010/main" w="12700" cap="sq">
                 <a:solidFill>
                   <a:srgbClr val="000000"/>
                 </a:solidFill>
@@ -15063,7 +15063,7 @@
           </a:ln>
           <a:extLst>
             <a:ext uri="{91240B29-F687-4f45-9708-019B960494DF}">
-              <a14:hiddenLine xmlns:a14="http://schemas.microsoft.com/office/drawing/2010/main" xmlns="" w="12700" cap="sq">
+              <a14:hiddenLine xmlns="" xmlns:a14="http://schemas.microsoft.com/office/drawing/2010/main" w="12700" cap="sq">
                 <a:solidFill>
                   <a:srgbClr val="000000"/>
                 </a:solidFill>
@@ -15300,7 +15300,7 @@
           </a:ln>
           <a:extLst>
             <a:ext uri="{909E8E84-426E-40dd-AFC4-6F175D3DCCD1}">
-              <a14:hiddenFill xmlns:a14="http://schemas.microsoft.com/office/drawing/2010/main" xmlns="">
+              <a14:hiddenFill xmlns="" xmlns:a14="http://schemas.microsoft.com/office/drawing/2010/main">
                 <a:solidFill>
                   <a:srgbClr val="FFFFFF"/>
                 </a:solidFill>
@@ -15792,14 +15792,14 @@
           <a:ln/>
           <a:extLst>
             <a:ext uri="{909E8E84-426E-40dd-AFC4-6F175D3DCCD1}">
-              <a14:hiddenFill xmlns:a14="http://schemas.microsoft.com/office/drawing/2010/main" xmlns="">
+              <a14:hiddenFill xmlns="" xmlns:a14="http://schemas.microsoft.com/office/drawing/2010/main">
                 <a:solidFill>
                   <a:srgbClr val="FFFFFF"/>
                 </a:solidFill>
               </a14:hiddenFill>
             </a:ext>
             <a:ext uri="{91240B29-F687-4f45-9708-019B960494DF}">
-              <a14:hiddenLine xmlns:a14="http://schemas.microsoft.com/office/drawing/2010/main" xmlns="" w="9525">
+              <a14:hiddenLine xmlns="" xmlns:a14="http://schemas.microsoft.com/office/drawing/2010/main" w="9525">
                 <a:solidFill>
                   <a:srgbClr val="000000"/>
                 </a:solidFill>
@@ -15952,14 +15952,14 @@
           </a:ln>
           <a:extLst>
             <a:ext uri="{909E8E84-426E-40dd-AFC4-6F175D3DCCD1}">
-              <a14:hiddenFill xmlns:a14="http://schemas.microsoft.com/office/drawing/2010/main" xmlns="">
+              <a14:hiddenFill xmlns="" xmlns:a14="http://schemas.microsoft.com/office/drawing/2010/main">
                 <a:solidFill>
                   <a:srgbClr val="FFFFFF"/>
                 </a:solidFill>
               </a14:hiddenFill>
             </a:ext>
             <a:ext uri="{91240B29-F687-4f45-9708-019B960494DF}">
-              <a14:hiddenLine xmlns:a14="http://schemas.microsoft.com/office/drawing/2010/main" xmlns="" w="12700" cap="sq">
+              <a14:hiddenLine xmlns="" xmlns:a14="http://schemas.microsoft.com/office/drawing/2010/main" w="12700" cap="sq">
                 <a:solidFill>
                   <a:srgbClr val="000000"/>
                 </a:solidFill>
@@ -16120,14 +16120,14 @@
           </a:ln>
           <a:extLst>
             <a:ext uri="{909E8E84-426E-40dd-AFC4-6F175D3DCCD1}">
-              <a14:hiddenFill xmlns:a14="http://schemas.microsoft.com/office/drawing/2010/main" xmlns="">
+              <a14:hiddenFill xmlns="" xmlns:a14="http://schemas.microsoft.com/office/drawing/2010/main">
                 <a:solidFill>
                   <a:srgbClr val="FFFFFF"/>
                 </a:solidFill>
               </a14:hiddenFill>
             </a:ext>
             <a:ext uri="{91240B29-F687-4f45-9708-019B960494DF}">
-              <a14:hiddenLine xmlns:a14="http://schemas.microsoft.com/office/drawing/2010/main" xmlns="" w="12700" cap="sq">
+              <a14:hiddenLine xmlns="" xmlns:a14="http://schemas.microsoft.com/office/drawing/2010/main" w="12700" cap="sq">
                 <a:solidFill>
                   <a:srgbClr val="000000"/>
                 </a:solidFill>
@@ -16284,7 +16284,7 @@
           </a:ln>
           <a:extLst>
             <a:ext uri="{91240B29-F687-4f45-9708-019B960494DF}">
-              <a14:hiddenLine xmlns:a14="http://schemas.microsoft.com/office/drawing/2010/main" xmlns="" w="12700" cap="sq">
+              <a14:hiddenLine xmlns="" xmlns:a14="http://schemas.microsoft.com/office/drawing/2010/main" w="12700" cap="sq">
                 <a:solidFill>
                   <a:srgbClr val="000000"/>
                 </a:solidFill>
@@ -16562,7 +16562,7 @@
           </a:ln>
           <a:extLst>
             <a:ext uri="{909E8E84-426E-40dd-AFC4-6F175D3DCCD1}">
-              <a14:hiddenFill xmlns:a14="http://schemas.microsoft.com/office/drawing/2010/main" xmlns="">
+              <a14:hiddenFill xmlns="" xmlns:a14="http://schemas.microsoft.com/office/drawing/2010/main">
                 <a:solidFill>
                   <a:srgbClr val="FFFFFF"/>
                 </a:solidFill>
@@ -16618,7 +16618,7 @@
           </a:ln>
           <a:extLst>
             <a:ext uri="{91240B29-F687-4f45-9708-019B960494DF}">
-              <a14:hiddenLine xmlns:a14="http://schemas.microsoft.com/office/drawing/2010/main" xmlns="" w="12700" cap="sq">
+              <a14:hiddenLine xmlns="" xmlns:a14="http://schemas.microsoft.com/office/drawing/2010/main" w="12700" cap="sq">
                 <a:solidFill>
                   <a:srgbClr val="000000"/>
                 </a:solidFill>
@@ -17324,14 +17324,14 @@
           <a:ln/>
           <a:extLst>
             <a:ext uri="{909E8E84-426E-40dd-AFC4-6F175D3DCCD1}">
-              <a14:hiddenFill xmlns:a14="http://schemas.microsoft.com/office/drawing/2010/main" xmlns="">
+              <a14:hiddenFill xmlns="" xmlns:a14="http://schemas.microsoft.com/office/drawing/2010/main">
                 <a:solidFill>
                   <a:srgbClr val="FFFFFF"/>
                 </a:solidFill>
               </a14:hiddenFill>
             </a:ext>
             <a:ext uri="{91240B29-F687-4f45-9708-019B960494DF}">
-              <a14:hiddenLine xmlns:a14="http://schemas.microsoft.com/office/drawing/2010/main" xmlns="" w="9525">
+              <a14:hiddenLine xmlns="" xmlns:a14="http://schemas.microsoft.com/office/drawing/2010/main" w="9525">
                 <a:solidFill>
                   <a:srgbClr val="000000"/>
                 </a:solidFill>
@@ -17484,14 +17484,14 @@
           </a:ln>
           <a:extLst>
             <a:ext uri="{909E8E84-426E-40dd-AFC4-6F175D3DCCD1}">
-              <a14:hiddenFill xmlns:a14="http://schemas.microsoft.com/office/drawing/2010/main" xmlns="">
+              <a14:hiddenFill xmlns="" xmlns:a14="http://schemas.microsoft.com/office/drawing/2010/main">
                 <a:solidFill>
                   <a:srgbClr val="FFFFFF"/>
                 </a:solidFill>
               </a14:hiddenFill>
             </a:ext>
             <a:ext uri="{91240B29-F687-4f45-9708-019B960494DF}">
-              <a14:hiddenLine xmlns:a14="http://schemas.microsoft.com/office/drawing/2010/main" xmlns="" w="12700" cap="sq">
+              <a14:hiddenLine xmlns="" xmlns:a14="http://schemas.microsoft.com/office/drawing/2010/main" w="12700" cap="sq">
                 <a:solidFill>
                   <a:srgbClr val="000000"/>
                 </a:solidFill>
@@ -17656,7 +17656,7 @@
           </a:ln>
           <a:extLst>
             <a:ext uri="{91240B29-F687-4f45-9708-019B960494DF}">
-              <a14:hiddenLine xmlns:a14="http://schemas.microsoft.com/office/drawing/2010/main" xmlns="" w="12700" cap="sq">
+              <a14:hiddenLine xmlns="" xmlns:a14="http://schemas.microsoft.com/office/drawing/2010/main" w="12700" cap="sq">
                 <a:solidFill>
                   <a:srgbClr val="000000"/>
                 </a:solidFill>
@@ -17978,14 +17978,14 @@
           </a:ln>
           <a:extLst>
             <a:ext uri="{909E8E84-426E-40dd-AFC4-6F175D3DCCD1}">
-              <a14:hiddenFill xmlns:a14="http://schemas.microsoft.com/office/drawing/2010/main" xmlns="">
+              <a14:hiddenFill xmlns="" xmlns:a14="http://schemas.microsoft.com/office/drawing/2010/main">
                 <a:solidFill>
                   <a:srgbClr val="FFFFFF"/>
                 </a:solidFill>
               </a14:hiddenFill>
             </a:ext>
             <a:ext uri="{91240B29-F687-4f45-9708-019B960494DF}">
-              <a14:hiddenLine xmlns:a14="http://schemas.microsoft.com/office/drawing/2010/main" xmlns="" w="12700" cap="sq">
+              <a14:hiddenLine xmlns="" xmlns:a14="http://schemas.microsoft.com/office/drawing/2010/main" w="12700" cap="sq">
                 <a:solidFill>
                   <a:srgbClr val="000000"/>
                 </a:solidFill>
@@ -18142,7 +18142,7 @@
           </a:ln>
           <a:extLst>
             <a:ext uri="{91240B29-F687-4f45-9708-019B960494DF}">
-              <a14:hiddenLine xmlns:a14="http://schemas.microsoft.com/office/drawing/2010/main" xmlns="" w="12700" cap="sq">
+              <a14:hiddenLine xmlns="" xmlns:a14="http://schemas.microsoft.com/office/drawing/2010/main" w="12700" cap="sq">
                 <a:solidFill>
                   <a:srgbClr val="000000"/>
                 </a:solidFill>
@@ -18332,7 +18332,7 @@
           </a:ln>
           <a:extLst>
             <a:ext uri="{909E8E84-426E-40dd-AFC4-6F175D3DCCD1}">
-              <a14:hiddenFill xmlns:a14="http://schemas.microsoft.com/office/drawing/2010/main" xmlns="">
+              <a14:hiddenFill xmlns="" xmlns:a14="http://schemas.microsoft.com/office/drawing/2010/main">
                 <a:solidFill>
                   <a:srgbClr val="FFFFFF"/>
                 </a:solidFill>
@@ -18822,14 +18822,14 @@
           <a:ln/>
           <a:extLst>
             <a:ext uri="{909E8E84-426E-40dd-AFC4-6F175D3DCCD1}">
-              <a14:hiddenFill xmlns:a14="http://schemas.microsoft.com/office/drawing/2010/main" xmlns="">
+              <a14:hiddenFill xmlns="" xmlns:a14="http://schemas.microsoft.com/office/drawing/2010/main">
                 <a:solidFill>
                   <a:srgbClr val="FFFFFF"/>
                 </a:solidFill>
               </a14:hiddenFill>
             </a:ext>
             <a:ext uri="{91240B29-F687-4f45-9708-019B960494DF}">
-              <a14:hiddenLine xmlns:a14="http://schemas.microsoft.com/office/drawing/2010/main" xmlns="" w="9525">
+              <a14:hiddenLine xmlns="" xmlns:a14="http://schemas.microsoft.com/office/drawing/2010/main" w="9525">
                 <a:solidFill>
                   <a:srgbClr val="000000"/>
                 </a:solidFill>
@@ -18982,14 +18982,14 @@
           </a:ln>
           <a:extLst>
             <a:ext uri="{909E8E84-426E-40dd-AFC4-6F175D3DCCD1}">
-              <a14:hiddenFill xmlns:a14="http://schemas.microsoft.com/office/drawing/2010/main" xmlns="">
+              <a14:hiddenFill xmlns="" xmlns:a14="http://schemas.microsoft.com/office/drawing/2010/main">
                 <a:solidFill>
                   <a:srgbClr val="FFFFFF"/>
                 </a:solidFill>
               </a14:hiddenFill>
             </a:ext>
             <a:ext uri="{91240B29-F687-4f45-9708-019B960494DF}">
-              <a14:hiddenLine xmlns:a14="http://schemas.microsoft.com/office/drawing/2010/main" xmlns="" w="12700" cap="sq">
+              <a14:hiddenLine xmlns="" xmlns:a14="http://schemas.microsoft.com/office/drawing/2010/main" w="12700" cap="sq">
                 <a:solidFill>
                   <a:srgbClr val="000000"/>
                 </a:solidFill>
@@ -19146,7 +19146,7 @@
           </a:ln>
           <a:extLst>
             <a:ext uri="{91240B29-F687-4f45-9708-019B960494DF}">
-              <a14:hiddenLine xmlns:a14="http://schemas.microsoft.com/office/drawing/2010/main" xmlns="" w="12700" cap="sq">
+              <a14:hiddenLine xmlns="" xmlns:a14="http://schemas.microsoft.com/office/drawing/2010/main" w="12700" cap="sq">
                 <a:solidFill>
                   <a:srgbClr val="000000"/>
                 </a:solidFill>
@@ -19326,14 +19326,14 @@
           </a:ln>
           <a:extLst>
             <a:ext uri="{909E8E84-426E-40dd-AFC4-6F175D3DCCD1}">
-              <a14:hiddenFill xmlns:a14="http://schemas.microsoft.com/office/drawing/2010/main" xmlns="">
+              <a14:hiddenFill xmlns="" xmlns:a14="http://schemas.microsoft.com/office/drawing/2010/main">
                 <a:solidFill>
                   <a:srgbClr val="FFFFFF"/>
                 </a:solidFill>
               </a14:hiddenFill>
             </a:ext>
             <a:ext uri="{91240B29-F687-4f45-9708-019B960494DF}">
-              <a14:hiddenLine xmlns:a14="http://schemas.microsoft.com/office/drawing/2010/main" xmlns="" w="12700" cap="sq">
+              <a14:hiddenLine xmlns="" xmlns:a14="http://schemas.microsoft.com/office/drawing/2010/main" w="12700" cap="sq">
                 <a:solidFill>
                   <a:srgbClr val="000000"/>
                 </a:solidFill>
@@ -19490,7 +19490,7 @@
           </a:ln>
           <a:extLst>
             <a:ext uri="{91240B29-F687-4f45-9708-019B960494DF}">
-              <a14:hiddenLine xmlns:a14="http://schemas.microsoft.com/office/drawing/2010/main" xmlns="" w="12700" cap="sq">
+              <a14:hiddenLine xmlns="" xmlns:a14="http://schemas.microsoft.com/office/drawing/2010/main" w="12700" cap="sq">
                 <a:solidFill>
                   <a:srgbClr val="000000"/>
                 </a:solidFill>
@@ -20268,14 +20268,14 @@
           <a:ln/>
           <a:extLst>
             <a:ext uri="{909E8E84-426E-40dd-AFC4-6F175D3DCCD1}">
-              <a14:hiddenFill xmlns:a14="http://schemas.microsoft.com/office/drawing/2010/main" xmlns="">
+              <a14:hiddenFill xmlns="" xmlns:a14="http://schemas.microsoft.com/office/drawing/2010/main">
                 <a:solidFill>
                   <a:srgbClr val="FFFFFF"/>
                 </a:solidFill>
               </a14:hiddenFill>
             </a:ext>
             <a:ext uri="{91240B29-F687-4f45-9708-019B960494DF}">
-              <a14:hiddenLine xmlns:a14="http://schemas.microsoft.com/office/drawing/2010/main" xmlns="" w="9525">
+              <a14:hiddenLine xmlns="" xmlns:a14="http://schemas.microsoft.com/office/drawing/2010/main" w="9525">
                 <a:solidFill>
                   <a:srgbClr val="000000"/>
                 </a:solidFill>
@@ -20428,14 +20428,14 @@
           </a:ln>
           <a:extLst>
             <a:ext uri="{909E8E84-426E-40dd-AFC4-6F175D3DCCD1}">
-              <a14:hiddenFill xmlns:a14="http://schemas.microsoft.com/office/drawing/2010/main" xmlns="">
+              <a14:hiddenFill xmlns="" xmlns:a14="http://schemas.microsoft.com/office/drawing/2010/main">
                 <a:solidFill>
                   <a:srgbClr val="FFFFFF"/>
                 </a:solidFill>
               </a14:hiddenFill>
             </a:ext>
             <a:ext uri="{91240B29-F687-4f45-9708-019B960494DF}">
-              <a14:hiddenLine xmlns:a14="http://schemas.microsoft.com/office/drawing/2010/main" xmlns="" w="12700" cap="sq">
+              <a14:hiddenLine xmlns="" xmlns:a14="http://schemas.microsoft.com/office/drawing/2010/main" w="12700" cap="sq">
                 <a:solidFill>
                   <a:srgbClr val="000000"/>
                 </a:solidFill>
@@ -20600,7 +20600,7 @@
           </a:ln>
           <a:extLst>
             <a:ext uri="{91240B29-F687-4f45-9708-019B960494DF}">
-              <a14:hiddenLine xmlns:a14="http://schemas.microsoft.com/office/drawing/2010/main" xmlns="" w="12700" cap="sq">
+              <a14:hiddenLine xmlns="" xmlns:a14="http://schemas.microsoft.com/office/drawing/2010/main" w="12700" cap="sq">
                 <a:solidFill>
                   <a:srgbClr val="000000"/>
                 </a:solidFill>
@@ -20783,7 +20783,7 @@
           </a:ln>
           <a:extLst>
             <a:ext uri="{909E8E84-426E-40dd-AFC4-6F175D3DCCD1}">
-              <a14:hiddenFill xmlns:a14="http://schemas.microsoft.com/office/drawing/2010/main" xmlns="">
+              <a14:hiddenFill xmlns="" xmlns:a14="http://schemas.microsoft.com/office/drawing/2010/main">
                 <a:solidFill>
                   <a:srgbClr val="FFFFFF"/>
                 </a:solidFill>
@@ -21260,14 +21260,14 @@
           <a:ln/>
           <a:extLst>
             <a:ext uri="{909E8E84-426E-40dd-AFC4-6F175D3DCCD1}">
-              <a14:hiddenFill xmlns:a14="http://schemas.microsoft.com/office/drawing/2010/main" xmlns="">
+              <a14:hiddenFill xmlns="" xmlns:a14="http://schemas.microsoft.com/office/drawing/2010/main">
                 <a:solidFill>
                   <a:srgbClr val="FFFFFF"/>
                 </a:solidFill>
               </a14:hiddenFill>
             </a:ext>
             <a:ext uri="{91240B29-F687-4f45-9708-019B960494DF}">
-              <a14:hiddenLine xmlns:a14="http://schemas.microsoft.com/office/drawing/2010/main" xmlns="" w="9525">
+              <a14:hiddenLine xmlns="" xmlns:a14="http://schemas.microsoft.com/office/drawing/2010/main" w="9525">
                 <a:solidFill>
                   <a:srgbClr val="000000"/>
                 </a:solidFill>
@@ -21420,14 +21420,14 @@
           </a:ln>
           <a:extLst>
             <a:ext uri="{909E8E84-426E-40dd-AFC4-6F175D3DCCD1}">
-              <a14:hiddenFill xmlns:a14="http://schemas.microsoft.com/office/drawing/2010/main" xmlns="">
+              <a14:hiddenFill xmlns="" xmlns:a14="http://schemas.microsoft.com/office/drawing/2010/main">
                 <a:solidFill>
                   <a:srgbClr val="FFFFFF"/>
                 </a:solidFill>
               </a14:hiddenFill>
             </a:ext>
             <a:ext uri="{91240B29-F687-4f45-9708-019B960494DF}">
-              <a14:hiddenLine xmlns:a14="http://schemas.microsoft.com/office/drawing/2010/main" xmlns="" w="12700" cap="sq">
+              <a14:hiddenLine xmlns="" xmlns:a14="http://schemas.microsoft.com/office/drawing/2010/main" w="12700" cap="sq">
                 <a:solidFill>
                   <a:srgbClr val="000000"/>
                 </a:solidFill>
@@ -21592,7 +21592,7 @@
           </a:ln>
           <a:extLst>
             <a:ext uri="{91240B29-F687-4f45-9708-019B960494DF}">
-              <a14:hiddenLine xmlns:a14="http://schemas.microsoft.com/office/drawing/2010/main" xmlns="" w="12700" cap="sq">
+              <a14:hiddenLine xmlns="" xmlns:a14="http://schemas.microsoft.com/office/drawing/2010/main" w="12700" cap="sq">
                 <a:solidFill>
                   <a:srgbClr val="000000"/>
                 </a:solidFill>
@@ -21787,7 +21787,7 @@
           </a:ln>
           <a:extLst>
             <a:ext uri="{91240B29-F687-4f45-9708-019B960494DF}">
-              <a14:hiddenLine xmlns:a14="http://schemas.microsoft.com/office/drawing/2010/main" xmlns="" w="12700" cap="sq">
+              <a14:hiddenLine xmlns="" xmlns:a14="http://schemas.microsoft.com/office/drawing/2010/main" w="12700" cap="sq">
                 <a:solidFill>
                   <a:srgbClr val="000000"/>
                 </a:solidFill>
@@ -21994,7 +21994,7 @@
           </a:ln>
           <a:extLst>
             <a:ext uri="{91240B29-F687-4f45-9708-019B960494DF}">
-              <a14:hiddenLine xmlns:a14="http://schemas.microsoft.com/office/drawing/2010/main" xmlns="" w="12700" cap="sq">
+              <a14:hiddenLine xmlns="" xmlns:a14="http://schemas.microsoft.com/office/drawing/2010/main" w="12700" cap="sq">
                 <a:solidFill>
                   <a:srgbClr val="000000"/>
                 </a:solidFill>
@@ -22712,14 +22712,14 @@
           <a:ln/>
           <a:extLst>
             <a:ext uri="{909E8E84-426E-40dd-AFC4-6F175D3DCCD1}">
-              <a14:hiddenFill xmlns:a14="http://schemas.microsoft.com/office/drawing/2010/main" xmlns="">
+              <a14:hiddenFill xmlns="" xmlns:a14="http://schemas.microsoft.com/office/drawing/2010/main">
                 <a:solidFill>
                   <a:srgbClr val="FFFFFF"/>
                 </a:solidFill>
               </a14:hiddenFill>
             </a:ext>
             <a:ext uri="{91240B29-F687-4f45-9708-019B960494DF}">
-              <a14:hiddenLine xmlns:a14="http://schemas.microsoft.com/office/drawing/2010/main" xmlns="" w="9525">
+              <a14:hiddenLine xmlns="" xmlns:a14="http://schemas.microsoft.com/office/drawing/2010/main" w="9525">
                 <a:solidFill>
                   <a:srgbClr val="000000"/>
                 </a:solidFill>
@@ -22872,14 +22872,14 @@
           </a:ln>
           <a:extLst>
             <a:ext uri="{909E8E84-426E-40dd-AFC4-6F175D3DCCD1}">
-              <a14:hiddenFill xmlns:a14="http://schemas.microsoft.com/office/drawing/2010/main" xmlns="">
+              <a14:hiddenFill xmlns="" xmlns:a14="http://schemas.microsoft.com/office/drawing/2010/main">
                 <a:solidFill>
                   <a:srgbClr val="FFFFFF"/>
                 </a:solidFill>
               </a14:hiddenFill>
             </a:ext>
             <a:ext uri="{91240B29-F687-4f45-9708-019B960494DF}">
-              <a14:hiddenLine xmlns:a14="http://schemas.microsoft.com/office/drawing/2010/main" xmlns="" w="12700" cap="sq">
+              <a14:hiddenLine xmlns="" xmlns:a14="http://schemas.microsoft.com/office/drawing/2010/main" w="12700" cap="sq">
                 <a:solidFill>
                   <a:srgbClr val="000000"/>
                 </a:solidFill>
@@ -23046,7 +23046,7 @@
           </a:ln>
           <a:extLst>
             <a:ext uri="{91240B29-F687-4f45-9708-019B960494DF}">
-              <a14:hiddenLine xmlns:a14="http://schemas.microsoft.com/office/drawing/2010/main" xmlns="" w="12700" cap="sq">
+              <a14:hiddenLine xmlns="" xmlns:a14="http://schemas.microsoft.com/office/drawing/2010/main" w="12700" cap="sq">
                 <a:solidFill>
                   <a:srgbClr val="000000"/>
                 </a:solidFill>
@@ -23250,7 +23250,7 @@
           </a:ln>
           <a:extLst>
             <a:ext uri="{909E8E84-426E-40dd-AFC4-6F175D3DCCD1}">
-              <a14:hiddenFill xmlns:a14="http://schemas.microsoft.com/office/drawing/2010/main" xmlns="">
+              <a14:hiddenFill xmlns="" xmlns:a14="http://schemas.microsoft.com/office/drawing/2010/main">
                 <a:solidFill>
                   <a:srgbClr val="FFFFFF"/>
                 </a:solidFill>
@@ -23564,14 +23564,14 @@
           <a:ln/>
           <a:extLst>
             <a:ext uri="{909E8E84-426E-40dd-AFC4-6F175D3DCCD1}">
-              <a14:hiddenFill xmlns:a14="http://schemas.microsoft.com/office/drawing/2010/main" xmlns="">
+              <a14:hiddenFill xmlns="" xmlns:a14="http://schemas.microsoft.com/office/drawing/2010/main">
                 <a:solidFill>
                   <a:srgbClr val="FFFFFF"/>
                 </a:solidFill>
               </a14:hiddenFill>
             </a:ext>
             <a:ext uri="{91240B29-F687-4f45-9708-019B960494DF}">
-              <a14:hiddenLine xmlns:a14="http://schemas.microsoft.com/office/drawing/2010/main" xmlns="" w="9525">
+              <a14:hiddenLine xmlns="" xmlns:a14="http://schemas.microsoft.com/office/drawing/2010/main" w="9525">
                 <a:solidFill>
                   <a:srgbClr val="000000"/>
                 </a:solidFill>
@@ -23724,14 +23724,14 @@
           </a:ln>
           <a:extLst>
             <a:ext uri="{909E8E84-426E-40dd-AFC4-6F175D3DCCD1}">
-              <a14:hiddenFill xmlns:a14="http://schemas.microsoft.com/office/drawing/2010/main" xmlns="">
+              <a14:hiddenFill xmlns="" xmlns:a14="http://schemas.microsoft.com/office/drawing/2010/main">
                 <a:solidFill>
                   <a:srgbClr val="FFFFFF"/>
                 </a:solidFill>
               </a14:hiddenFill>
             </a:ext>
             <a:ext uri="{91240B29-F687-4f45-9708-019B960494DF}">
-              <a14:hiddenLine xmlns:a14="http://schemas.microsoft.com/office/drawing/2010/main" xmlns="" w="12700" cap="sq">
+              <a14:hiddenLine xmlns="" xmlns:a14="http://schemas.microsoft.com/office/drawing/2010/main" w="12700" cap="sq">
                 <a:solidFill>
                   <a:srgbClr val="000000"/>
                 </a:solidFill>
@@ -23888,7 +23888,7 @@
           </a:ln>
           <a:extLst>
             <a:ext uri="{91240B29-F687-4f45-9708-019B960494DF}">
-              <a14:hiddenLine xmlns:a14="http://schemas.microsoft.com/office/drawing/2010/main" xmlns="" w="12700" cap="sq">
+              <a14:hiddenLine xmlns="" xmlns:a14="http://schemas.microsoft.com/office/drawing/2010/main" w="12700" cap="sq">
                 <a:solidFill>
                   <a:srgbClr val="000000"/>
                 </a:solidFill>
@@ -24172,14 +24172,14 @@
           </a:ln>
           <a:extLst>
             <a:ext uri="{909E8E84-426E-40dd-AFC4-6F175D3DCCD1}">
-              <a14:hiddenFill xmlns:a14="http://schemas.microsoft.com/office/drawing/2010/main" xmlns="">
+              <a14:hiddenFill xmlns="" xmlns:a14="http://schemas.microsoft.com/office/drawing/2010/main">
                 <a:solidFill>
                   <a:srgbClr val="FFFFFF"/>
                 </a:solidFill>
               </a14:hiddenFill>
             </a:ext>
             <a:ext uri="{91240B29-F687-4f45-9708-019B960494DF}">
-              <a14:hiddenLine xmlns:a14="http://schemas.microsoft.com/office/drawing/2010/main" xmlns="" w="12700" cap="sq">
+              <a14:hiddenLine xmlns="" xmlns:a14="http://schemas.microsoft.com/office/drawing/2010/main" w="12700" cap="sq">
                 <a:solidFill>
                   <a:srgbClr val="000000"/>
                 </a:solidFill>
@@ -24336,7 +24336,7 @@
           </a:ln>
           <a:extLst>
             <a:ext uri="{91240B29-F687-4f45-9708-019B960494DF}">
-              <a14:hiddenLine xmlns:a14="http://schemas.microsoft.com/office/drawing/2010/main" xmlns="" w="12700" cap="sq">
+              <a14:hiddenLine xmlns="" xmlns:a14="http://schemas.microsoft.com/office/drawing/2010/main" w="12700" cap="sq">
                 <a:solidFill>
                   <a:srgbClr val="000000"/>
                 </a:solidFill>
@@ -25005,14 +25005,14 @@
         <p:spPr>
           <a:extLst>
             <a:ext uri="{909E8E84-426E-40dd-AFC4-6F175D3DCCD1}">
-              <a14:hiddenFill xmlns:a14="http://schemas.microsoft.com/office/drawing/2010/main" xmlns="">
+              <a14:hiddenFill xmlns="" xmlns:a14="http://schemas.microsoft.com/office/drawing/2010/main">
                 <a:solidFill>
                   <a:srgbClr val="FFFFFF"/>
                 </a:solidFill>
               </a14:hiddenFill>
             </a:ext>
             <a:ext uri="{91240B29-F687-4f45-9708-019B960494DF}">
-              <a14:hiddenLine xmlns:a14="http://schemas.microsoft.com/office/drawing/2010/main" xmlns="" w="9525">
+              <a14:hiddenLine xmlns="" xmlns:a14="http://schemas.microsoft.com/office/drawing/2010/main" w="9525">
                 <a:solidFill>
                   <a:srgbClr val="000000"/>
                 </a:solidFill>
@@ -25266,14 +25266,14 @@
           <a:ln/>
           <a:extLst>
             <a:ext uri="{909E8E84-426E-40dd-AFC4-6F175D3DCCD1}">
-              <a14:hiddenFill xmlns:a14="http://schemas.microsoft.com/office/drawing/2010/main" xmlns="">
+              <a14:hiddenFill xmlns="" xmlns:a14="http://schemas.microsoft.com/office/drawing/2010/main">
                 <a:solidFill>
                   <a:srgbClr val="FFFFFF"/>
                 </a:solidFill>
               </a14:hiddenFill>
             </a:ext>
             <a:ext uri="{91240B29-F687-4f45-9708-019B960494DF}">
-              <a14:hiddenLine xmlns:a14="http://schemas.microsoft.com/office/drawing/2010/main" xmlns="" w="9525">
+              <a14:hiddenLine xmlns="" xmlns:a14="http://schemas.microsoft.com/office/drawing/2010/main" w="9525">
                 <a:solidFill>
                   <a:srgbClr val="000000"/>
                 </a:solidFill>
@@ -25426,14 +25426,14 @@
           </a:ln>
           <a:extLst>
             <a:ext uri="{909E8E84-426E-40dd-AFC4-6F175D3DCCD1}">
-              <a14:hiddenFill xmlns:a14="http://schemas.microsoft.com/office/drawing/2010/main" xmlns="">
+              <a14:hiddenFill xmlns="" xmlns:a14="http://schemas.microsoft.com/office/drawing/2010/main">
                 <a:solidFill>
                   <a:srgbClr val="FFFFFF"/>
                 </a:solidFill>
               </a14:hiddenFill>
             </a:ext>
             <a:ext uri="{91240B29-F687-4f45-9708-019B960494DF}">
-              <a14:hiddenLine xmlns:a14="http://schemas.microsoft.com/office/drawing/2010/main" xmlns="" w="12700" cap="sq">
+              <a14:hiddenLine xmlns="" xmlns:a14="http://schemas.microsoft.com/office/drawing/2010/main" w="12700" cap="sq">
                 <a:solidFill>
                   <a:srgbClr val="000000"/>
                 </a:solidFill>
@@ -25596,7 +25596,7 @@
           </a:ln>
           <a:extLst>
             <a:ext uri="{91240B29-F687-4f45-9708-019B960494DF}">
-              <a14:hiddenLine xmlns:a14="http://schemas.microsoft.com/office/drawing/2010/main" xmlns="" w="12700" cap="sq">
+              <a14:hiddenLine xmlns="" xmlns:a14="http://schemas.microsoft.com/office/drawing/2010/main" w="12700" cap="sq">
                 <a:solidFill>
                   <a:srgbClr val="000000"/>
                 </a:solidFill>
@@ -25780,7 +25780,7 @@
           </a:ln>
           <a:extLst>
             <a:ext uri="{909E8E84-426E-40dd-AFC4-6F175D3DCCD1}">
-              <a14:hiddenFill xmlns:a14="http://schemas.microsoft.com/office/drawing/2010/main" xmlns="">
+              <a14:hiddenFill xmlns="" xmlns:a14="http://schemas.microsoft.com/office/drawing/2010/main">
                 <a:solidFill>
                   <a:srgbClr val="FFFFFF"/>
                 </a:solidFill>
@@ -26094,14 +26094,14 @@
           <a:ln/>
           <a:extLst>
             <a:ext uri="{909E8E84-426E-40dd-AFC4-6F175D3DCCD1}">
-              <a14:hiddenFill xmlns:a14="http://schemas.microsoft.com/office/drawing/2010/main" xmlns="">
+              <a14:hiddenFill xmlns="" xmlns:a14="http://schemas.microsoft.com/office/drawing/2010/main">
                 <a:solidFill>
                   <a:srgbClr val="FFFFFF"/>
                 </a:solidFill>
               </a14:hiddenFill>
             </a:ext>
             <a:ext uri="{91240B29-F687-4f45-9708-019B960494DF}">
-              <a14:hiddenLine xmlns:a14="http://schemas.microsoft.com/office/drawing/2010/main" xmlns="" w="9525">
+              <a14:hiddenLine xmlns="" xmlns:a14="http://schemas.microsoft.com/office/drawing/2010/main" w="9525">
                 <a:solidFill>
                   <a:srgbClr val="000000"/>
                 </a:solidFill>
@@ -26254,14 +26254,14 @@
           </a:ln>
           <a:extLst>
             <a:ext uri="{909E8E84-426E-40dd-AFC4-6F175D3DCCD1}">
-              <a14:hiddenFill xmlns:a14="http://schemas.microsoft.com/office/drawing/2010/main" xmlns="">
+              <a14:hiddenFill xmlns="" xmlns:a14="http://schemas.microsoft.com/office/drawing/2010/main">
                 <a:solidFill>
                   <a:srgbClr val="FFFFFF"/>
                 </a:solidFill>
               </a14:hiddenFill>
             </a:ext>
             <a:ext uri="{91240B29-F687-4f45-9708-019B960494DF}">
-              <a14:hiddenLine xmlns:a14="http://schemas.microsoft.com/office/drawing/2010/main" xmlns="" w="12700" cap="sq">
+              <a14:hiddenLine xmlns="" xmlns:a14="http://schemas.microsoft.com/office/drawing/2010/main" w="12700" cap="sq">
                 <a:solidFill>
                   <a:srgbClr val="000000"/>
                 </a:solidFill>
@@ -26416,14 +26416,14 @@
           </a:ln>
           <a:extLst>
             <a:ext uri="{909E8E84-426E-40dd-AFC4-6F175D3DCCD1}">
-              <a14:hiddenFill xmlns:a14="http://schemas.microsoft.com/office/drawing/2010/main" xmlns="">
+              <a14:hiddenFill xmlns="" xmlns:a14="http://schemas.microsoft.com/office/drawing/2010/main">
                 <a:solidFill>
                   <a:srgbClr val="FFFFFF"/>
                 </a:solidFill>
               </a14:hiddenFill>
             </a:ext>
             <a:ext uri="{91240B29-F687-4f45-9708-019B960494DF}">
-              <a14:hiddenLine xmlns:a14="http://schemas.microsoft.com/office/drawing/2010/main" xmlns="" w="9525">
+              <a14:hiddenLine xmlns="" xmlns:a14="http://schemas.microsoft.com/office/drawing/2010/main" w="9525">
                 <a:solidFill>
                   <a:srgbClr val="000000"/>
                 </a:solidFill>
@@ -26539,7 +26539,7 @@
           </a:ln>
           <a:extLst>
             <a:ext uri="{91240B29-F687-4f45-9708-019B960494DF}">
-              <a14:hiddenLine xmlns:a14="http://schemas.microsoft.com/office/drawing/2010/main" xmlns="" w="12700" cap="sq">
+              <a14:hiddenLine xmlns="" xmlns:a14="http://schemas.microsoft.com/office/drawing/2010/main" w="12700" cap="sq">
                 <a:solidFill>
                   <a:srgbClr val="000000"/>
                 </a:solidFill>
@@ -27129,14 +27129,14 @@
           <a:ln/>
           <a:extLst>
             <a:ext uri="{909E8E84-426E-40dd-AFC4-6F175D3DCCD1}">
-              <a14:hiddenFill xmlns:a14="http://schemas.microsoft.com/office/drawing/2010/main" xmlns="">
+              <a14:hiddenFill xmlns="" xmlns:a14="http://schemas.microsoft.com/office/drawing/2010/main">
                 <a:solidFill>
                   <a:srgbClr val="FFFFFF"/>
                 </a:solidFill>
               </a14:hiddenFill>
             </a:ext>
             <a:ext uri="{91240B29-F687-4f45-9708-019B960494DF}">
-              <a14:hiddenLine xmlns:a14="http://schemas.microsoft.com/office/drawing/2010/main" xmlns="" w="9525">
+              <a14:hiddenLine xmlns="" xmlns:a14="http://schemas.microsoft.com/office/drawing/2010/main" w="9525">
                 <a:solidFill>
                   <a:srgbClr val="000000"/>
                 </a:solidFill>
@@ -27289,14 +27289,14 @@
           </a:ln>
           <a:extLst>
             <a:ext uri="{909E8E84-426E-40dd-AFC4-6F175D3DCCD1}">
-              <a14:hiddenFill xmlns:a14="http://schemas.microsoft.com/office/drawing/2010/main" xmlns="">
+              <a14:hiddenFill xmlns="" xmlns:a14="http://schemas.microsoft.com/office/drawing/2010/main">
                 <a:solidFill>
                   <a:srgbClr val="FFFFFF"/>
                 </a:solidFill>
               </a14:hiddenFill>
             </a:ext>
             <a:ext uri="{91240B29-F687-4f45-9708-019B960494DF}">
-              <a14:hiddenLine xmlns:a14="http://schemas.microsoft.com/office/drawing/2010/main" xmlns="" w="9525">
+              <a14:hiddenLine xmlns="" xmlns:a14="http://schemas.microsoft.com/office/drawing/2010/main" w="9525">
                 <a:solidFill>
                   <a:srgbClr val="000000"/>
                 </a:solidFill>
@@ -27362,7 +27362,7 @@
           </a:ln>
           <a:extLst>
             <a:ext uri="{91240B29-F687-4f45-9708-019B960494DF}">
-              <a14:hiddenLine xmlns:a14="http://schemas.microsoft.com/office/drawing/2010/main" xmlns="" w="12700" cap="sq">
+              <a14:hiddenLine xmlns="" xmlns:a14="http://schemas.microsoft.com/office/drawing/2010/main" w="12700" cap="sq">
                 <a:solidFill>
                   <a:srgbClr val="000000"/>
                 </a:solidFill>
@@ -27568,14 +27568,14 @@
           </a:ln>
           <a:extLst>
             <a:ext uri="{909E8E84-426E-40dd-AFC4-6F175D3DCCD1}">
-              <a14:hiddenFill xmlns:a14="http://schemas.microsoft.com/office/drawing/2010/main" xmlns="">
+              <a14:hiddenFill xmlns="" xmlns:a14="http://schemas.microsoft.com/office/drawing/2010/main">
                 <a:solidFill>
                   <a:srgbClr val="FFFFFF"/>
                 </a:solidFill>
               </a14:hiddenFill>
             </a:ext>
             <a:ext uri="{91240B29-F687-4f45-9708-019B960494DF}">
-              <a14:hiddenLine xmlns:a14="http://schemas.microsoft.com/office/drawing/2010/main" xmlns="" w="9525">
+              <a14:hiddenLine xmlns="" xmlns:a14="http://schemas.microsoft.com/office/drawing/2010/main" w="9525">
                 <a:solidFill>
                   <a:srgbClr val="000000"/>
                 </a:solidFill>
@@ -28729,14 +28729,14 @@
           <a:ln/>
           <a:extLst>
             <a:ext uri="{909E8E84-426E-40dd-AFC4-6F175D3DCCD1}">
-              <a14:hiddenFill xmlns:a14="http://schemas.microsoft.com/office/drawing/2010/main" xmlns="">
+              <a14:hiddenFill xmlns="" xmlns:a14="http://schemas.microsoft.com/office/drawing/2010/main">
                 <a:solidFill>
                   <a:srgbClr val="FFFFFF"/>
                 </a:solidFill>
               </a14:hiddenFill>
             </a:ext>
             <a:ext uri="{91240B29-F687-4f45-9708-019B960494DF}">
-              <a14:hiddenLine xmlns:a14="http://schemas.microsoft.com/office/drawing/2010/main" xmlns="" w="9525">
+              <a14:hiddenLine xmlns="" xmlns:a14="http://schemas.microsoft.com/office/drawing/2010/main" w="9525">
                 <a:solidFill>
                   <a:srgbClr val="000000"/>
                 </a:solidFill>
@@ -28893,7 +28893,7 @@
           </a:ln>
           <a:extLst>
             <a:ext uri="{91240B29-F687-4f45-9708-019B960494DF}">
-              <a14:hiddenLine xmlns:a14="http://schemas.microsoft.com/office/drawing/2010/main" xmlns="" w="12700" cap="sq">
+              <a14:hiddenLine xmlns="" xmlns:a14="http://schemas.microsoft.com/office/drawing/2010/main" w="12700" cap="sq">
                 <a:solidFill>
                   <a:srgbClr val="000000"/>
                 </a:solidFill>
@@ -29099,14 +29099,14 @@
           </a:ln>
           <a:extLst>
             <a:ext uri="{909E8E84-426E-40dd-AFC4-6F175D3DCCD1}">
-              <a14:hiddenFill xmlns:a14="http://schemas.microsoft.com/office/drawing/2010/main" xmlns="">
+              <a14:hiddenFill xmlns="" xmlns:a14="http://schemas.microsoft.com/office/drawing/2010/main">
                 <a:solidFill>
                   <a:srgbClr val="FFFFFF"/>
                 </a:solidFill>
               </a14:hiddenFill>
             </a:ext>
             <a:ext uri="{91240B29-F687-4f45-9708-019B960494DF}">
-              <a14:hiddenLine xmlns:a14="http://schemas.microsoft.com/office/drawing/2010/main" xmlns="" w="9525">
+              <a14:hiddenLine xmlns="" xmlns:a14="http://schemas.microsoft.com/office/drawing/2010/main" w="9525">
                 <a:solidFill>
                   <a:srgbClr val="000000"/>
                 </a:solidFill>
@@ -29171,7 +29171,7 @@
           </a:ln>
           <a:extLst>
             <a:ext uri="{909E8E84-426E-40dd-AFC4-6F175D3DCCD1}">
-              <a14:hiddenFill xmlns:a14="http://schemas.microsoft.com/office/drawing/2010/main" xmlns="">
+              <a14:hiddenFill xmlns="" xmlns:a14="http://schemas.microsoft.com/office/drawing/2010/main">
                 <a:solidFill>
                   <a:srgbClr val="FFFFFF"/>
                 </a:solidFill>
@@ -29230,7 +29230,7 @@
           </a:ln>
           <a:extLst>
             <a:ext uri="{909E8E84-426E-40dd-AFC4-6F175D3DCCD1}">
-              <a14:hiddenFill xmlns:a14="http://schemas.microsoft.com/office/drawing/2010/main" xmlns="">
+              <a14:hiddenFill xmlns="" xmlns:a14="http://schemas.microsoft.com/office/drawing/2010/main">
                 <a:noFill/>
               </a14:hiddenFill>
             </a:ext>
@@ -29273,7 +29273,7 @@
           </a:ln>
           <a:extLst>
             <a:ext uri="{909E8E84-426E-40dd-AFC4-6F175D3DCCD1}">
-              <a14:hiddenFill xmlns:a14="http://schemas.microsoft.com/office/drawing/2010/main" xmlns="">
+              <a14:hiddenFill xmlns="" xmlns:a14="http://schemas.microsoft.com/office/drawing/2010/main">
                 <a:noFill/>
               </a14:hiddenFill>
             </a:ext>
@@ -29316,7 +29316,7 @@
           </a:ln>
           <a:extLst>
             <a:ext uri="{909E8E84-426E-40dd-AFC4-6F175D3DCCD1}">
-              <a14:hiddenFill xmlns:a14="http://schemas.microsoft.com/office/drawing/2010/main" xmlns="">
+              <a14:hiddenFill xmlns="" xmlns:a14="http://schemas.microsoft.com/office/drawing/2010/main">
                 <a:noFill/>
               </a14:hiddenFill>
             </a:ext>
@@ -29359,7 +29359,7 @@
           </a:ln>
           <a:extLst>
             <a:ext uri="{909E8E84-426E-40dd-AFC4-6F175D3DCCD1}">
-              <a14:hiddenFill xmlns:a14="http://schemas.microsoft.com/office/drawing/2010/main" xmlns="">
+              <a14:hiddenFill xmlns="" xmlns:a14="http://schemas.microsoft.com/office/drawing/2010/main">
                 <a:noFill/>
               </a14:hiddenFill>
             </a:ext>
@@ -29402,7 +29402,7 @@
           </a:ln>
           <a:extLst>
             <a:ext uri="{909E8E84-426E-40dd-AFC4-6F175D3DCCD1}">
-              <a14:hiddenFill xmlns:a14="http://schemas.microsoft.com/office/drawing/2010/main" xmlns="">
+              <a14:hiddenFill xmlns="" xmlns:a14="http://schemas.microsoft.com/office/drawing/2010/main">
                 <a:noFill/>
               </a14:hiddenFill>
             </a:ext>
@@ -29445,7 +29445,7 @@
           </a:ln>
           <a:extLst>
             <a:ext uri="{909E8E84-426E-40dd-AFC4-6F175D3DCCD1}">
-              <a14:hiddenFill xmlns:a14="http://schemas.microsoft.com/office/drawing/2010/main" xmlns="">
+              <a14:hiddenFill xmlns="" xmlns:a14="http://schemas.microsoft.com/office/drawing/2010/main">
                 <a:noFill/>
               </a14:hiddenFill>
             </a:ext>
@@ -29488,7 +29488,7 @@
           </a:ln>
           <a:extLst>
             <a:ext uri="{909E8E84-426E-40dd-AFC4-6F175D3DCCD1}">
-              <a14:hiddenFill xmlns:a14="http://schemas.microsoft.com/office/drawing/2010/main" xmlns="">
+              <a14:hiddenFill xmlns="" xmlns:a14="http://schemas.microsoft.com/office/drawing/2010/main">
                 <a:noFill/>
               </a14:hiddenFill>
             </a:ext>
@@ -29531,7 +29531,7 @@
           </a:ln>
           <a:extLst>
             <a:ext uri="{909E8E84-426E-40dd-AFC4-6F175D3DCCD1}">
-              <a14:hiddenFill xmlns:a14="http://schemas.microsoft.com/office/drawing/2010/main" xmlns="">
+              <a14:hiddenFill xmlns="" xmlns:a14="http://schemas.microsoft.com/office/drawing/2010/main">
                 <a:noFill/>
               </a14:hiddenFill>
             </a:ext>
@@ -29574,7 +29574,7 @@
           </a:ln>
           <a:extLst>
             <a:ext uri="{909E8E84-426E-40dd-AFC4-6F175D3DCCD1}">
-              <a14:hiddenFill xmlns:a14="http://schemas.microsoft.com/office/drawing/2010/main" xmlns="">
+              <a14:hiddenFill xmlns="" xmlns:a14="http://schemas.microsoft.com/office/drawing/2010/main">
                 <a:noFill/>
               </a14:hiddenFill>
             </a:ext>
@@ -29617,7 +29617,7 @@
           </a:ln>
           <a:extLst>
             <a:ext uri="{909E8E84-426E-40dd-AFC4-6F175D3DCCD1}">
-              <a14:hiddenFill xmlns:a14="http://schemas.microsoft.com/office/drawing/2010/main" xmlns="">
+              <a14:hiddenFill xmlns="" xmlns:a14="http://schemas.microsoft.com/office/drawing/2010/main">
                 <a:noFill/>
               </a14:hiddenFill>
             </a:ext>
@@ -29660,7 +29660,7 @@
           </a:ln>
           <a:extLst>
             <a:ext uri="{909E8E84-426E-40dd-AFC4-6F175D3DCCD1}">
-              <a14:hiddenFill xmlns:a14="http://schemas.microsoft.com/office/drawing/2010/main" xmlns="">
+              <a14:hiddenFill xmlns="" xmlns:a14="http://schemas.microsoft.com/office/drawing/2010/main">
                 <a:noFill/>
               </a14:hiddenFill>
             </a:ext>
@@ -29703,7 +29703,7 @@
           </a:ln>
           <a:extLst>
             <a:ext uri="{909E8E84-426E-40dd-AFC4-6F175D3DCCD1}">
-              <a14:hiddenFill xmlns:a14="http://schemas.microsoft.com/office/drawing/2010/main" xmlns="">
+              <a14:hiddenFill xmlns="" xmlns:a14="http://schemas.microsoft.com/office/drawing/2010/main">
                 <a:noFill/>
               </a14:hiddenFill>
             </a:ext>
@@ -31011,14 +31011,14 @@
           <a:ln/>
           <a:extLst>
             <a:ext uri="{909E8E84-426E-40dd-AFC4-6F175D3DCCD1}">
-              <a14:hiddenFill xmlns:a14="http://schemas.microsoft.com/office/drawing/2010/main" xmlns="">
+              <a14:hiddenFill xmlns="" xmlns:a14="http://schemas.microsoft.com/office/drawing/2010/main">
                 <a:solidFill>
                   <a:srgbClr val="FFFFFF"/>
                 </a:solidFill>
               </a14:hiddenFill>
             </a:ext>
             <a:ext uri="{91240B29-F687-4f45-9708-019B960494DF}">
-              <a14:hiddenLine xmlns:a14="http://schemas.microsoft.com/office/drawing/2010/main" xmlns="" w="9525">
+              <a14:hiddenLine xmlns="" xmlns:a14="http://schemas.microsoft.com/office/drawing/2010/main" w="9525">
                 <a:solidFill>
                   <a:srgbClr val="000000"/>
                 </a:solidFill>
@@ -31171,14 +31171,14 @@
           </a:ln>
           <a:extLst>
             <a:ext uri="{909E8E84-426E-40dd-AFC4-6F175D3DCCD1}">
-              <a14:hiddenFill xmlns:a14="http://schemas.microsoft.com/office/drawing/2010/main" xmlns="">
+              <a14:hiddenFill xmlns="" xmlns:a14="http://schemas.microsoft.com/office/drawing/2010/main">
                 <a:solidFill>
                   <a:srgbClr val="FFFFFF"/>
                 </a:solidFill>
               </a14:hiddenFill>
             </a:ext>
             <a:ext uri="{91240B29-F687-4f45-9708-019B960494DF}">
-              <a14:hiddenLine xmlns:a14="http://schemas.microsoft.com/office/drawing/2010/main" xmlns="" w="12700" cap="sq">
+              <a14:hiddenLine xmlns="" xmlns:a14="http://schemas.microsoft.com/office/drawing/2010/main" w="12700" cap="sq">
                 <a:solidFill>
                   <a:srgbClr val="000000"/>
                 </a:solidFill>
@@ -31343,7 +31343,7 @@
           </a:ln>
           <a:extLst>
             <a:ext uri="{91240B29-F687-4f45-9708-019B960494DF}">
-              <a14:hiddenLine xmlns:a14="http://schemas.microsoft.com/office/drawing/2010/main" xmlns="" w="12700" cap="sq">
+              <a14:hiddenLine xmlns="" xmlns:a14="http://schemas.microsoft.com/office/drawing/2010/main" w="12700" cap="sq">
                 <a:solidFill>
                   <a:srgbClr val="000000"/>
                 </a:solidFill>
@@ -31552,7 +31552,7 @@
           </a:ln>
           <a:extLst>
             <a:ext uri="{909E8E84-426E-40dd-AFC4-6F175D3DCCD1}">
-              <a14:hiddenFill xmlns:a14="http://schemas.microsoft.com/office/drawing/2010/main" xmlns="">
+              <a14:hiddenFill xmlns="" xmlns:a14="http://schemas.microsoft.com/office/drawing/2010/main">
                 <a:solidFill>
                   <a:srgbClr val="FFFFFF"/>
                 </a:solidFill>
@@ -31877,14 +31877,14 @@
           <a:ln/>
           <a:extLst>
             <a:ext uri="{909E8E84-426E-40dd-AFC4-6F175D3DCCD1}">
-              <a14:hiddenFill xmlns:a14="http://schemas.microsoft.com/office/drawing/2010/main" xmlns="">
+              <a14:hiddenFill xmlns="" xmlns:a14="http://schemas.microsoft.com/office/drawing/2010/main">
                 <a:solidFill>
                   <a:srgbClr val="FFFFFF"/>
                 </a:solidFill>
               </a14:hiddenFill>
             </a:ext>
             <a:ext uri="{91240B29-F687-4f45-9708-019B960494DF}">
-              <a14:hiddenLine xmlns:a14="http://schemas.microsoft.com/office/drawing/2010/main" xmlns="" w="9525">
+              <a14:hiddenLine xmlns="" xmlns:a14="http://schemas.microsoft.com/office/drawing/2010/main" w="9525">
                 <a:solidFill>
                   <a:srgbClr val="000000"/>
                 </a:solidFill>
@@ -32037,14 +32037,14 @@
           </a:ln>
           <a:extLst>
             <a:ext uri="{909E8E84-426E-40dd-AFC4-6F175D3DCCD1}">
-              <a14:hiddenFill xmlns:a14="http://schemas.microsoft.com/office/drawing/2010/main" xmlns="">
+              <a14:hiddenFill xmlns="" xmlns:a14="http://schemas.microsoft.com/office/drawing/2010/main">
                 <a:solidFill>
                   <a:srgbClr val="FFFFFF"/>
                 </a:solidFill>
               </a14:hiddenFill>
             </a:ext>
             <a:ext uri="{91240B29-F687-4f45-9708-019B960494DF}">
-              <a14:hiddenLine xmlns:a14="http://schemas.microsoft.com/office/drawing/2010/main" xmlns="" w="12700" cap="sq">
+              <a14:hiddenLine xmlns="" xmlns:a14="http://schemas.microsoft.com/office/drawing/2010/main" w="12700" cap="sq">
                 <a:solidFill>
                   <a:srgbClr val="000000"/>
                 </a:solidFill>
@@ -32217,7 +32217,7 @@
           </a:ln>
           <a:extLst>
             <a:ext uri="{91240B29-F687-4f45-9708-019B960494DF}">
-              <a14:hiddenLine xmlns:a14="http://schemas.microsoft.com/office/drawing/2010/main" xmlns="" w="12700" cap="sq">
+              <a14:hiddenLine xmlns="" xmlns:a14="http://schemas.microsoft.com/office/drawing/2010/main" w="12700" cap="sq">
                 <a:solidFill>
                   <a:srgbClr val="000000"/>
                 </a:solidFill>
@@ -32507,14 +32507,14 @@
           </a:ln>
           <a:extLst>
             <a:ext uri="{909E8E84-426E-40dd-AFC4-6F175D3DCCD1}">
-              <a14:hiddenFill xmlns:a14="http://schemas.microsoft.com/office/drawing/2010/main" xmlns="">
+              <a14:hiddenFill xmlns="" xmlns:a14="http://schemas.microsoft.com/office/drawing/2010/main">
                 <a:solidFill>
                   <a:srgbClr val="FFFFFF"/>
                 </a:solidFill>
               </a14:hiddenFill>
             </a:ext>
             <a:ext uri="{91240B29-F687-4f45-9708-019B960494DF}">
-              <a14:hiddenLine xmlns:a14="http://schemas.microsoft.com/office/drawing/2010/main" xmlns="" w="12700" cap="sq">
+              <a14:hiddenLine xmlns="" xmlns:a14="http://schemas.microsoft.com/office/drawing/2010/main" w="12700" cap="sq">
                 <a:solidFill>
                   <a:srgbClr val="000000"/>
                 </a:solidFill>
@@ -32671,7 +32671,7 @@
           </a:ln>
           <a:extLst>
             <a:ext uri="{91240B29-F687-4f45-9708-019B960494DF}">
-              <a14:hiddenLine xmlns:a14="http://schemas.microsoft.com/office/drawing/2010/main" xmlns="" w="12700" cap="sq">
+              <a14:hiddenLine xmlns="" xmlns:a14="http://schemas.microsoft.com/office/drawing/2010/main" w="12700" cap="sq">
                 <a:solidFill>
                   <a:srgbClr val="000000"/>
                 </a:solidFill>
@@ -33197,14 +33197,14 @@
           <a:ln/>
           <a:extLst>
             <a:ext uri="{909E8E84-426E-40dd-AFC4-6F175D3DCCD1}">
-              <a14:hiddenFill xmlns:a14="http://schemas.microsoft.com/office/drawing/2010/main" xmlns="">
+              <a14:hiddenFill xmlns="" xmlns:a14="http://schemas.microsoft.com/office/drawing/2010/main">
                 <a:solidFill>
                   <a:srgbClr val="FFFFFF"/>
                 </a:solidFill>
               </a14:hiddenFill>
             </a:ext>
             <a:ext uri="{91240B29-F687-4f45-9708-019B960494DF}">
-              <a14:hiddenLine xmlns:a14="http://schemas.microsoft.com/office/drawing/2010/main" xmlns="" w="9525">
+              <a14:hiddenLine xmlns="" xmlns:a14="http://schemas.microsoft.com/office/drawing/2010/main" w="9525">
                 <a:solidFill>
                   <a:srgbClr val="000000"/>
                 </a:solidFill>
@@ -33357,14 +33357,14 @@
           </a:ln>
           <a:extLst>
             <a:ext uri="{909E8E84-426E-40dd-AFC4-6F175D3DCCD1}">
-              <a14:hiddenFill xmlns:a14="http://schemas.microsoft.com/office/drawing/2010/main" xmlns="">
+              <a14:hiddenFill xmlns="" xmlns:a14="http://schemas.microsoft.com/office/drawing/2010/main">
                 <a:solidFill>
                   <a:srgbClr val="FFFFFF"/>
                 </a:solidFill>
               </a14:hiddenFill>
             </a:ext>
             <a:ext uri="{91240B29-F687-4f45-9708-019B960494DF}">
-              <a14:hiddenLine xmlns:a14="http://schemas.microsoft.com/office/drawing/2010/main" xmlns="" w="12700" cap="sq">
+              <a14:hiddenLine xmlns="" xmlns:a14="http://schemas.microsoft.com/office/drawing/2010/main" w="12700" cap="sq">
                 <a:solidFill>
                   <a:srgbClr val="000000"/>
                 </a:solidFill>
@@ -33529,7 +33529,7 @@
           </a:ln>
           <a:extLst>
             <a:ext uri="{91240B29-F687-4f45-9708-019B960494DF}">
-              <a14:hiddenLine xmlns:a14="http://schemas.microsoft.com/office/drawing/2010/main" xmlns="" w="12700" cap="sq">
+              <a14:hiddenLine xmlns="" xmlns:a14="http://schemas.microsoft.com/office/drawing/2010/main" w="12700" cap="sq">
                 <a:solidFill>
                   <a:srgbClr val="000000"/>
                 </a:solidFill>
@@ -33716,7 +33716,7 @@
           </a:ln>
           <a:extLst>
             <a:ext uri="{909E8E84-426E-40dd-AFC4-6F175D3DCCD1}">
-              <a14:hiddenFill xmlns:a14="http://schemas.microsoft.com/office/drawing/2010/main" xmlns="">
+              <a14:hiddenFill xmlns="" xmlns:a14="http://schemas.microsoft.com/office/drawing/2010/main">
                 <a:solidFill>
                   <a:srgbClr val="FFFFFF"/>
                 </a:solidFill>
